--- a/GitHub上传教程.pptx
+++ b/GitHub上传教程.pptx
@@ -18,6 +18,7 @@
     <p:sldId id="266" r:id="rId17"/>
     <p:sldId id="267" r:id="rId18"/>
     <p:sldId id="268" r:id="rId19"/>
+    <p:sldId id="269" r:id="rId20"/>
   </p:sldIdLst>
   <p:sldSz cx="12191695" cy="6858000" type="screen4x3"/>
   <p:notesSz cx="6858000" cy="9144000"/>
@@ -3159,7 +3160,7 @@
         </p:nvSpPr>
         <p:spPr>
           <a:xfrm>
-            <a:off x="914400" y="914400"/>
+            <a:off x="914400" y="1097280"/>
             <a:ext cx="10058400" cy="1097280"/>
           </a:xfrm>
           <a:prstGeom prst="rect">
@@ -3174,7 +3175,7 @@
           <a:lstStyle/>
           <a:p>
             <a:pPr algn="ctr">
-              <a:defRPr sz="4400" b="1">
+              <a:defRPr sz="4000" b="1">
                 <a:solidFill>
                   <a:srgbClr val="1F2328"/>
                 </a:solidFill>
@@ -3182,7 +3183,7 @@
               </a:defRPr>
             </a:pPr>
             <a:r>
-              <a:t>📤 上传 Chrome 扩展到 GitHub</a:t>
+              <a:t>📤 上传「关键词放大镜」到 GitHub</a:t>
             </a:r>
           </a:p>
         </p:txBody>
@@ -3195,7 +3196,7 @@
         </p:nvSpPr>
         <p:spPr>
           <a:xfrm>
-            <a:off x="914400" y="2194560"/>
+            <a:off x="914400" y="2377440"/>
             <a:ext cx="10058400" cy="548640"/>
           </a:xfrm>
           <a:prstGeom prst="rect">
@@ -3231,8 +3232,8 @@
         </p:nvSpPr>
         <p:spPr>
           <a:xfrm>
-            <a:off x="914400" y="3017520"/>
-            <a:ext cx="10058400" cy="548640"/>
+            <a:off x="914400" y="3108960"/>
+            <a:ext cx="10058400" cy="457200"/>
           </a:xfrm>
           <a:prstGeom prst="rect">
             <a:avLst/>
@@ -3246,7 +3247,7 @@
           <a:lstStyle/>
           <a:p>
             <a:pPr algn="ctr">
-              <a:defRPr sz="1800" b="0">
+              <a:defRPr sz="1600" b="0">
                 <a:solidFill>
                   <a:srgbClr val="FD8C73"/>
                 </a:solidFill>
@@ -3254,7 +3255,7 @@
               </a:defRPr>
             </a:pPr>
             <a:r>
-              <a:t>「关键词放大镜」Chrome 扩展 — 上传全流程</a:t>
+              <a:t>以你正在用的这个插件为例演示</a:t>
             </a:r>
           </a:p>
         </p:txBody>
@@ -3267,8 +3268,8 @@
         </p:nvSpPr>
         <p:spPr>
           <a:xfrm>
-            <a:off x="731520" y="4572000"/>
-            <a:ext cx="1645920" cy="594360"/>
+            <a:off x="1371600" y="4754880"/>
+            <a:ext cx="2011680" cy="548640"/>
           </a:xfrm>
           <a:prstGeom prst="roundRect">
             <a:avLst/>
@@ -3299,7 +3300,7 @@
           <a:lstStyle/>
           <a:p>
             <a:pPr algn="ctr">
-              <a:defRPr sz="1300">
+              <a:defRPr sz="1400">
                 <a:solidFill>
                   <a:srgbClr val="FFFFFF"/>
                 </a:solidFill>
@@ -3307,7 +3308,7 @@
               </a:defRPr>
             </a:pPr>
             <a:r>
-              <a:t>① 注册账号</a:t>
+              <a:t>① 注册</a:t>
             </a:r>
           </a:p>
         </p:txBody>
@@ -3320,14 +3321,14 @@
         </p:nvSpPr>
         <p:spPr>
           <a:xfrm>
-            <a:off x="2651760" y="4572000"/>
-            <a:ext cx="1645920" cy="594360"/>
+            <a:off x="3931920" y="4754880"/>
+            <a:ext cx="2011680" cy="548640"/>
           </a:xfrm>
           <a:prstGeom prst="roundRect">
             <a:avLst/>
           </a:prstGeom>
           <a:solidFill>
-            <a:srgbClr val="E8ECF0"/>
+            <a:srgbClr val="FFFFFF"/>
           </a:solidFill>
           <a:ln>
             <a:noFill/>
@@ -3352,7 +3353,7 @@
           <a:lstStyle/>
           <a:p>
             <a:pPr algn="ctr">
-              <a:defRPr sz="1300">
+              <a:defRPr sz="1400">
                 <a:solidFill>
                   <a:srgbClr val="1F2328"/>
                 </a:solidFill>
@@ -3360,7 +3361,7 @@
               </a:defRPr>
             </a:pPr>
             <a:r>
-              <a:t>② 登录</a:t>
+              <a:t>② 创建仓库</a:t>
             </a:r>
           </a:p>
         </p:txBody>
@@ -3373,14 +3374,14 @@
         </p:nvSpPr>
         <p:spPr>
           <a:xfrm>
-            <a:off x="4572000" y="4572000"/>
-            <a:ext cx="1645920" cy="594360"/>
+            <a:off x="6492240" y="4754880"/>
+            <a:ext cx="2011680" cy="548640"/>
           </a:xfrm>
           <a:prstGeom prst="roundRect">
             <a:avLst/>
           </a:prstGeom>
           <a:solidFill>
-            <a:srgbClr val="E8ECF0"/>
+            <a:srgbClr val="FFFFFF"/>
           </a:solidFill>
           <a:ln>
             <a:noFill/>
@@ -3405,7 +3406,7 @@
           <a:lstStyle/>
           <a:p>
             <a:pPr algn="ctr">
-              <a:defRPr sz="1300">
+              <a:defRPr sz="1400">
                 <a:solidFill>
                   <a:srgbClr val="1F2328"/>
                 </a:solidFill>
@@ -3413,7 +3414,7 @@
               </a:defRPr>
             </a:pPr>
             <a:r>
-              <a:t>③ 创建仓库</a:t>
+              <a:t>③ 上传</a:t>
             </a:r>
           </a:p>
         </p:txBody>
@@ -3426,14 +3427,14 @@
         </p:nvSpPr>
         <p:spPr>
           <a:xfrm>
-            <a:off x="6492240" y="4572000"/>
-            <a:ext cx="1645920" cy="594360"/>
+            <a:off x="9052559" y="4754880"/>
+            <a:ext cx="2011680" cy="548640"/>
           </a:xfrm>
           <a:prstGeom prst="roundRect">
             <a:avLst/>
           </a:prstGeom>
           <a:solidFill>
-            <a:srgbClr val="E8ECF0"/>
+            <a:srgbClr val="FFFFFF"/>
           </a:solidFill>
           <a:ln>
             <a:noFill/>
@@ -3458,7 +3459,7 @@
           <a:lstStyle/>
           <a:p>
             <a:pPr algn="ctr">
-              <a:defRPr sz="1300">
+              <a:defRPr sz="1400">
                 <a:solidFill>
                   <a:srgbClr val="1F2328"/>
                 </a:solidFill>
@@ -3466,113 +3467,7 @@
               </a:defRPr>
             </a:pPr>
             <a:r>
-              <a:t>④ 填写信息</a:t>
-            </a:r>
-          </a:p>
-        </p:txBody>
-      </p:sp>
-      <p:sp>
-        <p:nvSpPr>
-          <p:cNvPr id="10" name="Rounded Rectangle 9"/>
-          <p:cNvSpPr/>
-          <p:nvPr/>
-        </p:nvSpPr>
-        <p:spPr>
-          <a:xfrm>
-            <a:off x="8412480" y="4572000"/>
-            <a:ext cx="1645920" cy="594360"/>
-          </a:xfrm>
-          <a:prstGeom prst="roundRect">
-            <a:avLst/>
-          </a:prstGeom>
-          <a:solidFill>
-            <a:srgbClr val="E8ECF0"/>
-          </a:solidFill>
-          <a:ln>
-            <a:noFill/>
-          </a:ln>
-        </p:spPr>
-        <p:style>
-          <a:lnRef idx="1">
-            <a:schemeClr val="accent1"/>
-          </a:lnRef>
-          <a:fillRef idx="3">
-            <a:schemeClr val="accent1"/>
-          </a:fillRef>
-          <a:effectRef idx="2">
-            <a:schemeClr val="accent1"/>
-          </a:effectRef>
-          <a:fontRef idx="minor">
-            <a:schemeClr val="lt1"/>
-          </a:fontRef>
-        </p:style>
-        <p:txBody>
-          <a:bodyPr rtlCol="0" anchor="ctr"/>
-          <a:lstStyle/>
-          <a:p>
-            <a:pPr algn="ctr">
-              <a:defRPr sz="1300">
-                <a:solidFill>
-                  <a:srgbClr val="1F2328"/>
-                </a:solidFill>
-                <a:latin typeface="Microsoft YaHei"/>
-              </a:defRPr>
-            </a:pPr>
-            <a:r>
-              <a:t>⑤ 执行命令</a:t>
-            </a:r>
-          </a:p>
-        </p:txBody>
-      </p:sp>
-      <p:sp>
-        <p:nvSpPr>
-          <p:cNvPr id="11" name="Rounded Rectangle 10"/>
-          <p:cNvSpPr/>
-          <p:nvPr/>
-        </p:nvSpPr>
-        <p:spPr>
-          <a:xfrm>
-            <a:off x="10332720" y="4572000"/>
-            <a:ext cx="1645920" cy="594360"/>
-          </a:xfrm>
-          <a:prstGeom prst="roundRect">
-            <a:avLst/>
-          </a:prstGeom>
-          <a:solidFill>
-            <a:srgbClr val="E8ECF0"/>
-          </a:solidFill>
-          <a:ln>
-            <a:noFill/>
-          </a:ln>
-        </p:spPr>
-        <p:style>
-          <a:lnRef idx="1">
-            <a:schemeClr val="accent1"/>
-          </a:lnRef>
-          <a:fillRef idx="3">
-            <a:schemeClr val="accent1"/>
-          </a:fillRef>
-          <a:effectRef idx="2">
-            <a:schemeClr val="accent1"/>
-          </a:effectRef>
-          <a:fontRef idx="minor">
-            <a:schemeClr val="lt1"/>
-          </a:fontRef>
-        </p:style>
-        <p:txBody>
-          <a:bodyPr rtlCol="0" anchor="ctr"/>
-          <a:lstStyle/>
-          <a:p>
-            <a:pPr algn="ctr">
-              <a:defRPr sz="1300">
-                <a:solidFill>
-                  <a:srgbClr val="1F2328"/>
-                </a:solidFill>
-                <a:latin typeface="Microsoft YaHei"/>
-              </a:defRPr>
-            </a:pPr>
-            <a:r>
-              <a:t>⑥ 上传成功</a:t>
+              <a:t>④ 看效果</a:t>
             </a:r>
           </a:p>
         </p:txBody>
@@ -3677,14 +3572,14 @@
               </a:defRPr>
             </a:pPr>
             <a:r>
-              <a:t>步骤 ⑨：项目设置</a:t>
+              <a:t>步骤 ⑨：终端执行上传命令</a:t>
             </a:r>
           </a:p>
         </p:txBody>
       </p:sp>
       <p:pic>
         <p:nvPicPr>
-          <p:cNvPr id="4" name="Picture 3" descr="04_github_project.png"/>
+          <p:cNvPr id="4" name="Picture 3" descr="10_terminal.png"/>
           <p:cNvPicPr>
             <a:picLocks noChangeAspect="1"/>
           </p:cNvPicPr>
@@ -3698,535 +3593,14 @@
         </p:blipFill>
         <p:spPr>
           <a:xfrm>
-            <a:off x="365760" y="594360"/>
-            <a:ext cx="8046720" cy="5669280"/>
+            <a:off x="457200" y="640080"/>
+            <a:ext cx="11247120" cy="5486400"/>
           </a:xfrm>
           <a:prstGeom prst="rect">
             <a:avLst/>
           </a:prstGeom>
         </p:spPr>
       </p:pic>
-      <p:sp>
-        <p:nvSpPr>
-          <p:cNvPr id="5" name="Rounded Rectangle 4"/>
-          <p:cNvSpPr/>
-          <p:nvPr/>
-        </p:nvSpPr>
-        <p:spPr>
-          <a:xfrm>
-            <a:off x="8595360" y="594360"/>
-            <a:ext cx="3291840" cy="5669280"/>
-          </a:xfrm>
-          <a:prstGeom prst="roundRect">
-            <a:avLst/>
-          </a:prstGeom>
-          <a:solidFill>
-            <a:srgbClr val="FFFFFF"/>
-          </a:solidFill>
-          <a:ln w="25400">
-            <a:solidFill>
-              <a:srgbClr val="FD8C73"/>
-            </a:solidFill>
-          </a:ln>
-        </p:spPr>
-        <p:style>
-          <a:lnRef idx="1">
-            <a:schemeClr val="accent1"/>
-          </a:lnRef>
-          <a:fillRef idx="3">
-            <a:schemeClr val="accent1"/>
-          </a:fillRef>
-          <a:effectRef idx="2">
-            <a:schemeClr val="accent1"/>
-          </a:effectRef>
-          <a:fontRef idx="minor">
-            <a:schemeClr val="lt1"/>
-          </a:fontRef>
-        </p:style>
-        <p:txBody>
-          <a:bodyPr rtlCol="0" anchor="ctr"/>
-          <a:lstStyle/>
-          <a:p>
-            <a:pPr algn="ctr"/>
-          </a:p>
-        </p:txBody>
-      </p:sp>
-      <p:sp>
-        <p:nvSpPr>
-          <p:cNvPr id="6" name="Rounded Rectangle 5"/>
-          <p:cNvSpPr/>
-          <p:nvPr/>
-        </p:nvSpPr>
-        <p:spPr>
-          <a:xfrm>
-            <a:off x="8778240" y="731520"/>
-            <a:ext cx="1828800" cy="320040"/>
-          </a:xfrm>
-          <a:prstGeom prst="roundRect">
-            <a:avLst/>
-          </a:prstGeom>
-          <a:solidFill>
-            <a:srgbClr val="FD8C73"/>
-          </a:solidFill>
-          <a:ln>
-            <a:noFill/>
-          </a:ln>
-        </p:spPr>
-        <p:style>
-          <a:lnRef idx="1">
-            <a:schemeClr val="accent1"/>
-          </a:lnRef>
-          <a:fillRef idx="3">
-            <a:schemeClr val="accent1"/>
-          </a:fillRef>
-          <a:effectRef idx="2">
-            <a:schemeClr val="accent1"/>
-          </a:effectRef>
-          <a:fontRef idx="minor">
-            <a:schemeClr val="lt1"/>
-          </a:fontRef>
-        </p:style>
-        <p:txBody>
-          <a:bodyPr rtlCol="0" anchor="ctr"/>
-          <a:lstStyle/>
-          <a:p>
-            <a:pPr algn="ctr">
-              <a:defRPr sz="1200">
-                <a:solidFill>
-                  <a:srgbClr val="FFFFFF"/>
-                </a:solidFill>
-                <a:latin typeface="Microsoft YaHei"/>
-              </a:defRPr>
-            </a:pPr>
-            <a:r>
-              <a:t>步骤 ⑨</a:t>
-            </a:r>
-          </a:p>
-        </p:txBody>
-      </p:sp>
-      <p:sp>
-        <p:nvSpPr>
-          <p:cNvPr id="7" name="TextBox 6"/>
-          <p:cNvSpPr txBox="1"/>
-          <p:nvPr/>
-        </p:nvSpPr>
-        <p:spPr>
-          <a:xfrm>
-            <a:off x="8778240" y="1280160"/>
-            <a:ext cx="2926080" cy="320040"/>
-          </a:xfrm>
-          <a:prstGeom prst="rect">
-            <a:avLst/>
-          </a:prstGeom>
-          <a:noFill/>
-        </p:spPr>
-        <p:txBody>
-          <a:bodyPr wrap="square">
-            <a:spAutoFit/>
-          </a:bodyPr>
-          <a:lstStyle/>
-          <a:p>
-            <a:pPr algn="l">
-              <a:defRPr sz="1400" b="1">
-                <a:solidFill>
-                  <a:srgbClr val="1F2328"/>
-                </a:solidFill>
-                <a:latin typeface="Microsoft YaHei"/>
-              </a:defRPr>
-            </a:pPr>
-            <a:r>
-              <a:t>Settings = 项目设置</a:t>
-            </a:r>
-          </a:p>
-        </p:txBody>
-      </p:sp>
-      <p:sp>
-        <p:nvSpPr>
-          <p:cNvPr id="8" name="TextBox 7"/>
-          <p:cNvSpPr txBox="1"/>
-          <p:nvPr/>
-        </p:nvSpPr>
-        <p:spPr>
-          <a:xfrm>
-            <a:off x="8778240" y="1600200"/>
-            <a:ext cx="2926080" cy="320040"/>
-          </a:xfrm>
-          <a:prstGeom prst="rect">
-            <a:avLst/>
-          </a:prstGeom>
-          <a:noFill/>
-        </p:spPr>
-        <p:txBody>
-          <a:bodyPr wrap="square">
-            <a:spAutoFit/>
-          </a:bodyPr>
-          <a:lstStyle/>
-          <a:p>
-            <a:pPr algn="l">
-              <a:defRPr sz="1400" b="0">
-                <a:solidFill>
-                  <a:srgbClr val="1F2328"/>
-                </a:solidFill>
-                <a:latin typeface="Microsoft YaHei"/>
-              </a:defRPr>
-            </a:pPr>
-          </a:p>
-        </p:txBody>
-      </p:sp>
-      <p:sp>
-        <p:nvSpPr>
-          <p:cNvPr id="9" name="TextBox 8"/>
-          <p:cNvSpPr txBox="1"/>
-          <p:nvPr/>
-        </p:nvSpPr>
-        <p:spPr>
-          <a:xfrm>
-            <a:off x="8778240" y="1920240"/>
-            <a:ext cx="2926080" cy="320040"/>
-          </a:xfrm>
-          <a:prstGeom prst="rect">
-            <a:avLst/>
-          </a:prstGeom>
-          <a:noFill/>
-        </p:spPr>
-        <p:txBody>
-          <a:bodyPr wrap="square">
-            <a:spAutoFit/>
-          </a:bodyPr>
-          <a:lstStyle/>
-          <a:p>
-            <a:pPr algn="l">
-              <a:defRPr sz="1400" b="0">
-                <a:solidFill>
-                  <a:srgbClr val="1F2328"/>
-                </a:solidFill>
-                <a:latin typeface="Microsoft YaHei"/>
-              </a:defRPr>
-            </a:pPr>
-            <a:r>
-              <a:t>可以修改：</a:t>
-            </a:r>
-          </a:p>
-        </p:txBody>
-      </p:sp>
-      <p:sp>
-        <p:nvSpPr>
-          <p:cNvPr id="10" name="TextBox 9"/>
-          <p:cNvSpPr txBox="1"/>
-          <p:nvPr/>
-        </p:nvSpPr>
-        <p:spPr>
-          <a:xfrm>
-            <a:off x="8778240" y="2240280"/>
-            <a:ext cx="2926080" cy="320040"/>
-          </a:xfrm>
-          <a:prstGeom prst="rect">
-            <a:avLst/>
-          </a:prstGeom>
-          <a:noFill/>
-        </p:spPr>
-        <p:txBody>
-          <a:bodyPr wrap="square">
-            <a:spAutoFit/>
-          </a:bodyPr>
-          <a:lstStyle/>
-          <a:p>
-            <a:pPr algn="l">
-              <a:defRPr sz="1400" b="0">
-                <a:solidFill>
-                  <a:srgbClr val="1F2328"/>
-                </a:solidFill>
-                <a:latin typeface="Microsoft YaHei"/>
-              </a:defRPr>
-            </a:pPr>
-          </a:p>
-        </p:txBody>
-      </p:sp>
-      <p:sp>
-        <p:nvSpPr>
-          <p:cNvPr id="11" name="TextBox 10"/>
-          <p:cNvSpPr txBox="1"/>
-          <p:nvPr/>
-        </p:nvSpPr>
-        <p:spPr>
-          <a:xfrm>
-            <a:off x="8778240" y="2560320"/>
-            <a:ext cx="2926080" cy="320040"/>
-          </a:xfrm>
-          <a:prstGeom prst="rect">
-            <a:avLst/>
-          </a:prstGeom>
-          <a:noFill/>
-        </p:spPr>
-        <p:txBody>
-          <a:bodyPr wrap="square">
-            <a:spAutoFit/>
-          </a:bodyPr>
-          <a:lstStyle/>
-          <a:p>
-            <a:pPr algn="l">
-              <a:defRPr sz="1400" b="0">
-                <a:solidFill>
-                  <a:srgbClr val="1F2328"/>
-                </a:solidFill>
-                <a:latin typeface="Microsoft YaHei"/>
-              </a:defRPr>
-            </a:pPr>
-            <a:r>
-              <a:t>• 项目名称</a:t>
-            </a:r>
-          </a:p>
-        </p:txBody>
-      </p:sp>
-      <p:sp>
-        <p:nvSpPr>
-          <p:cNvPr id="12" name="TextBox 11"/>
-          <p:cNvSpPr txBox="1"/>
-          <p:nvPr/>
-        </p:nvSpPr>
-        <p:spPr>
-          <a:xfrm>
-            <a:off x="8778240" y="2880360"/>
-            <a:ext cx="2926080" cy="320040"/>
-          </a:xfrm>
-          <a:prstGeom prst="rect">
-            <a:avLst/>
-          </a:prstGeom>
-          <a:noFill/>
-        </p:spPr>
-        <p:txBody>
-          <a:bodyPr wrap="square">
-            <a:spAutoFit/>
-          </a:bodyPr>
-          <a:lstStyle/>
-          <a:p>
-            <a:pPr algn="l">
-              <a:defRPr sz="1400" b="0">
-                <a:solidFill>
-                  <a:srgbClr val="1F2328"/>
-                </a:solidFill>
-                <a:latin typeface="Microsoft YaHei"/>
-              </a:defRPr>
-            </a:pPr>
-            <a:r>
-              <a:t>• 项目描述</a:t>
-            </a:r>
-          </a:p>
-        </p:txBody>
-      </p:sp>
-      <p:sp>
-        <p:nvSpPr>
-          <p:cNvPr id="13" name="TextBox 12"/>
-          <p:cNvSpPr txBox="1"/>
-          <p:nvPr/>
-        </p:nvSpPr>
-        <p:spPr>
-          <a:xfrm>
-            <a:off x="8778240" y="3200400"/>
-            <a:ext cx="2926080" cy="320040"/>
-          </a:xfrm>
-          <a:prstGeom prst="rect">
-            <a:avLst/>
-          </a:prstGeom>
-          <a:noFill/>
-        </p:spPr>
-        <p:txBody>
-          <a:bodyPr wrap="square">
-            <a:spAutoFit/>
-          </a:bodyPr>
-          <a:lstStyle/>
-          <a:p>
-            <a:pPr algn="l">
-              <a:defRPr sz="1400" b="0">
-                <a:solidFill>
-                  <a:srgbClr val="1F2328"/>
-                </a:solidFill>
-                <a:latin typeface="Microsoft YaHei"/>
-              </a:defRPr>
-            </a:pPr>
-            <a:r>
-              <a:t>• 添加协作者</a:t>
-            </a:r>
-          </a:p>
-        </p:txBody>
-      </p:sp>
-      <p:sp>
-        <p:nvSpPr>
-          <p:cNvPr id="14" name="TextBox 13"/>
-          <p:cNvSpPr txBox="1"/>
-          <p:nvPr/>
-        </p:nvSpPr>
-        <p:spPr>
-          <a:xfrm>
-            <a:off x="8778240" y="3520440"/>
-            <a:ext cx="2926080" cy="320040"/>
-          </a:xfrm>
-          <a:prstGeom prst="rect">
-            <a:avLst/>
-          </a:prstGeom>
-          <a:noFill/>
-        </p:spPr>
-        <p:txBody>
-          <a:bodyPr wrap="square">
-            <a:spAutoFit/>
-          </a:bodyPr>
-          <a:lstStyle/>
-          <a:p>
-            <a:pPr algn="l">
-              <a:defRPr sz="1400" b="0">
-                <a:solidFill>
-                  <a:srgbClr val="1F2328"/>
-                </a:solidFill>
-                <a:latin typeface="Microsoft YaHei"/>
-              </a:defRPr>
-            </a:pPr>
-          </a:p>
-        </p:txBody>
-      </p:sp>
-      <p:sp>
-        <p:nvSpPr>
-          <p:cNvPr id="15" name="TextBox 14"/>
-          <p:cNvSpPr txBox="1"/>
-          <p:nvPr/>
-        </p:nvSpPr>
-        <p:spPr>
-          <a:xfrm>
-            <a:off x="8778240" y="3840480"/>
-            <a:ext cx="2926080" cy="320040"/>
-          </a:xfrm>
-          <a:prstGeom prst="rect">
-            <a:avLst/>
-          </a:prstGeom>
-          <a:noFill/>
-        </p:spPr>
-        <p:txBody>
-          <a:bodyPr wrap="square">
-            <a:spAutoFit/>
-          </a:bodyPr>
-          <a:lstStyle/>
-          <a:p>
-            <a:pPr algn="l">
-              <a:defRPr sz="1400" b="0">
-                <a:solidFill>
-                  <a:srgbClr val="1F2328"/>
-                </a:solidFill>
-                <a:latin typeface="Microsoft YaHei"/>
-              </a:defRPr>
-            </a:pPr>
-            <a:r>
-              <a:t>⚠️ 底部 Danger Zone：</a:t>
-            </a:r>
-          </a:p>
-        </p:txBody>
-      </p:sp>
-      <p:sp>
-        <p:nvSpPr>
-          <p:cNvPr id="16" name="TextBox 15"/>
-          <p:cNvSpPr txBox="1"/>
-          <p:nvPr/>
-        </p:nvSpPr>
-        <p:spPr>
-          <a:xfrm>
-            <a:off x="8778240" y="4160520"/>
-            <a:ext cx="2926080" cy="320040"/>
-          </a:xfrm>
-          <a:prstGeom prst="rect">
-            <a:avLst/>
-          </a:prstGeom>
-          <a:noFill/>
-        </p:spPr>
-        <p:txBody>
-          <a:bodyPr wrap="square">
-            <a:spAutoFit/>
-          </a:bodyPr>
-          <a:lstStyle/>
-          <a:p>
-            <a:pPr algn="l">
-              <a:defRPr sz="1400" b="0">
-                <a:solidFill>
-                  <a:srgbClr val="1F2328"/>
-                </a:solidFill>
-                <a:latin typeface="Microsoft YaHei"/>
-              </a:defRPr>
-            </a:pPr>
-            <a:r>
-              <a:t>  Delete = 删除项目！</a:t>
-            </a:r>
-          </a:p>
-        </p:txBody>
-      </p:sp>
-      <p:sp>
-        <p:nvSpPr>
-          <p:cNvPr id="17" name="TextBox 16"/>
-          <p:cNvSpPr txBox="1"/>
-          <p:nvPr/>
-        </p:nvSpPr>
-        <p:spPr>
-          <a:xfrm>
-            <a:off x="8778240" y="4480559"/>
-            <a:ext cx="2926080" cy="320040"/>
-          </a:xfrm>
-          <a:prstGeom prst="rect">
-            <a:avLst/>
-          </a:prstGeom>
-          <a:noFill/>
-        </p:spPr>
-        <p:txBody>
-          <a:bodyPr wrap="square">
-            <a:spAutoFit/>
-          </a:bodyPr>
-          <a:lstStyle/>
-          <a:p>
-            <a:pPr algn="l">
-              <a:defRPr sz="1400" b="0">
-                <a:solidFill>
-                  <a:srgbClr val="1F2328"/>
-                </a:solidFill>
-                <a:latin typeface="Microsoft YaHei"/>
-              </a:defRPr>
-            </a:pPr>
-            <a:r>
-              <a:t>  不要乱点！</a:t>
-            </a:r>
-          </a:p>
-        </p:txBody>
-      </p:sp>
-      <p:sp>
-        <p:nvSpPr>
-          <p:cNvPr id="18" name="TextBox 17"/>
-          <p:cNvSpPr txBox="1"/>
-          <p:nvPr/>
-        </p:nvSpPr>
-        <p:spPr>
-          <a:xfrm>
-            <a:off x="5029200" y="6309360"/>
-            <a:ext cx="1828800" cy="274320"/>
-          </a:xfrm>
-          <a:prstGeom prst="rect">
-            <a:avLst/>
-          </a:prstGeom>
-          <a:noFill/>
-        </p:spPr>
-        <p:txBody>
-          <a:bodyPr wrap="square">
-            <a:spAutoFit/>
-          </a:bodyPr>
-          <a:lstStyle/>
-          <a:p>
-            <a:pPr algn="ctr">
-              <a:defRPr sz="1000" b="0">
-                <a:solidFill>
-                  <a:srgbClr val="656D76"/>
-                </a:solidFill>
-                <a:latin typeface="Microsoft YaHei"/>
-              </a:defRPr>
-            </a:pPr>
-            <a:r>
-              <a:t>⑨ / 12</a:t>
-            </a:r>
-          </a:p>
-        </p:txBody>
-      </p:sp>
     </p:spTree>
   </p:cSld>
   <p:clrMapOvr>
@@ -4268,7 +3642,7 @@
             <a:avLst/>
           </a:prstGeom>
           <a:solidFill>
-            <a:srgbClr val="FD8C73"/>
+            <a:srgbClr val="2DA44E"/>
           </a:solidFill>
           <a:ln>
             <a:noFill/>
@@ -4319,43 +3693,412 @@
           <a:lstStyle/>
           <a:p>
             <a:pPr algn="l">
+              <a:defRPr sz="2000" b="1">
+                <a:solidFill>
+                  <a:srgbClr val="FFFFFF"/>
+                </a:solidFill>
+                <a:latin typeface="Microsoft YaHei"/>
+              </a:defRPr>
+            </a:pPr>
+            <a:r>
+              <a:t>🔄 以后改代码了怎么更新？</a:t>
+            </a:r>
+          </a:p>
+        </p:txBody>
+      </p:sp>
+      <p:sp>
+        <p:nvSpPr>
+          <p:cNvPr id="4" name="Rounded Rectangle 3"/>
+          <p:cNvSpPr/>
+          <p:nvPr/>
+        </p:nvSpPr>
+        <p:spPr>
+          <a:xfrm>
+            <a:off x="914400" y="1097280"/>
+            <a:ext cx="3017520" cy="1371600"/>
+          </a:xfrm>
+          <a:prstGeom prst="roundRect">
+            <a:avLst/>
+          </a:prstGeom>
+          <a:solidFill>
+            <a:srgbClr val="FFFFFF"/>
+          </a:solidFill>
+          <a:ln>
+            <a:noFill/>
+          </a:ln>
+        </p:spPr>
+        <p:style>
+          <a:lnRef idx="1">
+            <a:schemeClr val="accent1"/>
+          </a:lnRef>
+          <a:fillRef idx="3">
+            <a:schemeClr val="accent1"/>
+          </a:fillRef>
+          <a:effectRef idx="2">
+            <a:schemeClr val="accent1"/>
+          </a:effectRef>
+          <a:fontRef idx="minor">
+            <a:schemeClr val="lt1"/>
+          </a:fontRef>
+        </p:style>
+        <p:txBody>
+          <a:bodyPr rtlCol="0" anchor="ctr"/>
+          <a:lstStyle/>
+          <a:p>
+            <a:pPr algn="ctr">
+              <a:defRPr sz="1800">
+                <a:solidFill>
+                  <a:srgbClr val="1F2328"/>
+                </a:solidFill>
+                <a:latin typeface="Microsoft YaHei"/>
+              </a:defRPr>
+            </a:pPr>
+            <a:r>
+              <a:t>📝 修改本地文件</a:t>
+            </a:r>
+          </a:p>
+        </p:txBody>
+      </p:sp>
+      <p:sp>
+        <p:nvSpPr>
+          <p:cNvPr id="5" name="TextBox 4"/>
+          <p:cNvSpPr txBox="1"/>
+          <p:nvPr/>
+        </p:nvSpPr>
+        <p:spPr>
+          <a:xfrm>
+            <a:off x="1097280" y="2651760"/>
+            <a:ext cx="2651760" cy="1371600"/>
+          </a:xfrm>
+          <a:prstGeom prst="rect">
+            <a:avLst/>
+          </a:prstGeom>
+          <a:noFill/>
+        </p:spPr>
+        <p:txBody>
+          <a:bodyPr wrap="square">
+            <a:spAutoFit/>
+          </a:bodyPr>
+          <a:lstStyle/>
+          <a:p>
+            <a:pPr algn="l">
+              <a:defRPr sz="1400" b="0">
+                <a:solidFill>
+                  <a:srgbClr val="1F2328"/>
+                </a:solidFill>
+                <a:latin typeface="Microsoft YaHei"/>
+              </a:defRPr>
+            </a:pPr>
+            <a:r>
+              <a:t>用编辑器改</a:t>
+            </a:r>
+            <a:br/>
+            <a:r>
+              <a:t>content.js 等</a:t>
+            </a:r>
+          </a:p>
+        </p:txBody>
+      </p:sp>
+      <p:sp>
+        <p:nvSpPr>
+          <p:cNvPr id="6" name="TextBox 5"/>
+          <p:cNvSpPr txBox="1"/>
+          <p:nvPr/>
+        </p:nvSpPr>
+        <p:spPr>
+          <a:xfrm>
+            <a:off x="3931920" y="1463040"/>
+            <a:ext cx="457200" cy="457200"/>
+          </a:xfrm>
+          <a:prstGeom prst="rect">
+            <a:avLst/>
+          </a:prstGeom>
+          <a:noFill/>
+        </p:spPr>
+        <p:txBody>
+          <a:bodyPr wrap="square">
+            <a:spAutoFit/>
+          </a:bodyPr>
+          <a:lstStyle/>
+          <a:p>
+            <a:pPr algn="l">
+              <a:defRPr sz="3600" b="1">
+                <a:solidFill>
+                  <a:srgbClr val="FD8C73"/>
+                </a:solidFill>
+                <a:latin typeface="Microsoft YaHei"/>
+              </a:defRPr>
+            </a:pPr>
+            <a:r>
+              <a:t>→</a:t>
+            </a:r>
+          </a:p>
+        </p:txBody>
+      </p:sp>
+      <p:sp>
+        <p:nvSpPr>
+          <p:cNvPr id="7" name="Rounded Rectangle 6"/>
+          <p:cNvSpPr/>
+          <p:nvPr/>
+        </p:nvSpPr>
+        <p:spPr>
+          <a:xfrm>
+            <a:off x="4572000" y="1097280"/>
+            <a:ext cx="3017520" cy="1371600"/>
+          </a:xfrm>
+          <a:prstGeom prst="roundRect">
+            <a:avLst/>
+          </a:prstGeom>
+          <a:solidFill>
+            <a:srgbClr val="FFFFFF"/>
+          </a:solidFill>
+          <a:ln w="25400">
+            <a:solidFill>
+              <a:srgbClr val="FD8C73"/>
+            </a:solidFill>
+          </a:ln>
+        </p:spPr>
+        <p:style>
+          <a:lnRef idx="1">
+            <a:schemeClr val="accent1"/>
+          </a:lnRef>
+          <a:fillRef idx="3">
+            <a:schemeClr val="accent1"/>
+          </a:fillRef>
+          <a:effectRef idx="2">
+            <a:schemeClr val="accent1"/>
+          </a:effectRef>
+          <a:fontRef idx="minor">
+            <a:schemeClr val="lt1"/>
+          </a:fontRef>
+        </p:style>
+        <p:txBody>
+          <a:bodyPr rtlCol="0" anchor="ctr"/>
+          <a:lstStyle/>
+          <a:p>
+            <a:pPr algn="ctr">
+              <a:defRPr sz="1800">
+                <a:solidFill>
+                  <a:srgbClr val="1F2328"/>
+                </a:solidFill>
+                <a:latin typeface="Microsoft YaHei"/>
+              </a:defRPr>
+            </a:pPr>
+            <a:r>
+              <a:t>🖥️ 执行 3 条命令</a:t>
+            </a:r>
+          </a:p>
+        </p:txBody>
+      </p:sp>
+      <p:sp>
+        <p:nvSpPr>
+          <p:cNvPr id="8" name="TextBox 7"/>
+          <p:cNvSpPr txBox="1"/>
+          <p:nvPr/>
+        </p:nvSpPr>
+        <p:spPr>
+          <a:xfrm>
+            <a:off x="4754880" y="2651760"/>
+            <a:ext cx="2651760" cy="1371600"/>
+          </a:xfrm>
+          <a:prstGeom prst="rect">
+            <a:avLst/>
+          </a:prstGeom>
+          <a:noFill/>
+        </p:spPr>
+        <p:txBody>
+          <a:bodyPr wrap="square">
+            <a:spAutoFit/>
+          </a:bodyPr>
+          <a:lstStyle/>
+          <a:p>
+            <a:pPr algn="l">
+              <a:defRPr sz="1400" b="0">
+                <a:solidFill>
+                  <a:srgbClr val="1F2328"/>
+                </a:solidFill>
+                <a:latin typeface="Microsoft YaHei"/>
+              </a:defRPr>
+            </a:pPr>
+            <a:r>
+              <a:t>git add .</a:t>
+            </a:r>
+            <a:br/>
+            <a:r>
+              <a:t>git commit -m "说明"</a:t>
+            </a:r>
+            <a:br/>
+            <a:r>
+              <a:t>git push</a:t>
+            </a:r>
+          </a:p>
+        </p:txBody>
+      </p:sp>
+      <p:sp>
+        <p:nvSpPr>
+          <p:cNvPr id="9" name="TextBox 8"/>
+          <p:cNvSpPr txBox="1"/>
+          <p:nvPr/>
+        </p:nvSpPr>
+        <p:spPr>
+          <a:xfrm>
+            <a:off x="7589520" y="1463040"/>
+            <a:ext cx="457200" cy="457200"/>
+          </a:xfrm>
+          <a:prstGeom prst="rect">
+            <a:avLst/>
+          </a:prstGeom>
+          <a:noFill/>
+        </p:spPr>
+        <p:txBody>
+          <a:bodyPr wrap="square">
+            <a:spAutoFit/>
+          </a:bodyPr>
+          <a:lstStyle/>
+          <a:p>
+            <a:pPr algn="l">
+              <a:defRPr sz="3600" b="1">
+                <a:solidFill>
+                  <a:srgbClr val="FD8C73"/>
+                </a:solidFill>
+                <a:latin typeface="Microsoft YaHei"/>
+              </a:defRPr>
+            </a:pPr>
+            <a:r>
+              <a:t>→</a:t>
+            </a:r>
+          </a:p>
+        </p:txBody>
+      </p:sp>
+      <p:sp>
+        <p:nvSpPr>
+          <p:cNvPr id="10" name="Rounded Rectangle 9"/>
+          <p:cNvSpPr/>
+          <p:nvPr/>
+        </p:nvSpPr>
+        <p:spPr>
+          <a:xfrm>
+            <a:off x="8229600" y="1097280"/>
+            <a:ext cx="3017520" cy="1371600"/>
+          </a:xfrm>
+          <a:prstGeom prst="roundRect">
+            <a:avLst/>
+          </a:prstGeom>
+          <a:solidFill>
+            <a:srgbClr val="FFFFFF"/>
+          </a:solidFill>
+          <a:ln>
+            <a:noFill/>
+          </a:ln>
+        </p:spPr>
+        <p:style>
+          <a:lnRef idx="1">
+            <a:schemeClr val="accent1"/>
+          </a:lnRef>
+          <a:fillRef idx="3">
+            <a:schemeClr val="accent1"/>
+          </a:fillRef>
+          <a:effectRef idx="2">
+            <a:schemeClr val="accent1"/>
+          </a:effectRef>
+          <a:fontRef idx="minor">
+            <a:schemeClr val="lt1"/>
+          </a:fontRef>
+        </p:style>
+        <p:txBody>
+          <a:bodyPr rtlCol="0" anchor="ctr"/>
+          <a:lstStyle/>
+          <a:p>
+            <a:pPr algn="ctr">
+              <a:defRPr sz="1800">
+                <a:solidFill>
+                  <a:srgbClr val="1F2328"/>
+                </a:solidFill>
+                <a:latin typeface="Microsoft YaHei"/>
+              </a:defRPr>
+            </a:pPr>
+            <a:r>
+              <a:t>☁️ 自动同步</a:t>
+            </a:r>
+          </a:p>
+        </p:txBody>
+      </p:sp>
+      <p:sp>
+        <p:nvSpPr>
+          <p:cNvPr id="11" name="TextBox 10"/>
+          <p:cNvSpPr txBox="1"/>
+          <p:nvPr/>
+        </p:nvSpPr>
+        <p:spPr>
+          <a:xfrm>
+            <a:off x="8412480" y="2651760"/>
+            <a:ext cx="2651760" cy="1371600"/>
+          </a:xfrm>
+          <a:prstGeom prst="rect">
+            <a:avLst/>
+          </a:prstGeom>
+          <a:noFill/>
+        </p:spPr>
+        <p:txBody>
+          <a:bodyPr wrap="square">
+            <a:spAutoFit/>
+          </a:bodyPr>
+          <a:lstStyle/>
+          <a:p>
+            <a:pPr algn="l">
+              <a:defRPr sz="1400" b="0">
+                <a:solidFill>
+                  <a:srgbClr val="1F2328"/>
+                </a:solidFill>
+                <a:latin typeface="Microsoft YaHei"/>
+              </a:defRPr>
+            </a:pPr>
+            <a:r>
+              <a:t>刷新 GitHub 页面</a:t>
+            </a:r>
+            <a:br/>
+            <a:r>
+              <a:t>即可看到最新代码</a:t>
+            </a:r>
+          </a:p>
+        </p:txBody>
+      </p:sp>
+      <p:sp>
+        <p:nvSpPr>
+          <p:cNvPr id="12" name="TextBox 11"/>
+          <p:cNvSpPr txBox="1"/>
+          <p:nvPr/>
+        </p:nvSpPr>
+        <p:spPr>
+          <a:xfrm>
+            <a:off x="731520" y="4572000"/>
+            <a:ext cx="10058400" cy="457200"/>
+          </a:xfrm>
+          <a:prstGeom prst="rect">
+            <a:avLst/>
+          </a:prstGeom>
+          <a:noFill/>
+        </p:spPr>
+        <p:txBody>
+          <a:bodyPr wrap="square">
+            <a:spAutoFit/>
+          </a:bodyPr>
+          <a:lstStyle/>
+          <a:p>
+            <a:pPr algn="ctr">
               <a:defRPr sz="1800" b="1">
                 <a:solidFill>
-                  <a:srgbClr val="FFFFFF"/>
+                  <a:srgbClr val="FD8C73"/>
                 </a:solidFill>
                 <a:latin typeface="Microsoft YaHei"/>
               </a:defRPr>
             </a:pPr>
             <a:r>
-              <a:t>步骤 ⑩：打开终端，执行上传命令</a:t>
-            </a:r>
-          </a:p>
-        </p:txBody>
-      </p:sp>
-      <p:pic>
-        <p:nvPicPr>
-          <p:cNvPr id="4" name="Picture 3" descr="10_terminal.png"/>
-          <p:cNvPicPr>
-            <a:picLocks noChangeAspect="1"/>
-          </p:cNvPicPr>
-          <p:nvPr/>
-        </p:nvPicPr>
-        <p:blipFill>
-          <a:blip r:embed="rId2"/>
-          <a:stretch>
-            <a:fillRect/>
-          </a:stretch>
-        </p:blipFill>
-        <p:spPr>
-          <a:xfrm>
-            <a:off x="457200" y="640080"/>
-            <a:ext cx="11247120" cy="5943600"/>
-          </a:xfrm>
-          <a:prstGeom prst="rect">
-            <a:avLst/>
-          </a:prstGeom>
-        </p:spPr>
-      </p:pic>
+              <a:t>💡 记住 3 个词即可：add → commit → push</a:t>
+            </a:r>
+          </a:p>
+        </p:txBody>
+      </p:sp>
     </p:spTree>
   </p:cSld>
   <p:clrMapOvr>
@@ -4397,7 +4140,7 @@
             <a:avLst/>
           </a:prstGeom>
           <a:solidFill>
-            <a:srgbClr val="2DA44E"/>
+            <a:srgbClr val="FD8C73"/>
           </a:solidFill>
           <a:ln>
             <a:noFill/>
@@ -4456,7 +4199,7 @@
               </a:defRPr>
             </a:pPr>
             <a:r>
-              <a:t>🔄 以后修改了代码怎么更新？</a:t>
+              <a:t>📥 别人怎么下载你的插件？</a:t>
             </a:r>
           </a:p>
         </p:txBody>
@@ -4469,14 +4212,14 @@
         </p:nvSpPr>
         <p:spPr>
           <a:xfrm>
-            <a:off x="731520" y="914400"/>
-            <a:ext cx="3200400" cy="1371600"/>
+            <a:off x="457200" y="914400"/>
+            <a:ext cx="5303520" cy="548640"/>
           </a:xfrm>
           <a:prstGeom prst="roundRect">
             <a:avLst/>
           </a:prstGeom>
           <a:solidFill>
-            <a:srgbClr val="FFFFFF"/>
+            <a:srgbClr val="FD8C73"/>
           </a:solidFill>
           <a:ln>
             <a:noFill/>
@@ -4501,15 +4244,15 @@
           <a:lstStyle/>
           <a:p>
             <a:pPr algn="ctr">
-              <a:defRPr sz="2000">
-                <a:solidFill>
-                  <a:srgbClr val="1F2328"/>
+              <a:defRPr sz="1600">
+                <a:solidFill>
+                  <a:srgbClr val="FFFFFF"/>
                 </a:solidFill>
                 <a:latin typeface="Microsoft YaHei"/>
               </a:defRPr>
             </a:pPr>
             <a:r>
-              <a:t>📝 修改代码</a:t>
+              <a:t>方法一：Download ZIP（最简单）</a:t>
             </a:r>
           </a:p>
         </p:txBody>
@@ -4522,8 +4265,8 @@
         </p:nvSpPr>
         <p:spPr>
           <a:xfrm>
-            <a:off x="914400" y="2468880"/>
-            <a:ext cx="2834640" cy="2286000"/>
+            <a:off x="640080" y="1645920"/>
+            <a:ext cx="4937760" cy="3200400"/>
           </a:xfrm>
           <a:prstGeom prst="rect">
             <a:avLst/>
@@ -4537,7 +4280,7 @@
           <a:lstStyle/>
           <a:p>
             <a:pPr algn="l">
-              <a:defRPr sz="1400" b="0">
+              <a:defRPr sz="1500" b="0">
                 <a:solidFill>
                   <a:srgbClr val="1F2328"/>
                 </a:solidFill>
@@ -4545,72 +4288,46 @@
               </a:defRPr>
             </a:pPr>
             <a:r>
-              <a:t>用编辑器修改本地文件</a:t>
-            </a:r>
-            <a:br/>
-            <a:r>
-              <a:t>content.js / content.css 等</a:t>
-            </a:r>
-          </a:p>
-        </p:txBody>
-      </p:sp>
-      <p:sp>
-        <p:nvSpPr>
-          <p:cNvPr id="6" name="TextBox 5"/>
-          <p:cNvSpPr txBox="1"/>
-          <p:nvPr/>
-        </p:nvSpPr>
-        <p:spPr>
-          <a:xfrm>
-            <a:off x="3931920" y="1371600"/>
-            <a:ext cx="457200" cy="457200"/>
-          </a:xfrm>
-          <a:prstGeom prst="rect">
-            <a:avLst/>
-          </a:prstGeom>
-          <a:noFill/>
-        </p:spPr>
-        <p:txBody>
-          <a:bodyPr wrap="square">
-            <a:spAutoFit/>
-          </a:bodyPr>
-          <a:lstStyle/>
-          <a:p>
-            <a:pPr algn="l">
-              <a:defRPr sz="3600" b="1">
-                <a:solidFill>
-                  <a:srgbClr val="FD8C73"/>
-                </a:solidFill>
-                <a:latin typeface="Microsoft YaHei"/>
-              </a:defRPr>
-            </a:pPr>
-            <a:r>
-              <a:t>→</a:t>
-            </a:r>
-          </a:p>
-        </p:txBody>
-      </p:sp>
-      <p:sp>
-        <p:nvSpPr>
-          <p:cNvPr id="7" name="Rounded Rectangle 6"/>
+              <a:t>1. 打开你的 GitHub 项目页</a:t>
+            </a:r>
+            <a:br/>
+            <a:r>
+              <a:t>2. 点绿色 Code 按钮</a:t>
+            </a:r>
+            <a:br/>
+            <a:r>
+              <a:t>3. 点 Download ZIP</a:t>
+            </a:r>
+            <a:br/>
+            <a:r>
+              <a:t>4. 解压文件夹</a:t>
+            </a:r>
+            <a:br/>
+            <a:r>
+              <a:t>5. Chrome 加载解压后的文件夹</a:t>
+            </a:r>
+          </a:p>
+        </p:txBody>
+      </p:sp>
+      <p:sp>
+        <p:nvSpPr>
+          <p:cNvPr id="6" name="Rounded Rectangle 5"/>
           <p:cNvSpPr/>
           <p:nvPr/>
         </p:nvSpPr>
         <p:spPr>
           <a:xfrm>
-            <a:off x="4389120" y="914400"/>
-            <a:ext cx="3200400" cy="1371600"/>
+            <a:off x="6217920" y="914400"/>
+            <a:ext cx="5303520" cy="548640"/>
           </a:xfrm>
           <a:prstGeom prst="roundRect">
             <a:avLst/>
           </a:prstGeom>
           <a:solidFill>
-            <a:srgbClr val="FFFFFF"/>
+            <a:srgbClr val="FD8C73"/>
           </a:solidFill>
-          <a:ln w="25400">
-            <a:solidFill>
-              <a:srgbClr val="FD8C73"/>
-            </a:solidFill>
+          <a:ln>
+            <a:noFill/>
           </a:ln>
         </p:spPr>
         <p:style>
@@ -4632,29 +4349,29 @@
           <a:lstStyle/>
           <a:p>
             <a:pPr algn="ctr">
-              <a:defRPr sz="2000">
-                <a:solidFill>
-                  <a:srgbClr val="1F2328"/>
+              <a:defRPr sz="1600">
+                <a:solidFill>
+                  <a:srgbClr val="FFFFFF"/>
                 </a:solidFill>
                 <a:latin typeface="Microsoft YaHei"/>
               </a:defRPr>
             </a:pPr>
             <a:r>
-              <a:t>🖥️ 执行 4 条命令</a:t>
-            </a:r>
-          </a:p>
-        </p:txBody>
-      </p:sp>
-      <p:sp>
-        <p:nvSpPr>
-          <p:cNvPr id="8" name="TextBox 7"/>
+              <a:t>方法二：git clone（推荐）</a:t>
+            </a:r>
+          </a:p>
+        </p:txBody>
+      </p:sp>
+      <p:sp>
+        <p:nvSpPr>
+          <p:cNvPr id="7" name="TextBox 6"/>
           <p:cNvSpPr txBox="1"/>
           <p:nvPr/>
         </p:nvSpPr>
         <p:spPr>
           <a:xfrm>
-            <a:off x="4572000" y="2468880"/>
-            <a:ext cx="2834640" cy="2286000"/>
+            <a:off x="6400800" y="1645920"/>
+            <a:ext cx="4937760" cy="3200400"/>
           </a:xfrm>
           <a:prstGeom prst="rect">
             <a:avLst/>
@@ -4668,7 +4385,7 @@
           <a:lstStyle/>
           <a:p>
             <a:pPr algn="l">
-              <a:defRPr sz="1400" b="0">
+              <a:defRPr sz="1500" b="0">
                 <a:solidFill>
                   <a:srgbClr val="1F2328"/>
                 </a:solidFill>
@@ -4676,220 +4393,23 @@
               </a:defRPr>
             </a:pPr>
             <a:r>
-              <a:t>cd ~/chrome-enlarge-selection</a:t>
-            </a:r>
-            <a:br/>
-            <a:r>
-              <a:t>git add .</a:t>
-            </a:r>
-            <a:br/>
-            <a:r>
-              <a:t>git commit -m "改了啥"</a:t>
-            </a:r>
-            <a:br/>
-            <a:r>
-              <a:t>git push</a:t>
-            </a:r>
-          </a:p>
-        </p:txBody>
-      </p:sp>
-      <p:sp>
-        <p:nvSpPr>
-          <p:cNvPr id="9" name="TextBox 8"/>
-          <p:cNvSpPr txBox="1"/>
-          <p:nvPr/>
-        </p:nvSpPr>
-        <p:spPr>
-          <a:xfrm>
-            <a:off x="7589520" y="1371600"/>
-            <a:ext cx="457200" cy="457200"/>
-          </a:xfrm>
-          <a:prstGeom prst="rect">
-            <a:avLst/>
-          </a:prstGeom>
-          <a:noFill/>
-        </p:spPr>
-        <p:txBody>
-          <a:bodyPr wrap="square">
-            <a:spAutoFit/>
-          </a:bodyPr>
-          <a:lstStyle/>
-          <a:p>
-            <a:pPr algn="l">
-              <a:defRPr sz="3600" b="1">
-                <a:solidFill>
-                  <a:srgbClr val="FD8C73"/>
-                </a:solidFill>
-                <a:latin typeface="Microsoft YaHei"/>
-              </a:defRPr>
-            </a:pPr>
-            <a:r>
-              <a:t>→</a:t>
-            </a:r>
-          </a:p>
-        </p:txBody>
-      </p:sp>
-      <p:sp>
-        <p:nvSpPr>
-          <p:cNvPr id="10" name="Rounded Rectangle 9"/>
-          <p:cNvSpPr/>
-          <p:nvPr/>
-        </p:nvSpPr>
-        <p:spPr>
-          <a:xfrm>
-            <a:off x="8046720" y="914400"/>
-            <a:ext cx="3200400" cy="1371600"/>
-          </a:xfrm>
-          <a:prstGeom prst="roundRect">
-            <a:avLst/>
-          </a:prstGeom>
-          <a:solidFill>
-            <a:srgbClr val="FFFFFF"/>
-          </a:solidFill>
-          <a:ln>
-            <a:noFill/>
-          </a:ln>
-        </p:spPr>
-        <p:style>
-          <a:lnRef idx="1">
-            <a:schemeClr val="accent1"/>
-          </a:lnRef>
-          <a:fillRef idx="3">
-            <a:schemeClr val="accent1"/>
-          </a:fillRef>
-          <a:effectRef idx="2">
-            <a:schemeClr val="accent1"/>
-          </a:effectRef>
-          <a:fontRef idx="minor">
-            <a:schemeClr val="lt1"/>
-          </a:fontRef>
-        </p:style>
-        <p:txBody>
-          <a:bodyPr rtlCol="0" anchor="ctr"/>
-          <a:lstStyle/>
-          <a:p>
-            <a:pPr algn="ctr">
-              <a:defRPr sz="2000">
-                <a:solidFill>
-                  <a:srgbClr val="1F2328"/>
-                </a:solidFill>
-                <a:latin typeface="Microsoft YaHei"/>
-              </a:defRPr>
-            </a:pPr>
-            <a:r>
-              <a:t>☁️ 自动同步</a:t>
-            </a:r>
-          </a:p>
-        </p:txBody>
-      </p:sp>
-      <p:sp>
-        <p:nvSpPr>
-          <p:cNvPr id="11" name="TextBox 10"/>
-          <p:cNvSpPr txBox="1"/>
-          <p:nvPr/>
-        </p:nvSpPr>
-        <p:spPr>
-          <a:xfrm>
-            <a:off x="8229600" y="2468880"/>
-            <a:ext cx="2834640" cy="2286000"/>
-          </a:xfrm>
-          <a:prstGeom prst="rect">
-            <a:avLst/>
-          </a:prstGeom>
-          <a:noFill/>
-        </p:spPr>
-        <p:txBody>
-          <a:bodyPr wrap="square">
-            <a:spAutoFit/>
-          </a:bodyPr>
-          <a:lstStyle/>
-          <a:p>
-            <a:pPr algn="l">
-              <a:defRPr sz="1400" b="0">
-                <a:solidFill>
-                  <a:srgbClr val="1F2328"/>
-                </a:solidFill>
-                <a:latin typeface="Microsoft YaHei"/>
-              </a:defRPr>
-            </a:pPr>
-            <a:r>
-              <a:t>刷新 GitHub 页面</a:t>
-            </a:r>
-            <a:br/>
-            <a:r>
-              <a:t>就能看到最新代码</a:t>
-            </a:r>
-          </a:p>
-        </p:txBody>
-      </p:sp>
-      <p:sp>
-        <p:nvSpPr>
-          <p:cNvPr id="12" name="TextBox 11"/>
-          <p:cNvSpPr txBox="1"/>
-          <p:nvPr/>
-        </p:nvSpPr>
-        <p:spPr>
-          <a:xfrm>
-            <a:off x="731520" y="5029200"/>
-            <a:ext cx="10058400" cy="457200"/>
-          </a:xfrm>
-          <a:prstGeom prst="rect">
-            <a:avLst/>
-          </a:prstGeom>
-          <a:noFill/>
-        </p:spPr>
-        <p:txBody>
-          <a:bodyPr wrap="square">
-            <a:spAutoFit/>
-          </a:bodyPr>
-          <a:lstStyle/>
-          <a:p>
-            <a:pPr algn="ctr">
-              <a:defRPr sz="1800" b="1">
-                <a:solidFill>
-                  <a:srgbClr val="FD8C73"/>
-                </a:solidFill>
-                <a:latin typeface="Microsoft YaHei"/>
-              </a:defRPr>
-            </a:pPr>
-            <a:r>
-              <a:t>💡 记住 4 个词就够了：cd → add → commit → push</a:t>
-            </a:r>
-          </a:p>
-        </p:txBody>
-      </p:sp>
-      <p:sp>
-        <p:nvSpPr>
-          <p:cNvPr id="13" name="TextBox 12"/>
-          <p:cNvSpPr txBox="1"/>
-          <p:nvPr/>
-        </p:nvSpPr>
-        <p:spPr>
-          <a:xfrm>
-            <a:off x="731520" y="5669280"/>
-            <a:ext cx="10058400" cy="365760"/>
-          </a:xfrm>
-          <a:prstGeom prst="rect">
-            <a:avLst/>
-          </a:prstGeom>
-          <a:noFill/>
-        </p:spPr>
-        <p:txBody>
-          <a:bodyPr wrap="square">
-            <a:spAutoFit/>
-          </a:bodyPr>
-          <a:lstStyle/>
-          <a:p>
-            <a:pPr algn="l">
-              <a:defRPr sz="1300" b="0">
-                <a:solidFill>
-                  <a:srgbClr val="656D76"/>
-                </a:solidFill>
-                <a:latin typeface="Microsoft YaHei"/>
-              </a:defRPr>
-            </a:pPr>
-            <a:r>
-              <a:t>📋 速查：以后只需要记住这 3 条命令（第一条 cd 进入项目）</a:t>
+              <a:t>1. 对方装好 Git</a:t>
+            </a:r>
+            <a:br/>
+            <a:r>
+              <a:t>2. 打开终端输入：</a:t>
+            </a:r>
+            <a:br/>
+            <a:r>
+              <a:t>   git clone https://github.com/</a:t>
+            </a:r>
+            <a:br/>
+            <a:r>
+              <a:t>   mmm1111lhc/keyword-magnifier</a:t>
+            </a:r>
+            <a:br/>
+            <a:r>
+              <a:t>3. 以后可以 git pull 更新</a:t>
             </a:r>
           </a:p>
         </p:txBody>
@@ -4929,7 +4449,7 @@
         <p:spPr>
           <a:xfrm>
             <a:off x="0" y="0"/>
-            <a:ext cx="12191695" cy="91440"/>
+            <a:ext cx="12191695" cy="457200"/>
           </a:xfrm>
           <a:prstGeom prst="roundRect">
             <a:avLst/>
@@ -4971,8 +4491,8 @@
         </p:nvSpPr>
         <p:spPr>
           <a:xfrm>
-            <a:off x="914400" y="731520"/>
-            <a:ext cx="10058400" cy="914400"/>
+            <a:off x="457200" y="73152"/>
+            <a:ext cx="10972800" cy="365760"/>
           </a:xfrm>
           <a:prstGeom prst="rect">
             <a:avLst/>
@@ -4985,77 +4505,39 @@
           </a:bodyPr>
           <a:lstStyle/>
           <a:p>
-            <a:pPr algn="ctr">
-              <a:defRPr sz="4000" b="1">
-                <a:solidFill>
-                  <a:srgbClr val="1F2328"/>
+            <a:pPr algn="l">
+              <a:defRPr sz="2000" b="1">
+                <a:solidFill>
+                  <a:srgbClr val="FFFFFF"/>
                 </a:solidFill>
                 <a:latin typeface="Microsoft YaHei"/>
               </a:defRPr>
             </a:pPr>
             <a:r>
-              <a:t>🎉 恭喜！你已掌握 GitHub 上传！</a:t>
-            </a:r>
-          </a:p>
-        </p:txBody>
-      </p:sp>
-      <p:sp>
-        <p:nvSpPr>
-          <p:cNvPr id="4" name="TextBox 3"/>
-          <p:cNvSpPr txBox="1"/>
-          <p:nvPr/>
-        </p:nvSpPr>
-        <p:spPr>
-          <a:xfrm>
-            <a:off x="914400" y="1828800"/>
-            <a:ext cx="10058400" cy="548640"/>
-          </a:xfrm>
-          <a:prstGeom prst="rect">
-            <a:avLst/>
-          </a:prstGeom>
-          <a:noFill/>
-        </p:spPr>
-        <p:txBody>
-          <a:bodyPr wrap="square">
-            <a:spAutoFit/>
-          </a:bodyPr>
-          <a:lstStyle/>
-          <a:p>
-            <a:pPr algn="ctr">
-              <a:defRPr sz="2000" b="0">
-                <a:solidFill>
-                  <a:srgbClr val="656D76"/>
-                </a:solidFill>
-                <a:latin typeface="Microsoft YaHei"/>
-              </a:defRPr>
-            </a:pPr>
-            <a:r>
-              <a:t>以后再也不用担心代码丢失，还能分享给全世界</a:t>
-            </a:r>
-          </a:p>
-        </p:txBody>
-      </p:sp>
-      <p:sp>
-        <p:nvSpPr>
-          <p:cNvPr id="5" name="Rounded Rectangle 4"/>
+              <a:t>🔍 关键词放大镜 — 功能一览</a:t>
+            </a:r>
+          </a:p>
+        </p:txBody>
+      </p:sp>
+      <p:sp>
+        <p:nvSpPr>
+          <p:cNvPr id="4" name="Rounded Rectangle 3"/>
           <p:cNvSpPr/>
           <p:nvPr/>
         </p:nvSpPr>
         <p:spPr>
           <a:xfrm>
-            <a:off x="365760" y="2926080"/>
-            <a:ext cx="1737360" cy="1371600"/>
+            <a:off x="365760" y="914400"/>
+            <a:ext cx="1737360" cy="457200"/>
           </a:xfrm>
           <a:prstGeom prst="roundRect">
             <a:avLst/>
           </a:prstGeom>
           <a:solidFill>
-            <a:srgbClr val="FFFFFF"/>
+            <a:srgbClr val="FD8C73"/>
           </a:solidFill>
-          <a:ln w="25400">
-            <a:solidFill>
-              <a:srgbClr val="FD8C73"/>
-            </a:solidFill>
+          <a:ln>
+            <a:noFill/>
           </a:ln>
         </p:spPr>
         <p:style>
@@ -5076,20 +4558,30 @@
           <a:bodyPr rtlCol="0" anchor="ctr"/>
           <a:lstStyle/>
           <a:p>
-            <a:pPr algn="ctr"/>
-          </a:p>
-        </p:txBody>
-      </p:sp>
-      <p:sp>
-        <p:nvSpPr>
-          <p:cNvPr id="6" name="TextBox 5"/>
+            <a:pPr algn="ctr">
+              <a:defRPr sz="1400">
+                <a:solidFill>
+                  <a:srgbClr val="FFFFFF"/>
+                </a:solidFill>
+                <a:latin typeface="Microsoft YaHei"/>
+              </a:defRPr>
+            </a:pPr>
+            <a:r>
+              <a:t>🎯 选中放大</a:t>
+            </a:r>
+          </a:p>
+        </p:txBody>
+      </p:sp>
+      <p:sp>
+        <p:nvSpPr>
+          <p:cNvPr id="5" name="TextBox 4"/>
           <p:cNvSpPr txBox="1"/>
           <p:nvPr/>
         </p:nvSpPr>
         <p:spPr>
           <a:xfrm>
-            <a:off x="457200" y="3017520"/>
-            <a:ext cx="1554480" cy="365760"/>
+            <a:off x="457200" y="1463040"/>
+            <a:ext cx="1554480" cy="1097280"/>
           </a:xfrm>
           <a:prstGeom prst="rect">
             <a:avLst/>
@@ -5102,81 +4594,43 @@
           </a:bodyPr>
           <a:lstStyle/>
           <a:p>
-            <a:pPr algn="ctr">
-              <a:defRPr sz="1600" b="1">
-                <a:solidFill>
-                  <a:srgbClr val="FD8C73"/>
+            <a:pPr algn="l">
+              <a:defRPr sz="1200" b="0">
+                <a:solidFill>
+                  <a:srgbClr val="1F2328"/>
                 </a:solidFill>
                 <a:latin typeface="Microsoft YaHei"/>
               </a:defRPr>
             </a:pPr>
             <a:r>
-              <a:t>① 注册</a:t>
-            </a:r>
-          </a:p>
-        </p:txBody>
-      </p:sp>
-      <p:sp>
-        <p:nvSpPr>
-          <p:cNvPr id="7" name="TextBox 6"/>
-          <p:cNvSpPr txBox="1"/>
-          <p:nvPr/>
-        </p:nvSpPr>
-        <p:spPr>
-          <a:xfrm>
-            <a:off x="457200" y="3383280"/>
-            <a:ext cx="1554480" cy="822960"/>
-          </a:xfrm>
-          <a:prstGeom prst="rect">
-            <a:avLst/>
-          </a:prstGeom>
-          <a:noFill/>
-        </p:spPr>
-        <p:txBody>
-          <a:bodyPr wrap="square">
-            <a:spAutoFit/>
-          </a:bodyPr>
-          <a:lstStyle/>
-          <a:p>
-            <a:pPr algn="ctr">
-              <a:defRPr sz="1100" b="0">
-                <a:solidFill>
-                  <a:srgbClr val="1F2328"/>
-                </a:solidFill>
-                <a:latin typeface="Microsoft YaHei"/>
-              </a:defRPr>
-            </a:pPr>
-            <a:r>
-              <a:t>github.com</a:t>
-            </a:r>
-            <a:br/>
-            <a:r>
-              <a:t>点 Sign up</a:t>
-            </a:r>
-          </a:p>
-        </p:txBody>
-      </p:sp>
-      <p:sp>
-        <p:nvSpPr>
-          <p:cNvPr id="8" name="Rounded Rectangle 7"/>
+              <a:t>拖选文字自动放大2倍</a:t>
+            </a:r>
+            <a:br/>
+            <a:r>
+              <a:t>Ctrl+点击放大单词</a:t>
+            </a:r>
+          </a:p>
+        </p:txBody>
+      </p:sp>
+      <p:sp>
+        <p:nvSpPr>
+          <p:cNvPr id="6" name="Rounded Rectangle 5"/>
           <p:cNvSpPr/>
           <p:nvPr/>
         </p:nvSpPr>
         <p:spPr>
           <a:xfrm>
-            <a:off x="2286000" y="2926080"/>
-            <a:ext cx="1737360" cy="1371600"/>
+            <a:off x="2331720" y="914400"/>
+            <a:ext cx="1737360" cy="457200"/>
           </a:xfrm>
           <a:prstGeom prst="roundRect">
             <a:avLst/>
           </a:prstGeom>
           <a:solidFill>
-            <a:srgbClr val="FFFFFF"/>
+            <a:srgbClr val="FD8C73"/>
           </a:solidFill>
-          <a:ln w="25400">
-            <a:solidFill>
-              <a:srgbClr val="FD8C73"/>
-            </a:solidFill>
+          <a:ln>
+            <a:noFill/>
           </a:ln>
         </p:spPr>
         <p:style>
@@ -5197,20 +4651,30 @@
           <a:bodyPr rtlCol="0" anchor="ctr"/>
           <a:lstStyle/>
           <a:p>
-            <a:pPr algn="ctr"/>
-          </a:p>
-        </p:txBody>
-      </p:sp>
-      <p:sp>
-        <p:nvSpPr>
-          <p:cNvPr id="9" name="TextBox 8"/>
+            <a:pPr algn="ctr">
+              <a:defRPr sz="1400">
+                <a:solidFill>
+                  <a:srgbClr val="FFFFFF"/>
+                </a:solidFill>
+                <a:latin typeface="Microsoft YaHei"/>
+              </a:defRPr>
+            </a:pPr>
+            <a:r>
+              <a:t>🖥️ 演示模式</a:t>
+            </a:r>
+          </a:p>
+        </p:txBody>
+      </p:sp>
+      <p:sp>
+        <p:nvSpPr>
+          <p:cNvPr id="7" name="TextBox 6"/>
           <p:cNvSpPr txBox="1"/>
           <p:nvPr/>
         </p:nvSpPr>
         <p:spPr>
           <a:xfrm>
-            <a:off x="2377440" y="3017520"/>
-            <a:ext cx="1554480" cy="365760"/>
+            <a:off x="2423160" y="1463040"/>
+            <a:ext cx="1554480" cy="1097280"/>
           </a:xfrm>
           <a:prstGeom prst="rect">
             <a:avLst/>
@@ -5223,81 +4687,43 @@
           </a:bodyPr>
           <a:lstStyle/>
           <a:p>
-            <a:pPr algn="ctr">
-              <a:defRPr sz="1600" b="1">
-                <a:solidFill>
-                  <a:srgbClr val="FD8C73"/>
+            <a:pPr algn="l">
+              <a:defRPr sz="1200" b="0">
+                <a:solidFill>
+                  <a:srgbClr val="1F2328"/>
                 </a:solidFill>
                 <a:latin typeface="Microsoft YaHei"/>
               </a:defRPr>
             </a:pPr>
             <a:r>
-              <a:t>② 登录</a:t>
-            </a:r>
-          </a:p>
-        </p:txBody>
-      </p:sp>
-      <p:sp>
-        <p:nvSpPr>
-          <p:cNvPr id="10" name="TextBox 9"/>
-          <p:cNvSpPr txBox="1"/>
-          <p:nvPr/>
-        </p:nvSpPr>
-        <p:spPr>
-          <a:xfrm>
-            <a:off x="2377440" y="3383280"/>
-            <a:ext cx="1554480" cy="822960"/>
-          </a:xfrm>
-          <a:prstGeom prst="rect">
-            <a:avLst/>
-          </a:prstGeom>
-          <a:noFill/>
-        </p:spPr>
-        <p:txBody>
-          <a:bodyPr wrap="square">
-            <a:spAutoFit/>
-          </a:bodyPr>
-          <a:lstStyle/>
-          <a:p>
-            <a:pPr algn="ctr">
-              <a:defRPr sz="1100" b="0">
-                <a:solidFill>
-                  <a:srgbClr val="1F2328"/>
-                </a:solidFill>
-                <a:latin typeface="Microsoft YaHei"/>
-              </a:defRPr>
-            </a:pPr>
-            <a:r>
-              <a:t>输入邮箱</a:t>
-            </a:r>
-            <a:br/>
-            <a:r>
-              <a:t>和密码</a:t>
-            </a:r>
-          </a:p>
-        </p:txBody>
-      </p:sp>
-      <p:sp>
-        <p:nvSpPr>
-          <p:cNvPr id="11" name="Rounded Rectangle 10"/>
+              <a:t>大鼠标橙色光圈</a:t>
+            </a:r>
+            <a:br/>
+            <a:r>
+              <a:t>演示时更清晰</a:t>
+            </a:r>
+          </a:p>
+        </p:txBody>
+      </p:sp>
+      <p:sp>
+        <p:nvSpPr>
+          <p:cNvPr id="8" name="Rounded Rectangle 7"/>
           <p:cNvSpPr/>
           <p:nvPr/>
         </p:nvSpPr>
         <p:spPr>
           <a:xfrm>
-            <a:off x="4206240" y="2926080"/>
-            <a:ext cx="1737360" cy="1371600"/>
+            <a:off x="4297680" y="914400"/>
+            <a:ext cx="1737360" cy="457200"/>
           </a:xfrm>
           <a:prstGeom prst="roundRect">
             <a:avLst/>
           </a:prstGeom>
           <a:solidFill>
-            <a:srgbClr val="FFFFFF"/>
+            <a:srgbClr val="FD8C73"/>
           </a:solidFill>
-          <a:ln w="25400">
-            <a:solidFill>
-              <a:srgbClr val="FD8C73"/>
-            </a:solidFill>
+          <a:ln>
+            <a:noFill/>
           </a:ln>
         </p:spPr>
         <p:style>
@@ -5318,20 +4744,30 @@
           <a:bodyPr rtlCol="0" anchor="ctr"/>
           <a:lstStyle/>
           <a:p>
-            <a:pPr algn="ctr"/>
-          </a:p>
-        </p:txBody>
-      </p:sp>
-      <p:sp>
-        <p:nvSpPr>
-          <p:cNvPr id="12" name="TextBox 11"/>
+            <a:pPr algn="ctr">
+              <a:defRPr sz="1400">
+                <a:solidFill>
+                  <a:srgbClr val="FFFFFF"/>
+                </a:solidFill>
+                <a:latin typeface="Microsoft YaHei"/>
+              </a:defRPr>
+            </a:pPr>
+            <a:r>
+              <a:t>✏️ 画笔勾画</a:t>
+            </a:r>
+          </a:p>
+        </p:txBody>
+      </p:sp>
+      <p:sp>
+        <p:nvSpPr>
+          <p:cNvPr id="9" name="TextBox 8"/>
           <p:cNvSpPr txBox="1"/>
           <p:nvPr/>
         </p:nvSpPr>
         <p:spPr>
           <a:xfrm>
-            <a:off x="4297680" y="3017520"/>
-            <a:ext cx="1554480" cy="365760"/>
+            <a:off x="4389120" y="1463040"/>
+            <a:ext cx="1554480" cy="1097280"/>
           </a:xfrm>
           <a:prstGeom prst="rect">
             <a:avLst/>
@@ -5344,81 +4780,43 @@
           </a:bodyPr>
           <a:lstStyle/>
           <a:p>
-            <a:pPr algn="ctr">
-              <a:defRPr sz="1600" b="1">
-                <a:solidFill>
-                  <a:srgbClr val="FD8C73"/>
+            <a:pPr algn="l">
+              <a:defRPr sz="1200" b="0">
+                <a:solidFill>
+                  <a:srgbClr val="1F2328"/>
                 </a:solidFill>
                 <a:latin typeface="Microsoft YaHei"/>
               </a:defRPr>
             </a:pPr>
             <a:r>
-              <a:t>③ 创建仓库</a:t>
-            </a:r>
-          </a:p>
-        </p:txBody>
-      </p:sp>
-      <p:sp>
-        <p:nvSpPr>
-          <p:cNvPr id="13" name="TextBox 12"/>
-          <p:cNvSpPr txBox="1"/>
-          <p:nvPr/>
-        </p:nvSpPr>
-        <p:spPr>
-          <a:xfrm>
-            <a:off x="4297680" y="3383280"/>
-            <a:ext cx="1554480" cy="822960"/>
-          </a:xfrm>
-          <a:prstGeom prst="rect">
-            <a:avLst/>
-          </a:prstGeom>
-          <a:noFill/>
-        </p:spPr>
-        <p:txBody>
-          <a:bodyPr wrap="square">
-            <a:spAutoFit/>
-          </a:bodyPr>
-          <a:lstStyle/>
-          <a:p>
-            <a:pPr algn="ctr">
-              <a:defRPr sz="1100" b="0">
-                <a:solidFill>
-                  <a:srgbClr val="1F2328"/>
-                </a:solidFill>
-                <a:latin typeface="Microsoft YaHei"/>
-              </a:defRPr>
-            </a:pPr>
-            <a:r>
-              <a:t>点 ➕</a:t>
-            </a:r>
-            <a:br/>
-            <a:r>
-              <a:t>→ New repo</a:t>
-            </a:r>
-          </a:p>
-        </p:txBody>
-      </p:sp>
-      <p:sp>
-        <p:nvSpPr>
-          <p:cNvPr id="14" name="Rounded Rectangle 13"/>
+              <a:t>透明画板随意勾画</a:t>
+            </a:r>
+            <a:br/>
+            <a:r>
+              <a:t>支持电容笔/手指</a:t>
+            </a:r>
+          </a:p>
+        </p:txBody>
+      </p:sp>
+      <p:sp>
+        <p:nvSpPr>
+          <p:cNvPr id="10" name="Rounded Rectangle 9"/>
           <p:cNvSpPr/>
           <p:nvPr/>
         </p:nvSpPr>
         <p:spPr>
           <a:xfrm>
-            <a:off x="6126480" y="2926080"/>
-            <a:ext cx="1737360" cy="1371600"/>
+            <a:off x="6263640" y="914400"/>
+            <a:ext cx="1737360" cy="457200"/>
           </a:xfrm>
           <a:prstGeom prst="roundRect">
             <a:avLst/>
           </a:prstGeom>
           <a:solidFill>
-            <a:srgbClr val="FFFFFF"/>
+            <a:srgbClr val="FD8C73"/>
           </a:solidFill>
-          <a:ln w="25400">
-            <a:solidFill>
-              <a:srgbClr val="FD8C73"/>
-            </a:solidFill>
+          <a:ln>
+            <a:noFill/>
           </a:ln>
         </p:spPr>
         <p:style>
@@ -5439,20 +4837,30 @@
           <a:bodyPr rtlCol="0" anchor="ctr"/>
           <a:lstStyle/>
           <a:p>
-            <a:pPr algn="ctr"/>
-          </a:p>
-        </p:txBody>
-      </p:sp>
-      <p:sp>
-        <p:nvSpPr>
-          <p:cNvPr id="15" name="TextBox 14"/>
+            <a:pPr algn="ctr">
+              <a:defRPr sz="1400">
+                <a:solidFill>
+                  <a:srgbClr val="FFFFFF"/>
+                </a:solidFill>
+                <a:latin typeface="Microsoft YaHei"/>
+              </a:defRPr>
+            </a:pPr>
+            <a:r>
+              <a:t>📝 中文备注</a:t>
+            </a:r>
+          </a:p>
+        </p:txBody>
+      </p:sp>
+      <p:sp>
+        <p:nvSpPr>
+          <p:cNvPr id="11" name="TextBox 10"/>
           <p:cNvSpPr txBox="1"/>
           <p:nvPr/>
         </p:nvSpPr>
         <p:spPr>
           <a:xfrm>
-            <a:off x="6217920" y="3017520"/>
-            <a:ext cx="1554480" cy="365760"/>
+            <a:off x="6355079" y="1463040"/>
+            <a:ext cx="1554480" cy="1097280"/>
           </a:xfrm>
           <a:prstGeom prst="rect">
             <a:avLst/>
@@ -5465,81 +4873,43 @@
           </a:bodyPr>
           <a:lstStyle/>
           <a:p>
-            <a:pPr algn="ctr">
-              <a:defRPr sz="1600" b="1">
-                <a:solidFill>
-                  <a:srgbClr val="FD8C73"/>
+            <a:pPr algn="l">
+              <a:defRPr sz="1200" b="0">
+                <a:solidFill>
+                  <a:srgbClr val="1F2328"/>
                 </a:solidFill>
                 <a:latin typeface="Microsoft YaHei"/>
               </a:defRPr>
             </a:pPr>
             <a:r>
-              <a:t>④ 复制 URL</a:t>
-            </a:r>
-          </a:p>
-        </p:txBody>
-      </p:sp>
-      <p:sp>
-        <p:nvSpPr>
-          <p:cNvPr id="16" name="TextBox 15"/>
-          <p:cNvSpPr txBox="1"/>
-          <p:nvPr/>
-        </p:nvSpPr>
-        <p:spPr>
-          <a:xfrm>
-            <a:off x="6217920" y="3383280"/>
-            <a:ext cx="1554480" cy="822960"/>
-          </a:xfrm>
-          <a:prstGeom prst="rect">
-            <a:avLst/>
-          </a:prstGeom>
-          <a:noFill/>
-        </p:spPr>
-        <p:txBody>
-          <a:bodyPr wrap="square">
-            <a:spAutoFit/>
-          </a:bodyPr>
-          <a:lstStyle/>
-          <a:p>
-            <a:pPr algn="ctr">
-              <a:defRPr sz="1100" b="0">
-                <a:solidFill>
-                  <a:srgbClr val="1F2328"/>
-                </a:solidFill>
-                <a:latin typeface="Microsoft YaHei"/>
-              </a:defRPr>
-            </a:pPr>
-            <a:r>
-              <a:t>Code 按钮</a:t>
-            </a:r>
-            <a:br/>
-            <a:r>
-              <a:t>复制 HTTPS 地址</a:t>
-            </a:r>
-          </a:p>
-        </p:txBody>
-      </p:sp>
-      <p:sp>
-        <p:nvSpPr>
-          <p:cNvPr id="17" name="Rounded Rectangle 16"/>
+              <a:t>Alt+点击添加中文注释</a:t>
+            </a:r>
+            <a:br/>
+            <a:r>
+              <a:t>可隐藏/删除</a:t>
+            </a:r>
+          </a:p>
+        </p:txBody>
+      </p:sp>
+      <p:sp>
+        <p:nvSpPr>
+          <p:cNvPr id="12" name="Rounded Rectangle 11"/>
           <p:cNvSpPr/>
           <p:nvPr/>
         </p:nvSpPr>
         <p:spPr>
           <a:xfrm>
-            <a:off x="8046720" y="2926080"/>
-            <a:ext cx="1737360" cy="1371600"/>
+            <a:off x="8229600" y="914400"/>
+            <a:ext cx="1737360" cy="457200"/>
           </a:xfrm>
           <a:prstGeom prst="roundRect">
             <a:avLst/>
           </a:prstGeom>
           <a:solidFill>
-            <a:srgbClr val="FFFFFF"/>
+            <a:srgbClr val="FD8C73"/>
           </a:solidFill>
-          <a:ln w="25400">
-            <a:solidFill>
-              <a:srgbClr val="FD8C73"/>
-            </a:solidFill>
+          <a:ln>
+            <a:noFill/>
           </a:ln>
         </p:spPr>
         <p:style>
@@ -5560,20 +4930,30 @@
           <a:bodyPr rtlCol="0" anchor="ctr"/>
           <a:lstStyle/>
           <a:p>
-            <a:pPr algn="ctr"/>
-          </a:p>
-        </p:txBody>
-      </p:sp>
-      <p:sp>
-        <p:nvSpPr>
-          <p:cNvPr id="18" name="TextBox 17"/>
+            <a:pPr algn="ctr">
+              <a:defRPr sz="1400">
+                <a:solidFill>
+                  <a:srgbClr val="FFFFFF"/>
+                </a:solidFill>
+                <a:latin typeface="Microsoft YaHei"/>
+              </a:defRPr>
+            </a:pPr>
+            <a:r>
+              <a:t>🫥 马赛克</a:t>
+            </a:r>
+          </a:p>
+        </p:txBody>
+      </p:sp>
+      <p:sp>
+        <p:nvSpPr>
+          <p:cNvPr id="13" name="TextBox 12"/>
           <p:cNvSpPr txBox="1"/>
           <p:nvPr/>
         </p:nvSpPr>
         <p:spPr>
           <a:xfrm>
-            <a:off x="8138160" y="3017520"/>
-            <a:ext cx="1554480" cy="365760"/>
+            <a:off x="8321040" y="1463040"/>
+            <a:ext cx="1554480" cy="1097280"/>
           </a:xfrm>
           <a:prstGeom prst="rect">
             <a:avLst/>
@@ -5586,81 +4966,43 @@
           </a:bodyPr>
           <a:lstStyle/>
           <a:p>
-            <a:pPr algn="ctr">
-              <a:defRPr sz="1600" b="1">
-                <a:solidFill>
-                  <a:srgbClr val="FD8C73"/>
+            <a:pPr algn="l">
+              <a:defRPr sz="1200" b="0">
+                <a:solidFill>
+                  <a:srgbClr val="1F2328"/>
                 </a:solidFill>
                 <a:latin typeface="Microsoft YaHei"/>
               </a:defRPr>
             </a:pPr>
             <a:r>
-              <a:t>⑤ 6条命令</a:t>
-            </a:r>
-          </a:p>
-        </p:txBody>
-      </p:sp>
-      <p:sp>
-        <p:nvSpPr>
-          <p:cNvPr id="19" name="TextBox 18"/>
-          <p:cNvSpPr txBox="1"/>
-          <p:nvPr/>
-        </p:nvSpPr>
-        <p:spPr>
-          <a:xfrm>
-            <a:off x="8138160" y="3383280"/>
-            <a:ext cx="1554480" cy="822960"/>
-          </a:xfrm>
-          <a:prstGeom prst="rect">
-            <a:avLst/>
-          </a:prstGeom>
-          <a:noFill/>
-        </p:spPr>
-        <p:txBody>
-          <a:bodyPr wrap="square">
-            <a:spAutoFit/>
-          </a:bodyPr>
-          <a:lstStyle/>
-          <a:p>
-            <a:pPr algn="ctr">
-              <a:defRPr sz="1100" b="0">
-                <a:solidFill>
-                  <a:srgbClr val="1F2328"/>
-                </a:solidFill>
-                <a:latin typeface="Microsoft YaHei"/>
-              </a:defRPr>
-            </a:pPr>
-            <a:r>
-              <a:t>cd→init→add</a:t>
-            </a:r>
-            <a:br/>
-            <a:r>
-              <a:t>→commit→push</a:t>
-            </a:r>
-          </a:p>
-        </p:txBody>
-      </p:sp>
-      <p:sp>
-        <p:nvSpPr>
-          <p:cNvPr id="20" name="Rounded Rectangle 19"/>
+              <a:t>点击文字打码</a:t>
+            </a:r>
+            <a:br/>
+            <a:r>
+              <a:t>悬停预览，再点取消</a:t>
+            </a:r>
+          </a:p>
+        </p:txBody>
+      </p:sp>
+      <p:sp>
+        <p:nvSpPr>
+          <p:cNvPr id="14" name="Rounded Rectangle 13"/>
           <p:cNvSpPr/>
           <p:nvPr/>
         </p:nvSpPr>
         <p:spPr>
           <a:xfrm>
-            <a:off x="9966960" y="2926080"/>
-            <a:ext cx="1737360" cy="1371600"/>
+            <a:off x="10195560" y="914400"/>
+            <a:ext cx="1737360" cy="457200"/>
           </a:xfrm>
           <a:prstGeom prst="roundRect">
             <a:avLst/>
           </a:prstGeom>
           <a:solidFill>
-            <a:srgbClr val="FFFFFF"/>
+            <a:srgbClr val="FD8C73"/>
           </a:solidFill>
-          <a:ln w="25400">
-            <a:solidFill>
-              <a:srgbClr val="2DA44E"/>
-            </a:solidFill>
+          <a:ln>
+            <a:noFill/>
           </a:ln>
         </p:spPr>
         <p:style>
@@ -5681,20 +5023,30 @@
           <a:bodyPr rtlCol="0" anchor="ctr"/>
           <a:lstStyle/>
           <a:p>
-            <a:pPr algn="ctr"/>
-          </a:p>
-        </p:txBody>
-      </p:sp>
-      <p:sp>
-        <p:nvSpPr>
-          <p:cNvPr id="21" name="TextBox 20"/>
+            <a:pPr algn="ctr">
+              <a:defRPr sz="1400">
+                <a:solidFill>
+                  <a:srgbClr val="FFFFFF"/>
+                </a:solidFill>
+                <a:latin typeface="Microsoft YaHei"/>
+              </a:defRPr>
+            </a:pPr>
+            <a:r>
+              <a:t>🧹 擦除</a:t>
+            </a:r>
+          </a:p>
+        </p:txBody>
+      </p:sp>
+      <p:sp>
+        <p:nvSpPr>
+          <p:cNvPr id="15" name="TextBox 14"/>
           <p:cNvSpPr txBox="1"/>
           <p:nvPr/>
         </p:nvSpPr>
         <p:spPr>
           <a:xfrm>
-            <a:off x="10058400" y="3017520"/>
-            <a:ext cx="1554480" cy="365760"/>
+            <a:off x="10287000" y="1463040"/>
+            <a:ext cx="1554480" cy="1097280"/>
           </a:xfrm>
           <a:prstGeom prst="rect">
             <a:avLst/>
@@ -5707,128 +5059,20 @@
           </a:bodyPr>
           <a:lstStyle/>
           <a:p>
-            <a:pPr algn="ctr">
-              <a:defRPr sz="1600" b="1">
-                <a:solidFill>
-                  <a:srgbClr val="2DA44E"/>
+            <a:pPr algn="l">
+              <a:defRPr sz="1200" b="0">
+                <a:solidFill>
+                  <a:srgbClr val="1F2328"/>
                 </a:solidFill>
                 <a:latin typeface="Microsoft YaHei"/>
               </a:defRPr>
             </a:pPr>
             <a:r>
-              <a:t>⑥ 以后更新</a:t>
-            </a:r>
-          </a:p>
-        </p:txBody>
-      </p:sp>
-      <p:sp>
-        <p:nvSpPr>
-          <p:cNvPr id="22" name="TextBox 21"/>
-          <p:cNvSpPr txBox="1"/>
-          <p:nvPr/>
-        </p:nvSpPr>
-        <p:spPr>
-          <a:xfrm>
-            <a:off x="10058400" y="3383280"/>
-            <a:ext cx="1554480" cy="822960"/>
-          </a:xfrm>
-          <a:prstGeom prst="rect">
-            <a:avLst/>
-          </a:prstGeom>
-          <a:noFill/>
-        </p:spPr>
-        <p:txBody>
-          <a:bodyPr wrap="square">
-            <a:spAutoFit/>
-          </a:bodyPr>
-          <a:lstStyle/>
-          <a:p>
-            <a:pPr algn="ctr">
-              <a:defRPr sz="1100" b="0">
-                <a:solidFill>
-                  <a:srgbClr val="1F2328"/>
-                </a:solidFill>
-                <a:latin typeface="Microsoft YaHei"/>
-              </a:defRPr>
-            </a:pPr>
-            <a:r>
-              <a:t>cd→add</a:t>
-            </a:r>
-            <a:br/>
-            <a:r>
-              <a:t>→commit→push</a:t>
-            </a:r>
-          </a:p>
-        </p:txBody>
-      </p:sp>
-      <p:sp>
-        <p:nvSpPr>
-          <p:cNvPr id="23" name="TextBox 22"/>
-          <p:cNvSpPr txBox="1"/>
-          <p:nvPr/>
-        </p:nvSpPr>
-        <p:spPr>
-          <a:xfrm>
-            <a:off x="914400" y="5029200"/>
-            <a:ext cx="10058400" cy="731520"/>
-          </a:xfrm>
-          <a:prstGeom prst="rect">
-            <a:avLst/>
-          </a:prstGeom>
-          <a:noFill/>
-        </p:spPr>
-        <p:txBody>
-          <a:bodyPr wrap="square">
-            <a:spAutoFit/>
-          </a:bodyPr>
-          <a:lstStyle/>
-          <a:p>
-            <a:pPr algn="ctr">
-              <a:defRPr sz="1800" b="0">
-                <a:solidFill>
-                  <a:srgbClr val="1F2328"/>
-                </a:solidFill>
-                <a:latin typeface="Microsoft YaHei"/>
-              </a:defRPr>
-            </a:pPr>
-            <a:r>
-              <a:t>现在打开 chrome://extensions 刷新你的插件吧！</a:t>
-            </a:r>
-          </a:p>
-        </p:txBody>
-      </p:sp>
-      <p:sp>
-        <p:nvSpPr>
-          <p:cNvPr id="24" name="TextBox 23"/>
-          <p:cNvSpPr txBox="1"/>
-          <p:nvPr/>
-        </p:nvSpPr>
-        <p:spPr>
-          <a:xfrm>
-            <a:off x="914400" y="5760720"/>
-            <a:ext cx="10058400" cy="457200"/>
-          </a:xfrm>
-          <a:prstGeom prst="rect">
-            <a:avLst/>
-          </a:prstGeom>
-          <a:noFill/>
-        </p:spPr>
-        <p:txBody>
-          <a:bodyPr wrap="square">
-            <a:spAutoFit/>
-          </a:bodyPr>
-          <a:lstStyle/>
-          <a:p>
-            <a:pPr algn="ctr">
-              <a:defRPr sz="1600" b="0">
-                <a:solidFill>
-                  <a:srgbClr val="656D76"/>
-                </a:solidFill>
-                <a:latin typeface="Microsoft YaHei"/>
-              </a:defRPr>
-            </a:pPr>
-            <a:r>
-              <a:t>有任何问题随时问我 😊</a:t>
+              <a:t>悬停备注点✕删单个</a:t>
+            </a:r>
+            <a:br/>
+            <a:r>
+              <a:t>弹窗点按钮删全部</a:t>
             </a:r>
           </a:p>
         </p:txBody>
@@ -5841,7 +5085,7 @@
 </p:sld>
 </file>
 
-<file path=ppt/slides/slide2.xml><?xml version="1.0" encoding="utf-8"?>
+<file path=ppt/slides/slide14.xml><?xml version="1.0" encoding="utf-8"?>
 <p:sld xmlns:a="http://schemas.openxmlformats.org/drawingml/2006/main" xmlns:p="http://schemas.openxmlformats.org/presentationml/2006/main" xmlns:r="http://schemas.openxmlformats.org/officeDocument/2006/relationships">
   <p:cSld>
     <p:bg>
@@ -5868,7 +5112,7 @@
         <p:spPr>
           <a:xfrm>
             <a:off x="0" y="0"/>
-            <a:ext cx="12191695" cy="457200"/>
+            <a:ext cx="12191695" cy="91440"/>
           </a:xfrm>
           <a:prstGeom prst="roundRect">
             <a:avLst/>
@@ -5910,8 +5154,8 @@
         </p:nvSpPr>
         <p:spPr>
           <a:xfrm>
-            <a:off x="457200" y="73152"/>
-            <a:ext cx="10972800" cy="365760"/>
+            <a:off x="914400" y="731520"/>
+            <a:ext cx="10058400" cy="914400"/>
           </a:xfrm>
           <a:prstGeom prst="rect">
             <a:avLst/>
@@ -5924,6 +5168,233 @@
           </a:bodyPr>
           <a:lstStyle/>
           <a:p>
+            <a:pPr algn="ctr">
+              <a:defRPr sz="3600" b="1">
+                <a:solidFill>
+                  <a:srgbClr val="1F2328"/>
+                </a:solidFill>
+                <a:latin typeface="Microsoft YaHei"/>
+              </a:defRPr>
+            </a:pPr>
+            <a:r>
+              <a:t>🎉 恭喜！你的插件已成功上传到 GitHub！</a:t>
+            </a:r>
+          </a:p>
+        </p:txBody>
+      </p:sp>
+      <p:sp>
+        <p:nvSpPr>
+          <p:cNvPr id="4" name="TextBox 3"/>
+          <p:cNvSpPr txBox="1"/>
+          <p:nvPr/>
+        </p:nvSpPr>
+        <p:spPr>
+          <a:xfrm>
+            <a:off x="914400" y="2011680"/>
+            <a:ext cx="10058400" cy="457200"/>
+          </a:xfrm>
+          <a:prstGeom prst="rect">
+            <a:avLst/>
+          </a:prstGeom>
+          <a:noFill/>
+        </p:spPr>
+        <p:txBody>
+          <a:bodyPr wrap="square">
+            <a:spAutoFit/>
+          </a:bodyPr>
+          <a:lstStyle/>
+          <a:p>
+            <a:pPr algn="ctr">
+              <a:defRPr sz="2000" b="0">
+                <a:solidFill>
+                  <a:srgbClr val="FD8C73"/>
+                </a:solidFill>
+                <a:latin typeface="Microsoft YaHei"/>
+              </a:defRPr>
+            </a:pPr>
+            <a:r>
+              <a:t>https://github.com/mmm1111lhc/keyword-magnifier</a:t>
+            </a:r>
+          </a:p>
+        </p:txBody>
+      </p:sp>
+      <p:sp>
+        <p:nvSpPr>
+          <p:cNvPr id="5" name="TextBox 4"/>
+          <p:cNvSpPr txBox="1"/>
+          <p:nvPr/>
+        </p:nvSpPr>
+        <p:spPr>
+          <a:xfrm>
+            <a:off x="914400" y="3200400"/>
+            <a:ext cx="10058400" cy="1828800"/>
+          </a:xfrm>
+          <a:prstGeom prst="rect">
+            <a:avLst/>
+          </a:prstGeom>
+          <a:noFill/>
+        </p:spPr>
+        <p:txBody>
+          <a:bodyPr wrap="square">
+            <a:spAutoFit/>
+          </a:bodyPr>
+          <a:lstStyle/>
+          <a:p>
+            <a:pPr algn="ctr">
+              <a:defRPr sz="1600" b="0">
+                <a:solidFill>
+                  <a:srgbClr val="1F2328"/>
+                </a:solidFill>
+                <a:latin typeface="Microsoft YaHei"/>
+              </a:defRPr>
+            </a:pPr>
+            <a:r>
+              <a:t>📌 你已掌握：</a:t>
+            </a:r>
+            <a:br/>
+            <a:br/>
+            <a:r>
+              <a:t>✅ 注册 GitHub 账号</a:t>
+            </a:r>
+            <a:br/>
+            <a:r>
+              <a:t>✅ 创建仓库 + 上传代码</a:t>
+            </a:r>
+            <a:br/>
+            <a:r>
+              <a:t>✅ 更新代码到 GitHub</a:t>
+            </a:r>
+            <a:br/>
+            <a:r>
+              <a:t>✅ 下载/分享给其他人</a:t>
+            </a:r>
+            <a:br/>
+            <a:br/>
+            <a:r>
+              <a:t>你的插件已上线，随时可以拿出来演示！</a:t>
+            </a:r>
+          </a:p>
+        </p:txBody>
+      </p:sp>
+      <p:sp>
+        <p:nvSpPr>
+          <p:cNvPr id="6" name="TextBox 5"/>
+          <p:cNvSpPr txBox="1"/>
+          <p:nvPr/>
+        </p:nvSpPr>
+        <p:spPr>
+          <a:xfrm>
+            <a:off x="914400" y="5760720"/>
+            <a:ext cx="10058400" cy="457200"/>
+          </a:xfrm>
+          <a:prstGeom prst="rect">
+            <a:avLst/>
+          </a:prstGeom>
+          <a:noFill/>
+        </p:spPr>
+        <p:txBody>
+          <a:bodyPr wrap="square">
+            <a:spAutoFit/>
+          </a:bodyPr>
+          <a:lstStyle/>
+          <a:p>
+            <a:pPr algn="ctr">
+              <a:defRPr sz="1600" b="0">
+                <a:solidFill>
+                  <a:srgbClr val="656D76"/>
+                </a:solidFill>
+                <a:latin typeface="Microsoft YaHei"/>
+              </a:defRPr>
+            </a:pPr>
+            <a:r>
+              <a:t>有任何问题随时问我 😊</a:t>
+            </a:r>
+          </a:p>
+        </p:txBody>
+      </p:sp>
+    </p:spTree>
+  </p:cSld>
+  <p:clrMapOvr>
+    <a:masterClrMapping/>
+  </p:clrMapOvr>
+</p:sld>
+</file>
+
+<file path=ppt/slides/slide2.xml><?xml version="1.0" encoding="utf-8"?>
+<p:sld xmlns:a="http://schemas.openxmlformats.org/drawingml/2006/main" xmlns:p="http://schemas.openxmlformats.org/presentationml/2006/main" xmlns:r="http://schemas.openxmlformats.org/officeDocument/2006/relationships">
+  <p:cSld>
+    <p:spTree>
+      <p:nvGrpSpPr>
+        <p:cNvPr id="1" name=""/>
+        <p:cNvGrpSpPr/>
+        <p:nvPr/>
+      </p:nvGrpSpPr>
+      <p:grpSpPr/>
+      <p:sp>
+        <p:nvSpPr>
+          <p:cNvPr id="2" name="Rounded Rectangle 1"/>
+          <p:cNvSpPr/>
+          <p:nvPr/>
+        </p:nvSpPr>
+        <p:spPr>
+          <a:xfrm>
+            <a:off x="0" y="0"/>
+            <a:ext cx="12191695" cy="457200"/>
+          </a:xfrm>
+          <a:prstGeom prst="roundRect">
+            <a:avLst/>
+          </a:prstGeom>
+          <a:solidFill>
+            <a:srgbClr val="FD8C73"/>
+          </a:solidFill>
+          <a:ln>
+            <a:noFill/>
+          </a:ln>
+        </p:spPr>
+        <p:style>
+          <a:lnRef idx="1">
+            <a:schemeClr val="accent1"/>
+          </a:lnRef>
+          <a:fillRef idx="3">
+            <a:schemeClr val="accent1"/>
+          </a:fillRef>
+          <a:effectRef idx="2">
+            <a:schemeClr val="accent1"/>
+          </a:effectRef>
+          <a:fontRef idx="minor">
+            <a:schemeClr val="lt1"/>
+          </a:fontRef>
+        </p:style>
+        <p:txBody>
+          <a:bodyPr rtlCol="0" anchor="ctr"/>
+          <a:lstStyle/>
+          <a:p>
+            <a:pPr algn="ctr"/>
+          </a:p>
+        </p:txBody>
+      </p:sp>
+      <p:sp>
+        <p:nvSpPr>
+          <p:cNvPr id="3" name="TextBox 2"/>
+          <p:cNvSpPr txBox="1"/>
+          <p:nvPr/>
+        </p:nvSpPr>
+        <p:spPr>
+          <a:xfrm>
+            <a:off x="365760" y="73152"/>
+            <a:ext cx="10972800" cy="365760"/>
+          </a:xfrm>
+          <a:prstGeom prst="rect">
+            <a:avLst/>
+          </a:prstGeom>
+          <a:noFill/>
+        </p:spPr>
+        <p:txBody>
+          <a:bodyPr wrap="square">
+            <a:spAutoFit/>
+          </a:bodyPr>
+          <a:lstStyle/>
+          <a:p>
             <a:pPr algn="l">
               <a:defRPr sz="1800" b="1">
                 <a:solidFill>
@@ -5933,14 +5404,14 @@
               </a:defRPr>
             </a:pPr>
             <a:r>
-              <a:t>步骤 ①：打开 GitHub 首页</a:t>
+              <a:t>步骤 ①：打开你的项目主页</a:t>
             </a:r>
           </a:p>
         </p:txBody>
       </p:sp>
       <p:pic>
         <p:nvPicPr>
-          <p:cNvPr id="4" name="Picture 3" descr="01_github_home.png"/>
+          <p:cNvPr id="4" name="Picture 3" descr="01_repo.png"/>
           <p:cNvPicPr>
             <a:picLocks noChangeAspect="1"/>
           </p:cNvPicPr>
@@ -5954,8 +5425,8 @@
         </p:blipFill>
         <p:spPr>
           <a:xfrm>
-            <a:off x="365760" y="594360"/>
-            <a:ext cx="8046720" cy="5669280"/>
+            <a:off x="274320" y="594360"/>
+            <a:ext cx="8046720" cy="5486400"/>
           </a:xfrm>
           <a:prstGeom prst="rect">
             <a:avLst/>
@@ -5970,8 +5441,8 @@
         </p:nvSpPr>
         <p:spPr>
           <a:xfrm>
-            <a:off x="8595360" y="594360"/>
-            <a:ext cx="3291840" cy="5669280"/>
+            <a:off x="8503920" y="594360"/>
+            <a:ext cx="3383280" cy="5852160"/>
           </a:xfrm>
           <a:prstGeom prst="roundRect">
             <a:avLst/>
@@ -6015,8 +5486,8 @@
         </p:nvSpPr>
         <p:spPr>
           <a:xfrm>
-            <a:off x="8778240" y="731520"/>
-            <a:ext cx="1828800" cy="320040"/>
+            <a:off x="8686800" y="731520"/>
+            <a:ext cx="1645920" cy="320040"/>
           </a:xfrm>
           <a:prstGeom prst="roundRect">
             <a:avLst/>
@@ -6068,8 +5539,8 @@
         </p:nvSpPr>
         <p:spPr>
           <a:xfrm>
-            <a:off x="8778240" y="1280160"/>
-            <a:ext cx="2926080" cy="320040"/>
+            <a:off x="8686800" y="1188720"/>
+            <a:ext cx="3017520" cy="4114800"/>
           </a:xfrm>
           <a:prstGeom prst="rect">
             <a:avLst/>
@@ -6083,7 +5554,7 @@
           <a:lstStyle/>
           <a:p>
             <a:pPr algn="l">
-              <a:defRPr sz="1400" b="1">
+              <a:defRPr sz="1400" b="0">
                 <a:solidFill>
                   <a:srgbClr val="1F2328"/>
                 </a:solidFill>
@@ -6091,362 +5562,24 @@
               </a:defRPr>
             </a:pPr>
             <a:r>
-              <a:t>第一步：打开 GitHub</a:t>
-            </a:r>
-          </a:p>
-        </p:txBody>
-      </p:sp>
-      <p:sp>
-        <p:nvSpPr>
-          <p:cNvPr id="8" name="TextBox 7"/>
-          <p:cNvSpPr txBox="1"/>
-          <p:nvPr/>
-        </p:nvSpPr>
-        <p:spPr>
-          <a:xfrm>
-            <a:off x="8778240" y="1600200"/>
-            <a:ext cx="2926080" cy="320040"/>
-          </a:xfrm>
-          <a:prstGeom prst="rect">
-            <a:avLst/>
-          </a:prstGeom>
-          <a:noFill/>
-        </p:spPr>
-        <p:txBody>
-          <a:bodyPr wrap="square">
-            <a:spAutoFit/>
-          </a:bodyPr>
-          <a:lstStyle/>
-          <a:p>
-            <a:pPr algn="l">
-              <a:defRPr sz="1400" b="0">
-                <a:solidFill>
-                  <a:srgbClr val="1F2328"/>
-                </a:solidFill>
-                <a:latin typeface="Microsoft YaHei"/>
-              </a:defRPr>
-            </a:pPr>
-          </a:p>
-        </p:txBody>
-      </p:sp>
-      <p:sp>
-        <p:nvSpPr>
-          <p:cNvPr id="9" name="TextBox 8"/>
-          <p:cNvSpPr txBox="1"/>
-          <p:nvPr/>
-        </p:nvSpPr>
-        <p:spPr>
-          <a:xfrm>
-            <a:off x="8778240" y="1920240"/>
-            <a:ext cx="2926080" cy="320040"/>
-          </a:xfrm>
-          <a:prstGeom prst="rect">
-            <a:avLst/>
-          </a:prstGeom>
-          <a:noFill/>
-        </p:spPr>
-        <p:txBody>
-          <a:bodyPr wrap="square">
-            <a:spAutoFit/>
-          </a:bodyPr>
-          <a:lstStyle/>
-          <a:p>
-            <a:pPr algn="l">
-              <a:defRPr sz="1400" b="0">
-                <a:solidFill>
-                  <a:srgbClr val="1F2328"/>
-                </a:solidFill>
-                <a:latin typeface="Microsoft YaHei"/>
-              </a:defRPr>
-            </a:pPr>
-            <a:r>
-              <a:t>在浏览器地址栏输入：</a:t>
-            </a:r>
-          </a:p>
-        </p:txBody>
-      </p:sp>
-      <p:sp>
-        <p:nvSpPr>
-          <p:cNvPr id="10" name="TextBox 9"/>
-          <p:cNvSpPr txBox="1"/>
-          <p:nvPr/>
-        </p:nvSpPr>
-        <p:spPr>
-          <a:xfrm>
-            <a:off x="8778240" y="2240280"/>
-            <a:ext cx="2926080" cy="320040"/>
-          </a:xfrm>
-          <a:prstGeom prst="rect">
-            <a:avLst/>
-          </a:prstGeom>
-          <a:noFill/>
-        </p:spPr>
-        <p:txBody>
-          <a:bodyPr wrap="square">
-            <a:spAutoFit/>
-          </a:bodyPr>
-          <a:lstStyle/>
-          <a:p>
-            <a:pPr algn="l">
-              <a:defRPr sz="1400" b="0">
-                <a:solidFill>
-                  <a:srgbClr val="1F2328"/>
-                </a:solidFill>
-                <a:latin typeface="Microsoft YaHei"/>
-              </a:defRPr>
-            </a:pPr>
-            <a:r>
-              <a:t>https://github.com</a:t>
-            </a:r>
-          </a:p>
-        </p:txBody>
-      </p:sp>
-      <p:sp>
-        <p:nvSpPr>
-          <p:cNvPr id="11" name="TextBox 10"/>
-          <p:cNvSpPr txBox="1"/>
-          <p:nvPr/>
-        </p:nvSpPr>
-        <p:spPr>
-          <a:xfrm>
-            <a:off x="8778240" y="2560320"/>
-            <a:ext cx="2926080" cy="320040"/>
-          </a:xfrm>
-          <a:prstGeom prst="rect">
-            <a:avLst/>
-          </a:prstGeom>
-          <a:noFill/>
-        </p:spPr>
-        <p:txBody>
-          <a:bodyPr wrap="square">
-            <a:spAutoFit/>
-          </a:bodyPr>
-          <a:lstStyle/>
-          <a:p>
-            <a:pPr algn="l">
-              <a:defRPr sz="1400" b="0">
-                <a:solidFill>
-                  <a:srgbClr val="1F2328"/>
-                </a:solidFill>
-                <a:latin typeface="Microsoft YaHei"/>
-              </a:defRPr>
-            </a:pPr>
-          </a:p>
-        </p:txBody>
-      </p:sp>
-      <p:sp>
-        <p:nvSpPr>
-          <p:cNvPr id="12" name="TextBox 11"/>
-          <p:cNvSpPr txBox="1"/>
-          <p:nvPr/>
-        </p:nvSpPr>
-        <p:spPr>
-          <a:xfrm>
-            <a:off x="8778240" y="2880360"/>
-            <a:ext cx="2926080" cy="320040"/>
-          </a:xfrm>
-          <a:prstGeom prst="rect">
-            <a:avLst/>
-          </a:prstGeom>
-          <a:noFill/>
-        </p:spPr>
-        <p:txBody>
-          <a:bodyPr wrap="square">
-            <a:spAutoFit/>
-          </a:bodyPr>
-          <a:lstStyle/>
-          <a:p>
-            <a:pPr algn="l">
-              <a:defRPr sz="1400" b="1">
-                <a:solidFill>
-                  <a:srgbClr val="1F2328"/>
-                </a:solidFill>
-                <a:latin typeface="Microsoft YaHei"/>
-              </a:defRPr>
-            </a:pPr>
-            <a:r>
-              <a:t>第二步：注册或登录</a:t>
-            </a:r>
-          </a:p>
-        </p:txBody>
-      </p:sp>
-      <p:sp>
-        <p:nvSpPr>
-          <p:cNvPr id="13" name="TextBox 12"/>
-          <p:cNvSpPr txBox="1"/>
-          <p:nvPr/>
-        </p:nvSpPr>
-        <p:spPr>
-          <a:xfrm>
-            <a:off x="8778240" y="3200400"/>
-            <a:ext cx="2926080" cy="320040"/>
-          </a:xfrm>
-          <a:prstGeom prst="rect">
-            <a:avLst/>
-          </a:prstGeom>
-          <a:noFill/>
-        </p:spPr>
-        <p:txBody>
-          <a:bodyPr wrap="square">
-            <a:spAutoFit/>
-          </a:bodyPr>
-          <a:lstStyle/>
-          <a:p>
-            <a:pPr algn="l">
-              <a:defRPr sz="1400" b="0">
-                <a:solidFill>
-                  <a:srgbClr val="1F2328"/>
-                </a:solidFill>
-                <a:latin typeface="Microsoft YaHei"/>
-              </a:defRPr>
-            </a:pPr>
-          </a:p>
-        </p:txBody>
-      </p:sp>
-      <p:sp>
-        <p:nvSpPr>
-          <p:cNvPr id="14" name="TextBox 13"/>
-          <p:cNvSpPr txBox="1"/>
-          <p:nvPr/>
-        </p:nvSpPr>
-        <p:spPr>
-          <a:xfrm>
-            <a:off x="8778240" y="3520440"/>
-            <a:ext cx="2926080" cy="320040"/>
-          </a:xfrm>
-          <a:prstGeom prst="rect">
-            <a:avLst/>
-          </a:prstGeom>
-          <a:noFill/>
-        </p:spPr>
-        <p:txBody>
-          <a:bodyPr wrap="square">
-            <a:spAutoFit/>
-          </a:bodyPr>
-          <a:lstStyle/>
-          <a:p>
-            <a:pPr algn="l">
-              <a:defRPr sz="1400" b="0">
-                <a:solidFill>
-                  <a:srgbClr val="1F2328"/>
-                </a:solidFill>
-                <a:latin typeface="Microsoft YaHei"/>
-              </a:defRPr>
-            </a:pPr>
-            <a:r>
-              <a:t>• 没有账号 → 点 Sign up</a:t>
-            </a:r>
-          </a:p>
-        </p:txBody>
-      </p:sp>
-      <p:sp>
-        <p:nvSpPr>
-          <p:cNvPr id="15" name="TextBox 14"/>
-          <p:cNvSpPr txBox="1"/>
-          <p:nvPr/>
-        </p:nvSpPr>
-        <p:spPr>
-          <a:xfrm>
-            <a:off x="8778240" y="3840480"/>
-            <a:ext cx="2926080" cy="320040"/>
-          </a:xfrm>
-          <a:prstGeom prst="rect">
-            <a:avLst/>
-          </a:prstGeom>
-          <a:noFill/>
-        </p:spPr>
-        <p:txBody>
-          <a:bodyPr wrap="square">
-            <a:spAutoFit/>
-          </a:bodyPr>
-          <a:lstStyle/>
-          <a:p>
-            <a:pPr algn="l">
-              <a:defRPr sz="1400" b="0">
-                <a:solidFill>
-                  <a:srgbClr val="1F2328"/>
-                </a:solidFill>
-                <a:latin typeface="Microsoft YaHei"/>
-              </a:defRPr>
-            </a:pPr>
-            <a:r>
-              <a:t>• 已有账号 → 点 Sign in</a:t>
-            </a:r>
-          </a:p>
-        </p:txBody>
-      </p:sp>
-      <p:sp>
-        <p:nvSpPr>
-          <p:cNvPr id="16" name="TextBox 15"/>
-          <p:cNvSpPr txBox="1"/>
-          <p:nvPr/>
-        </p:nvSpPr>
-        <p:spPr>
-          <a:xfrm>
-            <a:off x="8778240" y="4754880"/>
-            <a:ext cx="2926080" cy="914400"/>
-          </a:xfrm>
-          <a:prstGeom prst="rect">
-            <a:avLst/>
-          </a:prstGeom>
-          <a:noFill/>
-        </p:spPr>
-        <p:txBody>
-          <a:bodyPr wrap="square">
-            <a:spAutoFit/>
-          </a:bodyPr>
-          <a:lstStyle/>
-          <a:p>
-            <a:pPr algn="l">
-              <a:defRPr sz="1100" b="0">
-                <a:solidFill>
-                  <a:srgbClr val="656D76"/>
-                </a:solidFill>
-                <a:latin typeface="Microsoft YaHei"/>
-              </a:defRPr>
-            </a:pPr>
-            <a:r>
-              <a:t>💡 GitHub 是全球最大的</a:t>
-            </a:r>
-            <a:br/>
-            <a:r>
-              <a:t>代码托管平台（免费）</a:t>
-            </a:r>
-          </a:p>
-        </p:txBody>
-      </p:sp>
-      <p:sp>
-        <p:nvSpPr>
-          <p:cNvPr id="17" name="TextBox 16"/>
-          <p:cNvSpPr txBox="1"/>
-          <p:nvPr/>
-        </p:nvSpPr>
-        <p:spPr>
-          <a:xfrm>
-            <a:off x="5029200" y="6309360"/>
-            <a:ext cx="1828800" cy="274320"/>
-          </a:xfrm>
-          <a:prstGeom prst="rect">
-            <a:avLst/>
-          </a:prstGeom>
-          <a:noFill/>
-        </p:spPr>
-        <p:txBody>
-          <a:bodyPr wrap="square">
-            <a:spAutoFit/>
-          </a:bodyPr>
-          <a:lstStyle/>
-          <a:p>
-            <a:pPr algn="ctr">
-              <a:defRPr sz="1000" b="0">
-                <a:solidFill>
-                  <a:srgbClr val="656D76"/>
-                </a:solidFill>
-                <a:latin typeface="Microsoft YaHei"/>
-              </a:defRPr>
-            </a:pPr>
-            <a:r>
-              <a:t>① / 12</a:t>
+              <a:t>https://github.com/mmm1111lhc</a:t>
+            </a:r>
+            <a:br/>
+            <a:r>
+              <a:t>   /keyword-magnifier</a:t>
+            </a:r>
+            <a:br/>
+            <a:br/>
+            <a:r>
+              <a:t>这就是你刚上传的插件项目！</a:t>
+            </a:r>
+            <a:br/>
+            <a:r>
+              <a:t>页面上有文件列表、</a:t>
+            </a:r>
+            <a:br/>
+            <a:r>
+              <a:t>README 说明、Star/Fork</a:t>
             </a:r>
           </a:p>
         </p:txBody>
@@ -6462,14 +5595,6 @@
 <file path=ppt/slides/slide3.xml><?xml version="1.0" encoding="utf-8"?>
 <p:sld xmlns:a="http://schemas.openxmlformats.org/drawingml/2006/main" xmlns:p="http://schemas.openxmlformats.org/presentationml/2006/main" xmlns:r="http://schemas.openxmlformats.org/officeDocument/2006/relationships">
   <p:cSld>
-    <p:bg>
-      <p:bgPr>
-        <a:solidFill>
-          <a:srgbClr val="F6F8FA"/>
-        </a:solidFill>
-        <a:effectLst/>
-      </p:bgPr>
-    </p:bg>
     <p:spTree>
       <p:nvGrpSpPr>
         <p:cNvPr id="1" name=""/>
@@ -6528,7 +5653,7 @@
         </p:nvSpPr>
         <p:spPr>
           <a:xfrm>
-            <a:off x="457200" y="73152"/>
+            <a:off x="365760" y="73152"/>
             <a:ext cx="10972800" cy="365760"/>
           </a:xfrm>
           <a:prstGeom prst="rect">
@@ -6551,14 +5676,14 @@
               </a:defRPr>
             </a:pPr>
             <a:r>
-              <a:t>步骤 ②：登录你的账号</a:t>
+              <a:t>步骤 ②：认识项目页面</a:t>
             </a:r>
           </a:p>
         </p:txBody>
       </p:sp>
       <p:pic>
         <p:nvPicPr>
-          <p:cNvPr id="4" name="Picture 3" descr="02_github_login.png"/>
+          <p:cNvPr id="4" name="Picture 3" descr="09_repo_clean.png"/>
           <p:cNvPicPr>
             <a:picLocks noChangeAspect="1"/>
           </p:cNvPicPr>
@@ -6572,8 +5697,8 @@
         </p:blipFill>
         <p:spPr>
           <a:xfrm>
-            <a:off x="365760" y="594360"/>
-            <a:ext cx="8046720" cy="5669280"/>
+            <a:off x="274320" y="594360"/>
+            <a:ext cx="8046720" cy="5486400"/>
           </a:xfrm>
           <a:prstGeom prst="rect">
             <a:avLst/>
@@ -6588,8 +5713,8 @@
         </p:nvSpPr>
         <p:spPr>
           <a:xfrm>
-            <a:off x="8595360" y="594360"/>
-            <a:ext cx="3291840" cy="5669280"/>
+            <a:off x="8503920" y="594360"/>
+            <a:ext cx="3383280" cy="5852160"/>
           </a:xfrm>
           <a:prstGeom prst="roundRect">
             <a:avLst/>
@@ -6633,8 +5758,8 @@
         </p:nvSpPr>
         <p:spPr>
           <a:xfrm>
-            <a:off x="8778240" y="731520"/>
-            <a:ext cx="1828800" cy="320040"/>
+            <a:off x="8686800" y="731520"/>
+            <a:ext cx="1645920" cy="320040"/>
           </a:xfrm>
           <a:prstGeom prst="roundRect">
             <a:avLst/>
@@ -6686,8 +5811,8 @@
         </p:nvSpPr>
         <p:spPr>
           <a:xfrm>
-            <a:off x="8778240" y="1280160"/>
-            <a:ext cx="2926080" cy="320040"/>
+            <a:off x="8686800" y="1188720"/>
+            <a:ext cx="3017520" cy="4114800"/>
           </a:xfrm>
           <a:prstGeom prst="rect">
             <a:avLst/>
@@ -6701,7 +5826,7 @@
           <a:lstStyle/>
           <a:p>
             <a:pPr algn="l">
-              <a:defRPr sz="1400" b="1">
+              <a:defRPr sz="1400" b="0">
                 <a:solidFill>
                   <a:srgbClr val="1F2328"/>
                 </a:solidFill>
@@ -6709,358 +5834,36 @@
               </a:defRPr>
             </a:pPr>
             <a:r>
-              <a:t>输入你的信息：</a:t>
-            </a:r>
-          </a:p>
-        </p:txBody>
-      </p:sp>
-      <p:sp>
-        <p:nvSpPr>
-          <p:cNvPr id="8" name="TextBox 7"/>
-          <p:cNvSpPr txBox="1"/>
-          <p:nvPr/>
-        </p:nvSpPr>
-        <p:spPr>
-          <a:xfrm>
-            <a:off x="8778240" y="1600200"/>
-            <a:ext cx="2926080" cy="320040"/>
-          </a:xfrm>
-          <a:prstGeom prst="rect">
-            <a:avLst/>
-          </a:prstGeom>
-          <a:noFill/>
-        </p:spPr>
-        <p:txBody>
-          <a:bodyPr wrap="square">
-            <a:spAutoFit/>
-          </a:bodyPr>
-          <a:lstStyle/>
-          <a:p>
-            <a:pPr algn="l">
-              <a:defRPr sz="1400" b="0">
-                <a:solidFill>
-                  <a:srgbClr val="1F2328"/>
-                </a:solidFill>
-                <a:latin typeface="Microsoft YaHei"/>
-              </a:defRPr>
-            </a:pPr>
-          </a:p>
-        </p:txBody>
-      </p:sp>
-      <p:sp>
-        <p:nvSpPr>
-          <p:cNvPr id="9" name="TextBox 8"/>
-          <p:cNvSpPr txBox="1"/>
-          <p:nvPr/>
-        </p:nvSpPr>
-        <p:spPr>
-          <a:xfrm>
-            <a:off x="8778240" y="1920240"/>
-            <a:ext cx="2926080" cy="320040"/>
-          </a:xfrm>
-          <a:prstGeom prst="rect">
-            <a:avLst/>
-          </a:prstGeom>
-          <a:noFill/>
-        </p:spPr>
-        <p:txBody>
-          <a:bodyPr wrap="square">
-            <a:spAutoFit/>
-          </a:bodyPr>
-          <a:lstStyle/>
-          <a:p>
-            <a:pPr algn="l">
-              <a:defRPr sz="1400" b="0">
-                <a:solidFill>
-                  <a:srgbClr val="1F2328"/>
-                </a:solidFill>
-                <a:latin typeface="Microsoft YaHei"/>
-              </a:defRPr>
-            </a:pPr>
-            <a:r>
-              <a:t>• Username / Email</a:t>
-            </a:r>
-          </a:p>
-        </p:txBody>
-      </p:sp>
-      <p:sp>
-        <p:nvSpPr>
-          <p:cNvPr id="10" name="TextBox 9"/>
-          <p:cNvSpPr txBox="1"/>
-          <p:nvPr/>
-        </p:nvSpPr>
-        <p:spPr>
-          <a:xfrm>
-            <a:off x="8778240" y="2240280"/>
-            <a:ext cx="2926080" cy="320040"/>
-          </a:xfrm>
-          <a:prstGeom prst="rect">
-            <a:avLst/>
-          </a:prstGeom>
-          <a:noFill/>
-        </p:spPr>
-        <p:txBody>
-          <a:bodyPr wrap="square">
-            <a:spAutoFit/>
-          </a:bodyPr>
-          <a:lstStyle/>
-          <a:p>
-            <a:pPr algn="l">
-              <a:defRPr sz="1400" b="0">
-                <a:solidFill>
-                  <a:srgbClr val="1F2328"/>
-                </a:solidFill>
-                <a:latin typeface="Microsoft YaHei"/>
-              </a:defRPr>
-            </a:pPr>
-            <a:r>
-              <a:t>• Password</a:t>
-            </a:r>
-          </a:p>
-        </p:txBody>
-      </p:sp>
-      <p:sp>
-        <p:nvSpPr>
-          <p:cNvPr id="11" name="TextBox 10"/>
-          <p:cNvSpPr txBox="1"/>
-          <p:nvPr/>
-        </p:nvSpPr>
-        <p:spPr>
-          <a:xfrm>
-            <a:off x="8778240" y="2560320"/>
-            <a:ext cx="2926080" cy="320040"/>
-          </a:xfrm>
-          <a:prstGeom prst="rect">
-            <a:avLst/>
-          </a:prstGeom>
-          <a:noFill/>
-        </p:spPr>
-        <p:txBody>
-          <a:bodyPr wrap="square">
-            <a:spAutoFit/>
-          </a:bodyPr>
-          <a:lstStyle/>
-          <a:p>
-            <a:pPr algn="l">
-              <a:defRPr sz="1400" b="0">
-                <a:solidFill>
-                  <a:srgbClr val="1F2328"/>
-                </a:solidFill>
-                <a:latin typeface="Microsoft YaHei"/>
-              </a:defRPr>
-            </a:pPr>
-          </a:p>
-        </p:txBody>
-      </p:sp>
-      <p:sp>
-        <p:nvSpPr>
-          <p:cNvPr id="12" name="TextBox 11"/>
-          <p:cNvSpPr txBox="1"/>
-          <p:nvPr/>
-        </p:nvSpPr>
-        <p:spPr>
-          <a:xfrm>
-            <a:off x="8778240" y="2880360"/>
-            <a:ext cx="2926080" cy="320040"/>
-          </a:xfrm>
-          <a:prstGeom prst="rect">
-            <a:avLst/>
-          </a:prstGeom>
-          <a:noFill/>
-        </p:spPr>
-        <p:txBody>
-          <a:bodyPr wrap="square">
-            <a:spAutoFit/>
-          </a:bodyPr>
-          <a:lstStyle/>
-          <a:p>
-            <a:pPr algn="l">
-              <a:defRPr sz="1400" b="0">
-                <a:solidFill>
-                  <a:srgbClr val="1F2328"/>
-                </a:solidFill>
-                <a:latin typeface="Microsoft YaHei"/>
-              </a:defRPr>
-            </a:pPr>
-            <a:r>
-              <a:t>→ 点击 Sign in 登录</a:t>
-            </a:r>
-          </a:p>
-        </p:txBody>
-      </p:sp>
-      <p:sp>
-        <p:nvSpPr>
-          <p:cNvPr id="13" name="TextBox 12"/>
-          <p:cNvSpPr txBox="1"/>
-          <p:nvPr/>
-        </p:nvSpPr>
-        <p:spPr>
-          <a:xfrm>
-            <a:off x="8778240" y="3200400"/>
-            <a:ext cx="2926080" cy="320040"/>
-          </a:xfrm>
-          <a:prstGeom prst="rect">
-            <a:avLst/>
-          </a:prstGeom>
-          <a:noFill/>
-        </p:spPr>
-        <p:txBody>
-          <a:bodyPr wrap="square">
-            <a:spAutoFit/>
-          </a:bodyPr>
-          <a:lstStyle/>
-          <a:p>
-            <a:pPr algn="l">
-              <a:defRPr sz="1400" b="0">
-                <a:solidFill>
-                  <a:srgbClr val="1F2328"/>
-                </a:solidFill>
-                <a:latin typeface="Microsoft YaHei"/>
-              </a:defRPr>
-            </a:pPr>
-          </a:p>
-        </p:txBody>
-      </p:sp>
-      <p:sp>
-        <p:nvSpPr>
-          <p:cNvPr id="14" name="TextBox 13"/>
-          <p:cNvSpPr txBox="1"/>
-          <p:nvPr/>
-        </p:nvSpPr>
-        <p:spPr>
-          <a:xfrm>
-            <a:off x="8778240" y="3520440"/>
-            <a:ext cx="2926080" cy="320040"/>
-          </a:xfrm>
-          <a:prstGeom prst="rect">
-            <a:avLst/>
-          </a:prstGeom>
-          <a:noFill/>
-        </p:spPr>
-        <p:txBody>
-          <a:bodyPr wrap="square">
-            <a:spAutoFit/>
-          </a:bodyPr>
-          <a:lstStyle/>
-          <a:p>
-            <a:pPr algn="l">
-              <a:defRPr sz="1400" b="0">
-                <a:solidFill>
-                  <a:srgbClr val="1F2328"/>
-                </a:solidFill>
-                <a:latin typeface="Microsoft YaHei"/>
-              </a:defRPr>
-            </a:pPr>
-            <a:r>
-              <a:t>💡 新用户先注册：</a:t>
-            </a:r>
-          </a:p>
-        </p:txBody>
-      </p:sp>
-      <p:sp>
-        <p:nvSpPr>
-          <p:cNvPr id="15" name="TextBox 14"/>
-          <p:cNvSpPr txBox="1"/>
-          <p:nvPr/>
-        </p:nvSpPr>
-        <p:spPr>
-          <a:xfrm>
-            <a:off x="8778240" y="3840480"/>
-            <a:ext cx="2926080" cy="320040"/>
-          </a:xfrm>
-          <a:prstGeom prst="rect">
-            <a:avLst/>
-          </a:prstGeom>
-          <a:noFill/>
-        </p:spPr>
-        <p:txBody>
-          <a:bodyPr wrap="square">
-            <a:spAutoFit/>
-          </a:bodyPr>
-          <a:lstStyle/>
-          <a:p>
-            <a:pPr algn="l">
-              <a:defRPr sz="1400" b="0">
-                <a:solidFill>
-                  <a:srgbClr val="1F2328"/>
-                </a:solidFill>
-                <a:latin typeface="Microsoft YaHei"/>
-              </a:defRPr>
-            </a:pPr>
-            <a:r>
-              <a:t>填邮箱 → 设密码 →</a:t>
-            </a:r>
-          </a:p>
-        </p:txBody>
-      </p:sp>
-      <p:sp>
-        <p:nvSpPr>
-          <p:cNvPr id="16" name="TextBox 15"/>
-          <p:cNvSpPr txBox="1"/>
-          <p:nvPr/>
-        </p:nvSpPr>
-        <p:spPr>
-          <a:xfrm>
-            <a:off x="8778240" y="4160520"/>
-            <a:ext cx="2926080" cy="320040"/>
-          </a:xfrm>
-          <a:prstGeom prst="rect">
-            <a:avLst/>
-          </a:prstGeom>
-          <a:noFill/>
-        </p:spPr>
-        <p:txBody>
-          <a:bodyPr wrap="square">
-            <a:spAutoFit/>
-          </a:bodyPr>
-          <a:lstStyle/>
-          <a:p>
-            <a:pPr algn="l">
-              <a:defRPr sz="1400" b="0">
-                <a:solidFill>
-                  <a:srgbClr val="1F2328"/>
-                </a:solidFill>
-                <a:latin typeface="Microsoft YaHei"/>
-              </a:defRPr>
-            </a:pPr>
-            <a:r>
-              <a:t>验证邮箱 → 选 Free</a:t>
-            </a:r>
-          </a:p>
-        </p:txBody>
-      </p:sp>
-      <p:sp>
-        <p:nvSpPr>
-          <p:cNvPr id="17" name="TextBox 16"/>
-          <p:cNvSpPr txBox="1"/>
-          <p:nvPr/>
-        </p:nvSpPr>
-        <p:spPr>
-          <a:xfrm>
-            <a:off x="5029200" y="6309360"/>
-            <a:ext cx="1828800" cy="274320"/>
-          </a:xfrm>
-          <a:prstGeom prst="rect">
-            <a:avLst/>
-          </a:prstGeom>
-          <a:noFill/>
-        </p:spPr>
-        <p:txBody>
-          <a:bodyPr wrap="square">
-            <a:spAutoFit/>
-          </a:bodyPr>
-          <a:lstStyle/>
-          <a:p>
-            <a:pPr algn="ctr">
-              <a:defRPr sz="1000" b="0">
-                <a:solidFill>
-                  <a:srgbClr val="656D76"/>
-                </a:solidFill>
-                <a:latin typeface="Microsoft YaHei"/>
-              </a:defRPr>
-            </a:pPr>
-            <a:r>
-              <a:t>② / 12</a:t>
+              <a:t>顶部导航栏：</a:t>
+            </a:r>
+            <a:br/>
+            <a:r>
+              <a:t>• Code — 代码文件</a:t>
+            </a:r>
+            <a:br/>
+            <a:r>
+              <a:t>• Issues — 问题反馈</a:t>
+            </a:r>
+            <a:br/>
+            <a:r>
+              <a:t>• Pull Requests — 合并</a:t>
+            </a:r>
+            <a:br/>
+            <a:r>
+              <a:t>• Actions — 自动构建</a:t>
+            </a:r>
+            <a:br/>
+            <a:r>
+              <a:t>• Projects — 项目管理</a:t>
+            </a:r>
+            <a:br/>
+            <a:r>
+              <a:t>• Settings — 设置</a:t>
+            </a:r>
+            <a:br/>
+            <a:br/>
+            <a:r>
+              <a:t>右侧：About 信息</a:t>
             </a:r>
           </a:p>
         </p:txBody>
@@ -7076,14 +5879,6 @@
 <file path=ppt/slides/slide4.xml><?xml version="1.0" encoding="utf-8"?>
 <p:sld xmlns:a="http://schemas.openxmlformats.org/drawingml/2006/main" xmlns:p="http://schemas.openxmlformats.org/presentationml/2006/main" xmlns:r="http://schemas.openxmlformats.org/officeDocument/2006/relationships">
   <p:cSld>
-    <p:bg>
-      <p:bgPr>
-        <a:solidFill>
-          <a:srgbClr val="F6F8FA"/>
-        </a:solidFill>
-        <a:effectLst/>
-      </p:bgPr>
-    </p:bg>
     <p:spTree>
       <p:nvGrpSpPr>
         <p:cNvPr id="1" name=""/>
@@ -7142,7 +5937,7 @@
         </p:nvSpPr>
         <p:spPr>
           <a:xfrm>
-            <a:off x="457200" y="73152"/>
+            <a:off x="365760" y="73152"/>
             <a:ext cx="10972800" cy="365760"/>
           </a:xfrm>
           <a:prstGeom prst="rect">
@@ -7165,14 +5960,14 @@
               </a:defRPr>
             </a:pPr>
             <a:r>
-              <a:t>步骤 ③：创建新仓库</a:t>
+              <a:t>步骤 ③：复制仓库地址（分享给同学）</a:t>
             </a:r>
           </a:p>
         </p:txBody>
       </p:sp>
       <p:pic>
         <p:nvPicPr>
-          <p:cNvPr id="4" name="Picture 3" descr="02_github_login.png"/>
+          <p:cNvPr id="4" name="Picture 3" descr="05_code_dropdown.png"/>
           <p:cNvPicPr>
             <a:picLocks noChangeAspect="1"/>
           </p:cNvPicPr>
@@ -7186,8 +5981,8 @@
         </p:blipFill>
         <p:spPr>
           <a:xfrm>
-            <a:off x="365760" y="594360"/>
-            <a:ext cx="8046720" cy="5669280"/>
+            <a:off x="274320" y="594360"/>
+            <a:ext cx="8046720" cy="5486400"/>
           </a:xfrm>
           <a:prstGeom prst="rect">
             <a:avLst/>
@@ -7202,8 +5997,8 @@
         </p:nvSpPr>
         <p:spPr>
           <a:xfrm>
-            <a:off x="8595360" y="594360"/>
-            <a:ext cx="3291840" cy="5669280"/>
+            <a:off x="8503920" y="594360"/>
+            <a:ext cx="3383280" cy="5852160"/>
           </a:xfrm>
           <a:prstGeom prst="roundRect">
             <a:avLst/>
@@ -7247,8 +6042,8 @@
         </p:nvSpPr>
         <p:spPr>
           <a:xfrm>
-            <a:off x="8778240" y="731520"/>
-            <a:ext cx="1828800" cy="320040"/>
+            <a:off x="8686800" y="731520"/>
+            <a:ext cx="1645920" cy="320040"/>
           </a:xfrm>
           <a:prstGeom prst="roundRect">
             <a:avLst/>
@@ -7300,8 +6095,8 @@
         </p:nvSpPr>
         <p:spPr>
           <a:xfrm>
-            <a:off x="8778240" y="1280160"/>
-            <a:ext cx="2926080" cy="320040"/>
+            <a:off x="8686800" y="1188720"/>
+            <a:ext cx="3017520" cy="4114800"/>
           </a:xfrm>
           <a:prstGeom prst="rect">
             <a:avLst/>
@@ -7315,7 +6110,7 @@
           <a:lstStyle/>
           <a:p>
             <a:pPr algn="l">
-              <a:defRPr sz="1400" b="1">
+              <a:defRPr sz="1400" b="0">
                 <a:solidFill>
                   <a:srgbClr val="1F2328"/>
                 </a:solidFill>
@@ -7323,358 +6118,34 @@
               </a:defRPr>
             </a:pPr>
             <a:r>
-              <a:t>找到新建按钮：</a:t>
-            </a:r>
-          </a:p>
-        </p:txBody>
-      </p:sp>
-      <p:sp>
-        <p:nvSpPr>
-          <p:cNvPr id="8" name="TextBox 7"/>
-          <p:cNvSpPr txBox="1"/>
-          <p:nvPr/>
-        </p:nvSpPr>
-        <p:spPr>
-          <a:xfrm>
-            <a:off x="8778240" y="1600200"/>
-            <a:ext cx="2926080" cy="320040"/>
-          </a:xfrm>
-          <a:prstGeom prst="rect">
-            <a:avLst/>
-          </a:prstGeom>
-          <a:noFill/>
-        </p:spPr>
-        <p:txBody>
-          <a:bodyPr wrap="square">
-            <a:spAutoFit/>
-          </a:bodyPr>
-          <a:lstStyle/>
-          <a:p>
-            <a:pPr algn="l">
-              <a:defRPr sz="1400" b="0">
-                <a:solidFill>
-                  <a:srgbClr val="1F2328"/>
-                </a:solidFill>
-                <a:latin typeface="Microsoft YaHei"/>
-              </a:defRPr>
-            </a:pPr>
-          </a:p>
-        </p:txBody>
-      </p:sp>
-      <p:sp>
-        <p:nvSpPr>
-          <p:cNvPr id="9" name="TextBox 8"/>
-          <p:cNvSpPr txBox="1"/>
-          <p:nvPr/>
-        </p:nvSpPr>
-        <p:spPr>
-          <a:xfrm>
-            <a:off x="8778240" y="1920240"/>
-            <a:ext cx="2926080" cy="320040"/>
-          </a:xfrm>
-          <a:prstGeom prst="rect">
-            <a:avLst/>
-          </a:prstGeom>
-          <a:noFill/>
-        </p:spPr>
-        <p:txBody>
-          <a:bodyPr wrap="square">
-            <a:spAutoFit/>
-          </a:bodyPr>
-          <a:lstStyle/>
-          <a:p>
-            <a:pPr algn="l">
-              <a:defRPr sz="1400" b="0">
-                <a:solidFill>
-                  <a:srgbClr val="1F2328"/>
-                </a:solidFill>
-                <a:latin typeface="Microsoft YaHei"/>
-              </a:defRPr>
-            </a:pPr>
-            <a:r>
-              <a:t>方法 1：点右上角 ➕</a:t>
-            </a:r>
-          </a:p>
-        </p:txBody>
-      </p:sp>
-      <p:sp>
-        <p:nvSpPr>
-          <p:cNvPr id="10" name="TextBox 9"/>
-          <p:cNvSpPr txBox="1"/>
-          <p:nvPr/>
-        </p:nvSpPr>
-        <p:spPr>
-          <a:xfrm>
-            <a:off x="8778240" y="2240280"/>
-            <a:ext cx="2926080" cy="320040"/>
-          </a:xfrm>
-          <a:prstGeom prst="rect">
-            <a:avLst/>
-          </a:prstGeom>
-          <a:noFill/>
-        </p:spPr>
-        <p:txBody>
-          <a:bodyPr wrap="square">
-            <a:spAutoFit/>
-          </a:bodyPr>
-          <a:lstStyle/>
-          <a:p>
-            <a:pPr algn="l">
-              <a:defRPr sz="1400" b="0">
-                <a:solidFill>
-                  <a:srgbClr val="1F2328"/>
-                </a:solidFill>
-                <a:latin typeface="Microsoft YaHei"/>
-              </a:defRPr>
-            </a:pPr>
-            <a:r>
-              <a:t>  → New repository</a:t>
-            </a:r>
-          </a:p>
-        </p:txBody>
-      </p:sp>
-      <p:sp>
-        <p:nvSpPr>
-          <p:cNvPr id="11" name="TextBox 10"/>
-          <p:cNvSpPr txBox="1"/>
-          <p:nvPr/>
-        </p:nvSpPr>
-        <p:spPr>
-          <a:xfrm>
-            <a:off x="8778240" y="2560320"/>
-            <a:ext cx="2926080" cy="320040"/>
-          </a:xfrm>
-          <a:prstGeom prst="rect">
-            <a:avLst/>
-          </a:prstGeom>
-          <a:noFill/>
-        </p:spPr>
-        <p:txBody>
-          <a:bodyPr wrap="square">
-            <a:spAutoFit/>
-          </a:bodyPr>
-          <a:lstStyle/>
-          <a:p>
-            <a:pPr algn="l">
-              <a:defRPr sz="1400" b="0">
-                <a:solidFill>
-                  <a:srgbClr val="1F2328"/>
-                </a:solidFill>
-                <a:latin typeface="Microsoft YaHei"/>
-              </a:defRPr>
-            </a:pPr>
-          </a:p>
-        </p:txBody>
-      </p:sp>
-      <p:sp>
-        <p:nvSpPr>
-          <p:cNvPr id="12" name="TextBox 11"/>
-          <p:cNvSpPr txBox="1"/>
-          <p:nvPr/>
-        </p:nvSpPr>
-        <p:spPr>
-          <a:xfrm>
-            <a:off x="8778240" y="2880360"/>
-            <a:ext cx="2926080" cy="320040"/>
-          </a:xfrm>
-          <a:prstGeom prst="rect">
-            <a:avLst/>
-          </a:prstGeom>
-          <a:noFill/>
-        </p:spPr>
-        <p:txBody>
-          <a:bodyPr wrap="square">
-            <a:spAutoFit/>
-          </a:bodyPr>
-          <a:lstStyle/>
-          <a:p>
-            <a:pPr algn="l">
-              <a:defRPr sz="1400" b="0">
-                <a:solidFill>
-                  <a:srgbClr val="1F2328"/>
-                </a:solidFill>
-                <a:latin typeface="Microsoft YaHei"/>
-              </a:defRPr>
-            </a:pPr>
-            <a:r>
-              <a:t>方法 2：首页左侧</a:t>
-            </a:r>
-          </a:p>
-        </p:txBody>
-      </p:sp>
-      <p:sp>
-        <p:nvSpPr>
-          <p:cNvPr id="13" name="TextBox 12"/>
-          <p:cNvSpPr txBox="1"/>
-          <p:nvPr/>
-        </p:nvSpPr>
-        <p:spPr>
-          <a:xfrm>
-            <a:off x="8778240" y="3200400"/>
-            <a:ext cx="2926080" cy="320040"/>
-          </a:xfrm>
-          <a:prstGeom prst="rect">
-            <a:avLst/>
-          </a:prstGeom>
-          <a:noFill/>
-        </p:spPr>
-        <p:txBody>
-          <a:bodyPr wrap="square">
-            <a:spAutoFit/>
-          </a:bodyPr>
-          <a:lstStyle/>
-          <a:p>
-            <a:pPr algn="l">
-              <a:defRPr sz="1400" b="0">
-                <a:solidFill>
-                  <a:srgbClr val="1F2328"/>
-                </a:solidFill>
-                <a:latin typeface="Microsoft YaHei"/>
-              </a:defRPr>
-            </a:pPr>
-            <a:r>
-              <a:t>  → Repositories</a:t>
-            </a:r>
-          </a:p>
-        </p:txBody>
-      </p:sp>
-      <p:sp>
-        <p:nvSpPr>
-          <p:cNvPr id="14" name="TextBox 13"/>
-          <p:cNvSpPr txBox="1"/>
-          <p:nvPr/>
-        </p:nvSpPr>
-        <p:spPr>
-          <a:xfrm>
-            <a:off x="8778240" y="3520440"/>
-            <a:ext cx="2926080" cy="320040"/>
-          </a:xfrm>
-          <a:prstGeom prst="rect">
-            <a:avLst/>
-          </a:prstGeom>
-          <a:noFill/>
-        </p:spPr>
-        <p:txBody>
-          <a:bodyPr wrap="square">
-            <a:spAutoFit/>
-          </a:bodyPr>
-          <a:lstStyle/>
-          <a:p>
-            <a:pPr algn="l">
-              <a:defRPr sz="1400" b="0">
-                <a:solidFill>
-                  <a:srgbClr val="1F2328"/>
-                </a:solidFill>
-                <a:latin typeface="Microsoft YaHei"/>
-              </a:defRPr>
-            </a:pPr>
-            <a:r>
-              <a:t>  → 绿色 New 按钮</a:t>
-            </a:r>
-          </a:p>
-        </p:txBody>
-      </p:sp>
-      <p:sp>
-        <p:nvSpPr>
-          <p:cNvPr id="15" name="TextBox 14"/>
-          <p:cNvSpPr txBox="1"/>
-          <p:nvPr/>
-        </p:nvSpPr>
-        <p:spPr>
-          <a:xfrm>
-            <a:off x="8778240" y="3840480"/>
-            <a:ext cx="2926080" cy="320040"/>
-          </a:xfrm>
-          <a:prstGeom prst="rect">
-            <a:avLst/>
-          </a:prstGeom>
-          <a:noFill/>
-        </p:spPr>
-        <p:txBody>
-          <a:bodyPr wrap="square">
-            <a:spAutoFit/>
-          </a:bodyPr>
-          <a:lstStyle/>
-          <a:p>
-            <a:pPr algn="l">
-              <a:defRPr sz="1400" b="0">
-                <a:solidFill>
-                  <a:srgbClr val="1F2328"/>
-                </a:solidFill>
-                <a:latin typeface="Microsoft YaHei"/>
-              </a:defRPr>
-            </a:pPr>
-          </a:p>
-        </p:txBody>
-      </p:sp>
-      <p:sp>
-        <p:nvSpPr>
-          <p:cNvPr id="16" name="TextBox 15"/>
-          <p:cNvSpPr txBox="1"/>
-          <p:nvPr/>
-        </p:nvSpPr>
-        <p:spPr>
-          <a:xfrm>
-            <a:off x="8778240" y="4160520"/>
-            <a:ext cx="2926080" cy="320040"/>
-          </a:xfrm>
-          <a:prstGeom prst="rect">
-            <a:avLst/>
-          </a:prstGeom>
-          <a:noFill/>
-        </p:spPr>
-        <p:txBody>
-          <a:bodyPr wrap="square">
-            <a:spAutoFit/>
-          </a:bodyPr>
-          <a:lstStyle/>
-          <a:p>
-            <a:pPr algn="l">
-              <a:defRPr sz="1400" b="0">
-                <a:solidFill>
-                  <a:srgbClr val="1F2328"/>
-                </a:solidFill>
-                <a:latin typeface="Microsoft YaHei"/>
-              </a:defRPr>
-            </a:pPr>
-            <a:r>
-              <a:t>📌 一个仓库 = 一个项目</a:t>
-            </a:r>
-          </a:p>
-        </p:txBody>
-      </p:sp>
-      <p:sp>
-        <p:nvSpPr>
-          <p:cNvPr id="17" name="TextBox 16"/>
-          <p:cNvSpPr txBox="1"/>
-          <p:nvPr/>
-        </p:nvSpPr>
-        <p:spPr>
-          <a:xfrm>
-            <a:off x="5029200" y="6309360"/>
-            <a:ext cx="1828800" cy="274320"/>
-          </a:xfrm>
-          <a:prstGeom prst="rect">
-            <a:avLst/>
-          </a:prstGeom>
-          <a:noFill/>
-        </p:spPr>
-        <p:txBody>
-          <a:bodyPr wrap="square">
-            <a:spAutoFit/>
-          </a:bodyPr>
-          <a:lstStyle/>
-          <a:p>
-            <a:pPr algn="ctr">
-              <a:defRPr sz="1000" b="0">
-                <a:solidFill>
-                  <a:srgbClr val="656D76"/>
-                </a:solidFill>
-                <a:latin typeface="Microsoft YaHei"/>
-              </a:defRPr>
-            </a:pPr>
-            <a:r>
-              <a:t>③ / 12</a:t>
+              <a:t>点绿色 Code 按钮：</a:t>
+            </a:r>
+            <a:br/>
+            <a:br/>
+            <a:r>
+              <a:t>📍 仓库 URL 在最上面</a:t>
+            </a:r>
+            <a:br/>
+            <a:r>
+              <a:t>📋 点复制按钮</a:t>
+            </a:r>
+            <a:br/>
+            <a:br/>
+            <a:r>
+              <a:t>⇩ Download ZIP</a:t>
+            </a:r>
+            <a:br/>
+            <a:r>
+              <a:t>下载整个项目</a:t>
+            </a:r>
+            <a:br/>
+            <a:br/>
+            <a:r>
+              <a:t>💡 把这个链接发给别人</a:t>
+            </a:r>
+            <a:br/>
+            <a:r>
+              <a:t>他们就能下载你的插件</a:t>
             </a:r>
           </a:p>
         </p:txBody>
@@ -7690,14 +6161,6 @@
 <file path=ppt/slides/slide5.xml><?xml version="1.0" encoding="utf-8"?>
 <p:sld xmlns:a="http://schemas.openxmlformats.org/drawingml/2006/main" xmlns:p="http://schemas.openxmlformats.org/presentationml/2006/main" xmlns:r="http://schemas.openxmlformats.org/officeDocument/2006/relationships">
   <p:cSld>
-    <p:bg>
-      <p:bgPr>
-        <a:solidFill>
-          <a:srgbClr val="F6F8FA"/>
-        </a:solidFill>
-        <a:effectLst/>
-      </p:bgPr>
-    </p:bg>
     <p:spTree>
       <p:nvGrpSpPr>
         <p:cNvPr id="1" name=""/>
@@ -7756,7 +6219,7 @@
         </p:nvSpPr>
         <p:spPr>
           <a:xfrm>
-            <a:off x="457200" y="73152"/>
+            <a:off x="365760" y="73152"/>
             <a:ext cx="10972800" cy="365760"/>
           </a:xfrm>
           <a:prstGeom prst="rect">
@@ -7779,14 +6242,14 @@
               </a:defRPr>
             </a:pPr>
             <a:r>
-              <a:t>步骤 ④：项目页面长这样</a:t>
+              <a:t>步骤 ④：浏览插件代码 content.js</a:t>
             </a:r>
           </a:p>
         </p:txBody>
       </p:sp>
       <p:pic>
         <p:nvPicPr>
-          <p:cNvPr id="4" name="Picture 3" descr="04_github_project.png"/>
+          <p:cNvPr id="4" name="Picture 3" descr="03_code.png"/>
           <p:cNvPicPr>
             <a:picLocks noChangeAspect="1"/>
           </p:cNvPicPr>
@@ -7800,8 +6263,8 @@
         </p:blipFill>
         <p:spPr>
           <a:xfrm>
-            <a:off x="365760" y="594360"/>
-            <a:ext cx="8046720" cy="5669280"/>
+            <a:off x="274320" y="594360"/>
+            <a:ext cx="8046720" cy="5486400"/>
           </a:xfrm>
           <a:prstGeom prst="rect">
             <a:avLst/>
@@ -7816,8 +6279,8 @@
         </p:nvSpPr>
         <p:spPr>
           <a:xfrm>
-            <a:off x="8595360" y="594360"/>
-            <a:ext cx="3291840" cy="5669280"/>
+            <a:off x="8503920" y="594360"/>
+            <a:ext cx="3383280" cy="5852160"/>
           </a:xfrm>
           <a:prstGeom prst="roundRect">
             <a:avLst/>
@@ -7861,8 +6324,8 @@
         </p:nvSpPr>
         <p:spPr>
           <a:xfrm>
-            <a:off x="8778240" y="731520"/>
-            <a:ext cx="1828800" cy="320040"/>
+            <a:off x="8686800" y="731520"/>
+            <a:ext cx="1645920" cy="320040"/>
           </a:xfrm>
           <a:prstGeom prst="roundRect">
             <a:avLst/>
@@ -7914,8 +6377,8 @@
         </p:nvSpPr>
         <p:spPr>
           <a:xfrm>
-            <a:off x="8778240" y="1280160"/>
-            <a:ext cx="2926080" cy="320040"/>
+            <a:off x="8686800" y="1188720"/>
+            <a:ext cx="3017520" cy="4114800"/>
           </a:xfrm>
           <a:prstGeom prst="rect">
             <a:avLst/>
@@ -7929,7 +6392,7 @@
           <a:lstStyle/>
           <a:p>
             <a:pPr algn="l">
-              <a:defRPr sz="1400" b="1">
+              <a:defRPr sz="1400" b="0">
                 <a:solidFill>
                   <a:srgbClr val="1F2328"/>
                 </a:solidFill>
@@ -7937,434 +6400,37 @@
               </a:defRPr>
             </a:pPr>
             <a:r>
-              <a:t>仓库创建成功后：</a:t>
-            </a:r>
-          </a:p>
-        </p:txBody>
-      </p:sp>
-      <p:sp>
-        <p:nvSpPr>
-          <p:cNvPr id="8" name="TextBox 7"/>
-          <p:cNvSpPr txBox="1"/>
-          <p:nvPr/>
-        </p:nvSpPr>
-        <p:spPr>
-          <a:xfrm>
-            <a:off x="8778240" y="1600200"/>
-            <a:ext cx="2926080" cy="320040"/>
-          </a:xfrm>
-          <a:prstGeom prst="rect">
-            <a:avLst/>
-          </a:prstGeom>
-          <a:noFill/>
-        </p:spPr>
-        <p:txBody>
-          <a:bodyPr wrap="square">
-            <a:spAutoFit/>
-          </a:bodyPr>
-          <a:lstStyle/>
-          <a:p>
-            <a:pPr algn="l">
-              <a:defRPr sz="1400" b="0">
-                <a:solidFill>
-                  <a:srgbClr val="1F2328"/>
-                </a:solidFill>
-                <a:latin typeface="Microsoft YaHei"/>
-              </a:defRPr>
-            </a:pPr>
-          </a:p>
-        </p:txBody>
-      </p:sp>
-      <p:sp>
-        <p:nvSpPr>
-          <p:cNvPr id="9" name="TextBox 8"/>
-          <p:cNvSpPr txBox="1"/>
-          <p:nvPr/>
-        </p:nvSpPr>
-        <p:spPr>
-          <a:xfrm>
-            <a:off x="8778240" y="1920240"/>
-            <a:ext cx="2926080" cy="320040"/>
-          </a:xfrm>
-          <a:prstGeom prst="rect">
-            <a:avLst/>
-          </a:prstGeom>
-          <a:noFill/>
-        </p:spPr>
-        <p:txBody>
-          <a:bodyPr wrap="square">
-            <a:spAutoFit/>
-          </a:bodyPr>
-          <a:lstStyle/>
-          <a:p>
-            <a:pPr algn="l">
-              <a:defRPr sz="1400" b="0">
-                <a:solidFill>
-                  <a:srgbClr val="1F2328"/>
-                </a:solidFill>
-                <a:latin typeface="Microsoft YaHei"/>
-              </a:defRPr>
-            </a:pPr>
-            <a:r>
-              <a:t>你会看到这个页面</a:t>
-            </a:r>
-          </a:p>
-        </p:txBody>
-      </p:sp>
-      <p:sp>
-        <p:nvSpPr>
-          <p:cNvPr id="10" name="TextBox 9"/>
-          <p:cNvSpPr txBox="1"/>
-          <p:nvPr/>
-        </p:nvSpPr>
-        <p:spPr>
-          <a:xfrm>
-            <a:off x="8778240" y="2240280"/>
-            <a:ext cx="2926080" cy="320040"/>
-          </a:xfrm>
-          <a:prstGeom prst="rect">
-            <a:avLst/>
-          </a:prstGeom>
-          <a:noFill/>
-        </p:spPr>
-        <p:txBody>
-          <a:bodyPr wrap="square">
-            <a:spAutoFit/>
-          </a:bodyPr>
-          <a:lstStyle/>
-          <a:p>
-            <a:pPr algn="l">
-              <a:defRPr sz="1400" b="0">
-                <a:solidFill>
-                  <a:srgbClr val="1F2328"/>
-                </a:solidFill>
-                <a:latin typeface="Microsoft YaHei"/>
-              </a:defRPr>
-            </a:pPr>
-            <a:r>
-              <a:t>包含：</a:t>
-            </a:r>
-          </a:p>
-        </p:txBody>
-      </p:sp>
-      <p:sp>
-        <p:nvSpPr>
-          <p:cNvPr id="11" name="TextBox 10"/>
-          <p:cNvSpPr txBox="1"/>
-          <p:nvPr/>
-        </p:nvSpPr>
-        <p:spPr>
-          <a:xfrm>
-            <a:off x="8778240" y="2560320"/>
-            <a:ext cx="2926080" cy="320040"/>
-          </a:xfrm>
-          <a:prstGeom prst="rect">
-            <a:avLst/>
-          </a:prstGeom>
-          <a:noFill/>
-        </p:spPr>
-        <p:txBody>
-          <a:bodyPr wrap="square">
-            <a:spAutoFit/>
-          </a:bodyPr>
-          <a:lstStyle/>
-          <a:p>
-            <a:pPr algn="l">
-              <a:defRPr sz="1400" b="0">
-                <a:solidFill>
-                  <a:srgbClr val="1F2328"/>
-                </a:solidFill>
-                <a:latin typeface="Microsoft YaHei"/>
-              </a:defRPr>
-            </a:pPr>
-          </a:p>
-        </p:txBody>
-      </p:sp>
-      <p:sp>
-        <p:nvSpPr>
-          <p:cNvPr id="12" name="TextBox 11"/>
-          <p:cNvSpPr txBox="1"/>
-          <p:nvPr/>
-        </p:nvSpPr>
-        <p:spPr>
-          <a:xfrm>
-            <a:off x="8778240" y="2880360"/>
-            <a:ext cx="2926080" cy="320040"/>
-          </a:xfrm>
-          <a:prstGeom prst="rect">
-            <a:avLst/>
-          </a:prstGeom>
-          <a:noFill/>
-        </p:spPr>
-        <p:txBody>
-          <a:bodyPr wrap="square">
-            <a:spAutoFit/>
-          </a:bodyPr>
-          <a:lstStyle/>
-          <a:p>
-            <a:pPr algn="l">
-              <a:defRPr sz="1400" b="0">
-                <a:solidFill>
-                  <a:srgbClr val="1F2328"/>
-                </a:solidFill>
-                <a:latin typeface="Microsoft YaHei"/>
-              </a:defRPr>
-            </a:pPr>
-            <a:r>
-              <a:t>• 📁 文件列表</a:t>
-            </a:r>
-          </a:p>
-        </p:txBody>
-      </p:sp>
-      <p:sp>
-        <p:nvSpPr>
-          <p:cNvPr id="13" name="TextBox 12"/>
-          <p:cNvSpPr txBox="1"/>
-          <p:nvPr/>
-        </p:nvSpPr>
-        <p:spPr>
-          <a:xfrm>
-            <a:off x="8778240" y="3200400"/>
-            <a:ext cx="2926080" cy="320040"/>
-          </a:xfrm>
-          <a:prstGeom prst="rect">
-            <a:avLst/>
-          </a:prstGeom>
-          <a:noFill/>
-        </p:spPr>
-        <p:txBody>
-          <a:bodyPr wrap="square">
-            <a:spAutoFit/>
-          </a:bodyPr>
-          <a:lstStyle/>
-          <a:p>
-            <a:pPr algn="l">
-              <a:defRPr sz="1400" b="0">
-                <a:solidFill>
-                  <a:srgbClr val="1F2328"/>
-                </a:solidFill>
-                <a:latin typeface="Microsoft YaHei"/>
-              </a:defRPr>
-            </a:pPr>
-            <a:r>
-              <a:t>• 📄 README 说明</a:t>
-            </a:r>
-          </a:p>
-        </p:txBody>
-      </p:sp>
-      <p:sp>
-        <p:nvSpPr>
-          <p:cNvPr id="14" name="TextBox 13"/>
-          <p:cNvSpPr txBox="1"/>
-          <p:nvPr/>
-        </p:nvSpPr>
-        <p:spPr>
-          <a:xfrm>
-            <a:off x="8778240" y="3520440"/>
-            <a:ext cx="2926080" cy="320040"/>
-          </a:xfrm>
-          <a:prstGeom prst="rect">
-            <a:avLst/>
-          </a:prstGeom>
-          <a:noFill/>
-        </p:spPr>
-        <p:txBody>
-          <a:bodyPr wrap="square">
-            <a:spAutoFit/>
-          </a:bodyPr>
-          <a:lstStyle/>
-          <a:p>
-            <a:pPr algn="l">
-              <a:defRPr sz="1400" b="0">
-                <a:solidFill>
-                  <a:srgbClr val="1F2328"/>
-                </a:solidFill>
-                <a:latin typeface="Microsoft YaHei"/>
-              </a:defRPr>
-            </a:pPr>
-            <a:r>
-              <a:t>• ⭐ Star / 🍴 Fork</a:t>
-            </a:r>
-          </a:p>
-        </p:txBody>
-      </p:sp>
-      <p:sp>
-        <p:nvSpPr>
-          <p:cNvPr id="15" name="TextBox 14"/>
-          <p:cNvSpPr txBox="1"/>
-          <p:nvPr/>
-        </p:nvSpPr>
-        <p:spPr>
-          <a:xfrm>
-            <a:off x="8778240" y="3840480"/>
-            <a:ext cx="2926080" cy="320040"/>
-          </a:xfrm>
-          <a:prstGeom prst="rect">
-            <a:avLst/>
-          </a:prstGeom>
-          <a:noFill/>
-        </p:spPr>
-        <p:txBody>
-          <a:bodyPr wrap="square">
-            <a:spAutoFit/>
-          </a:bodyPr>
-          <a:lstStyle/>
-          <a:p>
-            <a:pPr algn="l">
-              <a:defRPr sz="1400" b="0">
-                <a:solidFill>
-                  <a:srgbClr val="1F2328"/>
-                </a:solidFill>
-                <a:latin typeface="Microsoft YaHei"/>
-              </a:defRPr>
-            </a:pPr>
-            <a:r>
-              <a:t>• 顶部导航标签</a:t>
-            </a:r>
-          </a:p>
-        </p:txBody>
-      </p:sp>
-      <p:sp>
-        <p:nvSpPr>
-          <p:cNvPr id="16" name="TextBox 15"/>
-          <p:cNvSpPr txBox="1"/>
-          <p:nvPr/>
-        </p:nvSpPr>
-        <p:spPr>
-          <a:xfrm>
-            <a:off x="8778240" y="4160520"/>
-            <a:ext cx="2926080" cy="320040"/>
-          </a:xfrm>
-          <a:prstGeom prst="rect">
-            <a:avLst/>
-          </a:prstGeom>
-          <a:noFill/>
-        </p:spPr>
-        <p:txBody>
-          <a:bodyPr wrap="square">
-            <a:spAutoFit/>
-          </a:bodyPr>
-          <a:lstStyle/>
-          <a:p>
-            <a:pPr algn="l">
-              <a:defRPr sz="1400" b="0">
-                <a:solidFill>
-                  <a:srgbClr val="1F2328"/>
-                </a:solidFill>
-                <a:latin typeface="Microsoft YaHei"/>
-              </a:defRPr>
-            </a:pPr>
-          </a:p>
-        </p:txBody>
-      </p:sp>
-      <p:sp>
-        <p:nvSpPr>
-          <p:cNvPr id="17" name="TextBox 16"/>
-          <p:cNvSpPr txBox="1"/>
-          <p:nvPr/>
-        </p:nvSpPr>
-        <p:spPr>
-          <a:xfrm>
-            <a:off x="8778240" y="4480559"/>
-            <a:ext cx="2926080" cy="320040"/>
-          </a:xfrm>
-          <a:prstGeom prst="rect">
-            <a:avLst/>
-          </a:prstGeom>
-          <a:noFill/>
-        </p:spPr>
-        <p:txBody>
-          <a:bodyPr wrap="square">
-            <a:spAutoFit/>
-          </a:bodyPr>
-          <a:lstStyle/>
-          <a:p>
-            <a:pPr algn="l">
-              <a:defRPr sz="1400" b="0">
-                <a:solidFill>
-                  <a:srgbClr val="1F2328"/>
-                </a:solidFill>
-                <a:latin typeface="Microsoft YaHei"/>
-              </a:defRPr>
-            </a:pPr>
-            <a:r>
-              <a:t>这就是你的项目主页</a:t>
-            </a:r>
-          </a:p>
-        </p:txBody>
-      </p:sp>
-      <p:sp>
-        <p:nvSpPr>
-          <p:cNvPr id="18" name="TextBox 17"/>
-          <p:cNvSpPr txBox="1"/>
-          <p:nvPr/>
-        </p:nvSpPr>
-        <p:spPr>
-          <a:xfrm>
-            <a:off x="8778240" y="4800599"/>
-            <a:ext cx="2926080" cy="914400"/>
-          </a:xfrm>
-          <a:prstGeom prst="rect">
-            <a:avLst/>
-          </a:prstGeom>
-          <a:noFill/>
-        </p:spPr>
-        <p:txBody>
-          <a:bodyPr wrap="square">
-            <a:spAutoFit/>
-          </a:bodyPr>
-          <a:lstStyle/>
-          <a:p>
-            <a:pPr algn="l">
-              <a:defRPr sz="1100" b="0">
-                <a:solidFill>
-                  <a:srgbClr val="656D76"/>
-                </a:solidFill>
-                <a:latin typeface="Microsoft YaHei"/>
-              </a:defRPr>
-            </a:pPr>
-            <a:r>
-              <a:t>💡 点 Code 按钮可以</a:t>
-            </a:r>
-            <a:br/>
-            <a:r>
-              <a:t>看到仓库 URL</a:t>
-            </a:r>
-          </a:p>
-        </p:txBody>
-      </p:sp>
-      <p:sp>
-        <p:nvSpPr>
-          <p:cNvPr id="19" name="TextBox 18"/>
-          <p:cNvSpPr txBox="1"/>
-          <p:nvPr/>
-        </p:nvSpPr>
-        <p:spPr>
-          <a:xfrm>
-            <a:off x="5029200" y="6309360"/>
-            <a:ext cx="1828800" cy="274320"/>
-          </a:xfrm>
-          <a:prstGeom prst="rect">
-            <a:avLst/>
-          </a:prstGeom>
-          <a:noFill/>
-        </p:spPr>
-        <p:txBody>
-          <a:bodyPr wrap="square">
-            <a:spAutoFit/>
-          </a:bodyPr>
-          <a:lstStyle/>
-          <a:p>
-            <a:pPr algn="ctr">
-              <a:defRPr sz="1000" b="0">
-                <a:solidFill>
-                  <a:srgbClr val="656D76"/>
-                </a:solidFill>
-                <a:latin typeface="Microsoft YaHei"/>
-              </a:defRPr>
-            </a:pPr>
-            <a:r>
-              <a:t>④ / 12</a:t>
+              <a:t>点进任意文件看到源代码：</a:t>
+            </a:r>
+            <a:br/>
+            <a:br/>
+            <a:r>
+              <a:t>content.js — 核心逻辑</a:t>
+            </a:r>
+            <a:br/>
+            <a:r>
+              <a:t>• 选中放大</a:t>
+            </a:r>
+            <a:br/>
+            <a:r>
+              <a:t>• 演示大鼠标</a:t>
+            </a:r>
+            <a:br/>
+            <a:r>
+              <a:t>• 中文备注</a:t>
+            </a:r>
+            <a:br/>
+            <a:r>
+              <a:t>• 马赛克</a:t>
+            </a:r>
+            <a:br/>
+            <a:r>
+              <a:t>• 画笔勾画</a:t>
+            </a:r>
+            <a:br/>
+            <a:br/>
+            <a:r>
+              <a:t>GitHub 自动语法高亮</a:t>
             </a:r>
           </a:p>
         </p:txBody>
@@ -8380,14 +6446,6 @@
 <file path=ppt/slides/slide6.xml><?xml version="1.0" encoding="utf-8"?>
 <p:sld xmlns:a="http://schemas.openxmlformats.org/drawingml/2006/main" xmlns:p="http://schemas.openxmlformats.org/presentationml/2006/main" xmlns:r="http://schemas.openxmlformats.org/officeDocument/2006/relationships">
   <p:cSld>
-    <p:bg>
-      <p:bgPr>
-        <a:solidFill>
-          <a:srgbClr val="F6F8FA"/>
-        </a:solidFill>
-        <a:effectLst/>
-      </p:bgPr>
-    </p:bg>
     <p:spTree>
       <p:nvGrpSpPr>
         <p:cNvPr id="1" name=""/>
@@ -8446,7 +6504,7 @@
         </p:nvSpPr>
         <p:spPr>
           <a:xfrm>
-            <a:off x="457200" y="73152"/>
+            <a:off x="365760" y="73152"/>
             <a:ext cx="10972800" cy="365760"/>
           </a:xfrm>
           <a:prstGeom prst="rect">
@@ -8469,14 +6527,14 @@
               </a:defRPr>
             </a:pPr>
             <a:r>
-              <a:t>步骤 ⑤：找到仓库 URL</a:t>
+              <a:t>步骤 ⑤：弹窗界面 popup.html</a:t>
             </a:r>
           </a:p>
         </p:txBody>
       </p:sp>
       <p:pic>
         <p:nvPicPr>
-          <p:cNvPr id="4" name="Picture 3" descr="04_github_project.png"/>
+          <p:cNvPr id="4" name="Picture 3" descr="04_popup.png"/>
           <p:cNvPicPr>
             <a:picLocks noChangeAspect="1"/>
           </p:cNvPicPr>
@@ -8490,8 +6548,8 @@
         </p:blipFill>
         <p:spPr>
           <a:xfrm>
-            <a:off x="365760" y="594360"/>
-            <a:ext cx="8046720" cy="5669280"/>
+            <a:off x="274320" y="594360"/>
+            <a:ext cx="8046720" cy="5486400"/>
           </a:xfrm>
           <a:prstGeom prst="rect">
             <a:avLst/>
@@ -8506,8 +6564,8 @@
         </p:nvSpPr>
         <p:spPr>
           <a:xfrm>
-            <a:off x="8595360" y="594360"/>
-            <a:ext cx="3291840" cy="5669280"/>
+            <a:off x="8503920" y="594360"/>
+            <a:ext cx="3383280" cy="5852160"/>
           </a:xfrm>
           <a:prstGeom prst="roundRect">
             <a:avLst/>
@@ -8551,8 +6609,8 @@
         </p:nvSpPr>
         <p:spPr>
           <a:xfrm>
-            <a:off x="8778240" y="731520"/>
-            <a:ext cx="1828800" cy="320040"/>
+            <a:off x="8686800" y="731520"/>
+            <a:ext cx="1645920" cy="320040"/>
           </a:xfrm>
           <a:prstGeom prst="roundRect">
             <a:avLst/>
@@ -8604,8 +6662,8 @@
         </p:nvSpPr>
         <p:spPr>
           <a:xfrm>
-            <a:off x="8778240" y="1280160"/>
-            <a:ext cx="2926080" cy="320040"/>
+            <a:off x="8686800" y="1188720"/>
+            <a:ext cx="3017520" cy="4114800"/>
           </a:xfrm>
           <a:prstGeom prst="rect">
             <a:avLst/>
@@ -8619,7 +6677,7 @@
           <a:lstStyle/>
           <a:p>
             <a:pPr algn="l">
-              <a:defRPr sz="1400" b="1">
+              <a:defRPr sz="1400" b="0">
                 <a:solidFill>
                   <a:srgbClr val="1F2328"/>
                 </a:solidFill>
@@ -8627,431 +6685,41 @@
               </a:defRPr>
             </a:pPr>
             <a:r>
-              <a:t>点击 Code 按钮：</a:t>
-            </a:r>
-          </a:p>
-        </p:txBody>
-      </p:sp>
-      <p:sp>
-        <p:nvSpPr>
-          <p:cNvPr id="8" name="TextBox 7"/>
-          <p:cNvSpPr txBox="1"/>
-          <p:nvPr/>
-        </p:nvSpPr>
-        <p:spPr>
-          <a:xfrm>
-            <a:off x="8778240" y="1600200"/>
-            <a:ext cx="2926080" cy="320040"/>
-          </a:xfrm>
-          <a:prstGeom prst="rect">
-            <a:avLst/>
-          </a:prstGeom>
-          <a:noFill/>
-        </p:spPr>
-        <p:txBody>
-          <a:bodyPr wrap="square">
-            <a:spAutoFit/>
-          </a:bodyPr>
-          <a:lstStyle/>
-          <a:p>
-            <a:pPr algn="l">
-              <a:defRPr sz="1400" b="0">
-                <a:solidFill>
-                  <a:srgbClr val="1F2328"/>
-                </a:solidFill>
-                <a:latin typeface="Microsoft YaHei"/>
-              </a:defRPr>
-            </a:pPr>
-          </a:p>
-        </p:txBody>
-      </p:sp>
-      <p:sp>
-        <p:nvSpPr>
-          <p:cNvPr id="9" name="TextBox 8"/>
-          <p:cNvSpPr txBox="1"/>
-          <p:nvPr/>
-        </p:nvSpPr>
-        <p:spPr>
-          <a:xfrm>
-            <a:off x="8778240" y="1920240"/>
-            <a:ext cx="2926080" cy="320040"/>
-          </a:xfrm>
-          <a:prstGeom prst="rect">
-            <a:avLst/>
-          </a:prstGeom>
-          <a:noFill/>
-        </p:spPr>
-        <p:txBody>
-          <a:bodyPr wrap="square">
-            <a:spAutoFit/>
-          </a:bodyPr>
-          <a:lstStyle/>
-          <a:p>
-            <a:pPr algn="l">
-              <a:defRPr sz="1400" b="0">
-                <a:solidFill>
-                  <a:srgbClr val="1F2328"/>
-                </a:solidFill>
-                <a:latin typeface="Microsoft YaHei"/>
-              </a:defRPr>
-            </a:pPr>
-            <a:r>
-              <a:t>弹出这个菜单：</a:t>
-            </a:r>
-          </a:p>
-        </p:txBody>
-      </p:sp>
-      <p:sp>
-        <p:nvSpPr>
-          <p:cNvPr id="10" name="TextBox 9"/>
-          <p:cNvSpPr txBox="1"/>
-          <p:nvPr/>
-        </p:nvSpPr>
-        <p:spPr>
-          <a:xfrm>
-            <a:off x="8778240" y="2240280"/>
-            <a:ext cx="2926080" cy="320040"/>
-          </a:xfrm>
-          <a:prstGeom prst="rect">
-            <a:avLst/>
-          </a:prstGeom>
-          <a:noFill/>
-        </p:spPr>
-        <p:txBody>
-          <a:bodyPr wrap="square">
-            <a:spAutoFit/>
-          </a:bodyPr>
-          <a:lstStyle/>
-          <a:p>
-            <a:pPr algn="l">
-              <a:defRPr sz="1400" b="0">
-                <a:solidFill>
-                  <a:srgbClr val="1F2328"/>
-                </a:solidFill>
-                <a:latin typeface="Microsoft YaHei"/>
-              </a:defRPr>
-            </a:pPr>
-          </a:p>
-        </p:txBody>
-      </p:sp>
-      <p:sp>
-        <p:nvSpPr>
-          <p:cNvPr id="11" name="TextBox 10"/>
-          <p:cNvSpPr txBox="1"/>
-          <p:nvPr/>
-        </p:nvSpPr>
-        <p:spPr>
-          <a:xfrm>
-            <a:off x="8778240" y="2560320"/>
-            <a:ext cx="2926080" cy="320040"/>
-          </a:xfrm>
-          <a:prstGeom prst="rect">
-            <a:avLst/>
-          </a:prstGeom>
-          <a:noFill/>
-        </p:spPr>
-        <p:txBody>
-          <a:bodyPr wrap="square">
-            <a:spAutoFit/>
-          </a:bodyPr>
-          <a:lstStyle/>
-          <a:p>
-            <a:pPr algn="l">
-              <a:defRPr sz="1400" b="0">
-                <a:solidFill>
-                  <a:srgbClr val="1F2328"/>
-                </a:solidFill>
-                <a:latin typeface="Microsoft YaHei"/>
-              </a:defRPr>
-            </a:pPr>
-            <a:r>
-              <a:t>📍 最上面就是 URL</a:t>
-            </a:r>
-          </a:p>
-        </p:txBody>
-      </p:sp>
-      <p:sp>
-        <p:nvSpPr>
-          <p:cNvPr id="12" name="TextBox 11"/>
-          <p:cNvSpPr txBox="1"/>
-          <p:nvPr/>
-        </p:nvSpPr>
-        <p:spPr>
-          <a:xfrm>
-            <a:off x="8778240" y="2880360"/>
-            <a:ext cx="2926080" cy="320040"/>
-          </a:xfrm>
-          <a:prstGeom prst="rect">
-            <a:avLst/>
-          </a:prstGeom>
-          <a:noFill/>
-        </p:spPr>
-        <p:txBody>
-          <a:bodyPr wrap="square">
-            <a:spAutoFit/>
-          </a:bodyPr>
-          <a:lstStyle/>
-          <a:p>
-            <a:pPr algn="l">
-              <a:defRPr sz="1400" b="0">
-                <a:solidFill>
-                  <a:srgbClr val="1F2328"/>
-                </a:solidFill>
-                <a:latin typeface="Microsoft YaHei"/>
-              </a:defRPr>
-            </a:pPr>
-            <a:r>
-              <a:t>https://github.com/...</a:t>
-            </a:r>
-          </a:p>
-        </p:txBody>
-      </p:sp>
-      <p:sp>
-        <p:nvSpPr>
-          <p:cNvPr id="13" name="TextBox 12"/>
-          <p:cNvSpPr txBox="1"/>
-          <p:nvPr/>
-        </p:nvSpPr>
-        <p:spPr>
-          <a:xfrm>
-            <a:off x="8778240" y="3200400"/>
-            <a:ext cx="2926080" cy="320040"/>
-          </a:xfrm>
-          <a:prstGeom prst="rect">
-            <a:avLst/>
-          </a:prstGeom>
-          <a:noFill/>
-        </p:spPr>
-        <p:txBody>
-          <a:bodyPr wrap="square">
-            <a:spAutoFit/>
-          </a:bodyPr>
-          <a:lstStyle/>
-          <a:p>
-            <a:pPr algn="l">
-              <a:defRPr sz="1400" b="0">
-                <a:solidFill>
-                  <a:srgbClr val="1F2328"/>
-                </a:solidFill>
-                <a:latin typeface="Microsoft YaHei"/>
-              </a:defRPr>
-            </a:pPr>
-          </a:p>
-        </p:txBody>
-      </p:sp>
-      <p:sp>
-        <p:nvSpPr>
-          <p:cNvPr id="14" name="TextBox 13"/>
-          <p:cNvSpPr txBox="1"/>
-          <p:nvPr/>
-        </p:nvSpPr>
-        <p:spPr>
-          <a:xfrm>
-            <a:off x="8778240" y="3520440"/>
-            <a:ext cx="2926080" cy="320040"/>
-          </a:xfrm>
-          <a:prstGeom prst="rect">
-            <a:avLst/>
-          </a:prstGeom>
-          <a:noFill/>
-        </p:spPr>
-        <p:txBody>
-          <a:bodyPr wrap="square">
-            <a:spAutoFit/>
-          </a:bodyPr>
-          <a:lstStyle/>
-          <a:p>
-            <a:pPr algn="l">
-              <a:defRPr sz="1400" b="0">
-                <a:solidFill>
-                  <a:srgbClr val="1F2328"/>
-                </a:solidFill>
-                <a:latin typeface="Microsoft YaHei"/>
-              </a:defRPr>
-            </a:pPr>
-            <a:r>
-              <a:t>📋 点复制按钮 Copy</a:t>
-            </a:r>
-          </a:p>
-        </p:txBody>
-      </p:sp>
-      <p:sp>
-        <p:nvSpPr>
-          <p:cNvPr id="15" name="TextBox 14"/>
-          <p:cNvSpPr txBox="1"/>
-          <p:nvPr/>
-        </p:nvSpPr>
-        <p:spPr>
-          <a:xfrm>
-            <a:off x="8778240" y="3840480"/>
-            <a:ext cx="2926080" cy="320040"/>
-          </a:xfrm>
-          <a:prstGeom prst="rect">
-            <a:avLst/>
-          </a:prstGeom>
-          <a:noFill/>
-        </p:spPr>
-        <p:txBody>
-          <a:bodyPr wrap="square">
-            <a:spAutoFit/>
-          </a:bodyPr>
-          <a:lstStyle/>
-          <a:p>
-            <a:pPr algn="l">
-              <a:defRPr sz="1400" b="0">
-                <a:solidFill>
-                  <a:srgbClr val="1F2328"/>
-                </a:solidFill>
-                <a:latin typeface="Microsoft YaHei"/>
-              </a:defRPr>
-            </a:pPr>
-          </a:p>
-        </p:txBody>
-      </p:sp>
-      <p:sp>
-        <p:nvSpPr>
-          <p:cNvPr id="16" name="TextBox 15"/>
-          <p:cNvSpPr txBox="1"/>
-          <p:nvPr/>
-        </p:nvSpPr>
-        <p:spPr>
-          <a:xfrm>
-            <a:off x="8778240" y="4160520"/>
-            <a:ext cx="2926080" cy="320040"/>
-          </a:xfrm>
-          <a:prstGeom prst="rect">
-            <a:avLst/>
-          </a:prstGeom>
-          <a:noFill/>
-        </p:spPr>
-        <p:txBody>
-          <a:bodyPr wrap="square">
-            <a:spAutoFit/>
-          </a:bodyPr>
-          <a:lstStyle/>
-          <a:p>
-            <a:pPr algn="l">
-              <a:defRPr sz="1400" b="0">
-                <a:solidFill>
-                  <a:srgbClr val="1F2328"/>
-                </a:solidFill>
-                <a:latin typeface="Microsoft YaHei"/>
-              </a:defRPr>
-            </a:pPr>
-            <a:r>
-              <a:t>或者 Download ZIP</a:t>
-            </a:r>
-          </a:p>
-        </p:txBody>
-      </p:sp>
-      <p:sp>
-        <p:nvSpPr>
-          <p:cNvPr id="17" name="TextBox 16"/>
-          <p:cNvSpPr txBox="1"/>
-          <p:nvPr/>
-        </p:nvSpPr>
-        <p:spPr>
-          <a:xfrm>
-            <a:off x="8778240" y="4480559"/>
-            <a:ext cx="2926080" cy="320040"/>
-          </a:xfrm>
-          <a:prstGeom prst="rect">
-            <a:avLst/>
-          </a:prstGeom>
-          <a:noFill/>
-        </p:spPr>
-        <p:txBody>
-          <a:bodyPr wrap="square">
-            <a:spAutoFit/>
-          </a:bodyPr>
-          <a:lstStyle/>
-          <a:p>
-            <a:pPr algn="l">
-              <a:defRPr sz="1400" b="0">
-                <a:solidFill>
-                  <a:srgbClr val="1F2328"/>
-                </a:solidFill>
-                <a:latin typeface="Microsoft YaHei"/>
-              </a:defRPr>
-            </a:pPr>
-            <a:r>
-              <a:t>下载整个项目</a:t>
-            </a:r>
-          </a:p>
-        </p:txBody>
-      </p:sp>
-      <p:sp>
-        <p:nvSpPr>
-          <p:cNvPr id="18" name="TextBox 17"/>
-          <p:cNvSpPr txBox="1"/>
-          <p:nvPr/>
-        </p:nvSpPr>
-        <p:spPr>
-          <a:xfrm>
-            <a:off x="8778240" y="4800599"/>
-            <a:ext cx="2926080" cy="914400"/>
-          </a:xfrm>
-          <a:prstGeom prst="rect">
-            <a:avLst/>
-          </a:prstGeom>
-          <a:noFill/>
-        </p:spPr>
-        <p:txBody>
-          <a:bodyPr wrap="square">
-            <a:spAutoFit/>
-          </a:bodyPr>
-          <a:lstStyle/>
-          <a:p>
-            <a:pPr algn="l">
-              <a:defRPr sz="1100" b="0">
-                <a:solidFill>
-                  <a:srgbClr val="656D76"/>
-                </a:solidFill>
-                <a:latin typeface="Microsoft YaHei"/>
-              </a:defRPr>
-            </a:pPr>
-            <a:r>
-              <a:t>⚠️ 把 URL 复制到记事本！</a:t>
-            </a:r>
-            <a:br/>
-            <a:r>
-              <a:t>后面要用到</a:t>
-            </a:r>
-          </a:p>
-        </p:txBody>
-      </p:sp>
-      <p:sp>
-        <p:nvSpPr>
-          <p:cNvPr id="19" name="TextBox 18"/>
-          <p:cNvSpPr txBox="1"/>
-          <p:nvPr/>
-        </p:nvSpPr>
-        <p:spPr>
-          <a:xfrm>
-            <a:off x="5029200" y="6309360"/>
-            <a:ext cx="1828800" cy="274320"/>
-          </a:xfrm>
-          <a:prstGeom prst="rect">
-            <a:avLst/>
-          </a:prstGeom>
-          <a:noFill/>
-        </p:spPr>
-        <p:txBody>
-          <a:bodyPr wrap="square">
-            <a:spAutoFit/>
-          </a:bodyPr>
-          <a:lstStyle/>
-          <a:p>
-            <a:pPr algn="ctr">
-              <a:defRPr sz="1000" b="0">
-                <a:solidFill>
-                  <a:srgbClr val="656D76"/>
-                </a:solidFill>
-                <a:latin typeface="Microsoft YaHei"/>
-              </a:defRPr>
-            </a:pPr>
-            <a:r>
-              <a:t>⑤ / 12</a:t>
+              <a:t>popup.html — 控制面板</a:t>
+            </a:r>
+            <a:br/>
+            <a:br/>
+            <a:r>
+              <a:t>所有功能开关一目了然：</a:t>
+            </a:r>
+            <a:br/>
+            <a:r>
+              <a:t>• 🎯 选中放大</a:t>
+            </a:r>
+            <a:br/>
+            <a:r>
+              <a:t>• 🖥️ 演示模式</a:t>
+            </a:r>
+            <a:br/>
+            <a:r>
+              <a:t>• ✏️ 画笔勾画</a:t>
+            </a:r>
+            <a:br/>
+            <a:r>
+              <a:t>• 📝 备注</a:t>
+            </a:r>
+            <a:br/>
+            <a:r>
+              <a:t>• 🫥 马赛克</a:t>
+            </a:r>
+            <a:br/>
+            <a:br/>
+            <a:r>
+              <a:t>点击浏览器右上角</a:t>
+            </a:r>
+            <a:br/>
+            <a:r>
+              <a:t>🔍 图标打开</a:t>
             </a:r>
           </a:p>
         </p:txBody>
@@ -9067,14 +6735,6 @@
 <file path=ppt/slides/slide7.xml><?xml version="1.0" encoding="utf-8"?>
 <p:sld xmlns:a="http://schemas.openxmlformats.org/drawingml/2006/main" xmlns:p="http://schemas.openxmlformats.org/presentationml/2006/main" xmlns:r="http://schemas.openxmlformats.org/officeDocument/2006/relationships">
   <p:cSld>
-    <p:bg>
-      <p:bgPr>
-        <a:solidFill>
-          <a:srgbClr val="F6F8FA"/>
-        </a:solidFill>
-        <a:effectLst/>
-      </p:bgPr>
-    </p:bg>
     <p:spTree>
       <p:nvGrpSpPr>
         <p:cNvPr id="1" name=""/>
@@ -9133,7 +6793,7 @@
         </p:nvSpPr>
         <p:spPr>
           <a:xfrm>
-            <a:off x="457200" y="73152"/>
+            <a:off x="365760" y="73152"/>
             <a:ext cx="10972800" cy="365760"/>
           </a:xfrm>
           <a:prstGeom prst="rect">
@@ -9156,14 +6816,14 @@
               </a:defRPr>
             </a:pPr>
             <a:r>
-              <a:t>步骤 ⑥：浏览代码</a:t>
+              <a:t>步骤 ⑥：项目说明书 README</a:t>
             </a:r>
           </a:p>
         </p:txBody>
       </p:sp>
       <p:pic>
         <p:nvPicPr>
-          <p:cNvPr id="4" name="Picture 3" descr="04_github_project.png"/>
+          <p:cNvPr id="4" name="Picture 3" descr="06_readme.png"/>
           <p:cNvPicPr>
             <a:picLocks noChangeAspect="1"/>
           </p:cNvPicPr>
@@ -9177,8 +6837,8 @@
         </p:blipFill>
         <p:spPr>
           <a:xfrm>
-            <a:off x="365760" y="594360"/>
-            <a:ext cx="8046720" cy="5669280"/>
+            <a:off x="274320" y="594360"/>
+            <a:ext cx="8046720" cy="5486400"/>
           </a:xfrm>
           <a:prstGeom prst="rect">
             <a:avLst/>
@@ -9193,8 +6853,8 @@
         </p:nvSpPr>
         <p:spPr>
           <a:xfrm>
-            <a:off x="8595360" y="594360"/>
-            <a:ext cx="3291840" cy="5669280"/>
+            <a:off x="8503920" y="594360"/>
+            <a:ext cx="3383280" cy="5852160"/>
           </a:xfrm>
           <a:prstGeom prst="roundRect">
             <a:avLst/>
@@ -9238,8 +6898,8 @@
         </p:nvSpPr>
         <p:spPr>
           <a:xfrm>
-            <a:off x="8778240" y="731520"/>
-            <a:ext cx="1828800" cy="320040"/>
+            <a:off x="8686800" y="731520"/>
+            <a:ext cx="1645920" cy="320040"/>
           </a:xfrm>
           <a:prstGeom prst="roundRect">
             <a:avLst/>
@@ -9291,8 +6951,8 @@
         </p:nvSpPr>
         <p:spPr>
           <a:xfrm>
-            <a:off x="8778240" y="1280160"/>
-            <a:ext cx="2926080" cy="320040"/>
+            <a:off x="8686800" y="1188720"/>
+            <a:ext cx="3017520" cy="4114800"/>
           </a:xfrm>
           <a:prstGeom prst="rect">
             <a:avLst/>
@@ -9306,7 +6966,7 @@
           <a:lstStyle/>
           <a:p>
             <a:pPr algn="l">
-              <a:defRPr sz="1400" b="1">
+              <a:defRPr sz="1400" b="0">
                 <a:solidFill>
                   <a:srgbClr val="1F2328"/>
                 </a:solidFill>
@@ -9314,398 +6974,32 @@
               </a:defRPr>
             </a:pPr>
             <a:r>
-              <a:t>点进任意文件：</a:t>
-            </a:r>
-          </a:p>
-        </p:txBody>
-      </p:sp>
-      <p:sp>
-        <p:nvSpPr>
-          <p:cNvPr id="8" name="TextBox 7"/>
-          <p:cNvSpPr txBox="1"/>
-          <p:nvPr/>
-        </p:nvSpPr>
-        <p:spPr>
-          <a:xfrm>
-            <a:off x="8778240" y="1600200"/>
-            <a:ext cx="2926080" cy="320040"/>
-          </a:xfrm>
-          <a:prstGeom prst="rect">
-            <a:avLst/>
-          </a:prstGeom>
-          <a:noFill/>
-        </p:spPr>
-        <p:txBody>
-          <a:bodyPr wrap="square">
-            <a:spAutoFit/>
-          </a:bodyPr>
-          <a:lstStyle/>
-          <a:p>
-            <a:pPr algn="l">
-              <a:defRPr sz="1400" b="0">
-                <a:solidFill>
-                  <a:srgbClr val="1F2328"/>
-                </a:solidFill>
-                <a:latin typeface="Microsoft YaHei"/>
-              </a:defRPr>
-            </a:pPr>
-          </a:p>
-        </p:txBody>
-      </p:sp>
-      <p:sp>
-        <p:nvSpPr>
-          <p:cNvPr id="9" name="TextBox 8"/>
-          <p:cNvSpPr txBox="1"/>
-          <p:nvPr/>
-        </p:nvSpPr>
-        <p:spPr>
-          <a:xfrm>
-            <a:off x="8778240" y="1920240"/>
-            <a:ext cx="2926080" cy="320040"/>
-          </a:xfrm>
-          <a:prstGeom prst="rect">
-            <a:avLst/>
-          </a:prstGeom>
-          <a:noFill/>
-        </p:spPr>
-        <p:txBody>
-          <a:bodyPr wrap="square">
-            <a:spAutoFit/>
-          </a:bodyPr>
-          <a:lstStyle/>
-          <a:p>
-            <a:pPr algn="l">
-              <a:defRPr sz="1400" b="0">
-                <a:solidFill>
-                  <a:srgbClr val="1F2328"/>
-                </a:solidFill>
-                <a:latin typeface="Microsoft YaHei"/>
-              </a:defRPr>
-            </a:pPr>
-            <a:r>
-              <a:t>可以看到代码内容</a:t>
-            </a:r>
-          </a:p>
-        </p:txBody>
-      </p:sp>
-      <p:sp>
-        <p:nvSpPr>
-          <p:cNvPr id="10" name="TextBox 9"/>
-          <p:cNvSpPr txBox="1"/>
-          <p:nvPr/>
-        </p:nvSpPr>
-        <p:spPr>
-          <a:xfrm>
-            <a:off x="8778240" y="2240280"/>
-            <a:ext cx="2926080" cy="320040"/>
-          </a:xfrm>
-          <a:prstGeom prst="rect">
-            <a:avLst/>
-          </a:prstGeom>
-          <a:noFill/>
-        </p:spPr>
-        <p:txBody>
-          <a:bodyPr wrap="square">
-            <a:spAutoFit/>
-          </a:bodyPr>
-          <a:lstStyle/>
-          <a:p>
-            <a:pPr algn="l">
-              <a:defRPr sz="1400" b="0">
-                <a:solidFill>
-                  <a:srgbClr val="1F2328"/>
-                </a:solidFill>
-                <a:latin typeface="Microsoft YaHei"/>
-              </a:defRPr>
-            </a:pPr>
-            <a:r>
-              <a:t>GitHub 自动语法高亮</a:t>
-            </a:r>
-          </a:p>
-        </p:txBody>
-      </p:sp>
-      <p:sp>
-        <p:nvSpPr>
-          <p:cNvPr id="11" name="TextBox 10"/>
-          <p:cNvSpPr txBox="1"/>
-          <p:nvPr/>
-        </p:nvSpPr>
-        <p:spPr>
-          <a:xfrm>
-            <a:off x="8778240" y="2560320"/>
-            <a:ext cx="2926080" cy="320040"/>
-          </a:xfrm>
-          <a:prstGeom prst="rect">
-            <a:avLst/>
-          </a:prstGeom>
-          <a:noFill/>
-        </p:spPr>
-        <p:txBody>
-          <a:bodyPr wrap="square">
-            <a:spAutoFit/>
-          </a:bodyPr>
-          <a:lstStyle/>
-          <a:p>
-            <a:pPr algn="l">
-              <a:defRPr sz="1400" b="0">
-                <a:solidFill>
-                  <a:srgbClr val="1F2328"/>
-                </a:solidFill>
-                <a:latin typeface="Microsoft YaHei"/>
-              </a:defRPr>
-            </a:pPr>
-          </a:p>
-        </p:txBody>
-      </p:sp>
-      <p:sp>
-        <p:nvSpPr>
-          <p:cNvPr id="12" name="TextBox 11"/>
-          <p:cNvSpPr txBox="1"/>
-          <p:nvPr/>
-        </p:nvSpPr>
-        <p:spPr>
-          <a:xfrm>
-            <a:off x="8778240" y="2880360"/>
-            <a:ext cx="2926080" cy="320040"/>
-          </a:xfrm>
-          <a:prstGeom prst="rect">
-            <a:avLst/>
-          </a:prstGeom>
-          <a:noFill/>
-        </p:spPr>
-        <p:txBody>
-          <a:bodyPr wrap="square">
-            <a:spAutoFit/>
-          </a:bodyPr>
-          <a:lstStyle/>
-          <a:p>
-            <a:pPr algn="l">
-              <a:defRPr sz="1400" b="0">
-                <a:solidFill>
-                  <a:srgbClr val="1F2328"/>
-                </a:solidFill>
-                <a:latin typeface="Microsoft YaHei"/>
-              </a:defRPr>
-            </a:pPr>
-            <a:r>
-              <a:t>这就是我们的插件代码</a:t>
-            </a:r>
-          </a:p>
-        </p:txBody>
-      </p:sp>
-      <p:sp>
-        <p:nvSpPr>
-          <p:cNvPr id="13" name="TextBox 12"/>
-          <p:cNvSpPr txBox="1"/>
-          <p:nvPr/>
-        </p:nvSpPr>
-        <p:spPr>
-          <a:xfrm>
-            <a:off x="8778240" y="3200400"/>
-            <a:ext cx="2926080" cy="320040"/>
-          </a:xfrm>
-          <a:prstGeom prst="rect">
-            <a:avLst/>
-          </a:prstGeom>
-          <a:noFill/>
-        </p:spPr>
-        <p:txBody>
-          <a:bodyPr wrap="square">
-            <a:spAutoFit/>
-          </a:bodyPr>
-          <a:lstStyle/>
-          <a:p>
-            <a:pPr algn="l">
-              <a:defRPr sz="1400" b="0">
-                <a:solidFill>
-                  <a:srgbClr val="1F2328"/>
-                </a:solidFill>
-                <a:latin typeface="Microsoft YaHei"/>
-              </a:defRPr>
-            </a:pPr>
-          </a:p>
-        </p:txBody>
-      </p:sp>
-      <p:sp>
-        <p:nvSpPr>
-          <p:cNvPr id="14" name="TextBox 13"/>
-          <p:cNvSpPr txBox="1"/>
-          <p:nvPr/>
-        </p:nvSpPr>
-        <p:spPr>
-          <a:xfrm>
-            <a:off x="8778240" y="3520440"/>
-            <a:ext cx="2926080" cy="320040"/>
-          </a:xfrm>
-          <a:prstGeom prst="rect">
-            <a:avLst/>
-          </a:prstGeom>
-          <a:noFill/>
-        </p:spPr>
-        <p:txBody>
-          <a:bodyPr wrap="square">
-            <a:spAutoFit/>
-          </a:bodyPr>
-          <a:lstStyle/>
-          <a:p>
-            <a:pPr algn="l">
-              <a:defRPr sz="1400" b="0">
-                <a:solidFill>
-                  <a:srgbClr val="1F2328"/>
-                </a:solidFill>
-                <a:latin typeface="Microsoft YaHei"/>
-              </a:defRPr>
-            </a:pPr>
-            <a:r>
-              <a:t>🎯 选中文字 → 放大</a:t>
-            </a:r>
-          </a:p>
-        </p:txBody>
-      </p:sp>
-      <p:sp>
-        <p:nvSpPr>
-          <p:cNvPr id="15" name="TextBox 14"/>
-          <p:cNvSpPr txBox="1"/>
-          <p:nvPr/>
-        </p:nvSpPr>
-        <p:spPr>
-          <a:xfrm>
-            <a:off x="8778240" y="3840480"/>
-            <a:ext cx="2926080" cy="320040"/>
-          </a:xfrm>
-          <a:prstGeom prst="rect">
-            <a:avLst/>
-          </a:prstGeom>
-          <a:noFill/>
-        </p:spPr>
-        <p:txBody>
-          <a:bodyPr wrap="square">
-            <a:spAutoFit/>
-          </a:bodyPr>
-          <a:lstStyle/>
-          <a:p>
-            <a:pPr algn="l">
-              <a:defRPr sz="1400" b="0">
-                <a:solidFill>
-                  <a:srgbClr val="1F2328"/>
-                </a:solidFill>
-                <a:latin typeface="Microsoft YaHei"/>
-              </a:defRPr>
-            </a:pPr>
-            <a:r>
-              <a:t>🖥️ 演示模式 → 大鼠标</a:t>
-            </a:r>
-          </a:p>
-        </p:txBody>
-      </p:sp>
-      <p:sp>
-        <p:nvSpPr>
-          <p:cNvPr id="16" name="TextBox 15"/>
-          <p:cNvSpPr txBox="1"/>
-          <p:nvPr/>
-        </p:nvSpPr>
-        <p:spPr>
-          <a:xfrm>
-            <a:off x="8778240" y="4160520"/>
-            <a:ext cx="2926080" cy="320040"/>
-          </a:xfrm>
-          <a:prstGeom prst="rect">
-            <a:avLst/>
-          </a:prstGeom>
-          <a:noFill/>
-        </p:spPr>
-        <p:txBody>
-          <a:bodyPr wrap="square">
-            <a:spAutoFit/>
-          </a:bodyPr>
-          <a:lstStyle/>
-          <a:p>
-            <a:pPr algn="l">
-              <a:defRPr sz="1400" b="0">
-                <a:solidFill>
-                  <a:srgbClr val="1F2328"/>
-                </a:solidFill>
-                <a:latin typeface="Microsoft YaHei"/>
-              </a:defRPr>
-            </a:pPr>
-            <a:r>
-              <a:t>📝 Alt+点击 → 中文备注</a:t>
-            </a:r>
-          </a:p>
-        </p:txBody>
-      </p:sp>
-      <p:sp>
-        <p:nvSpPr>
-          <p:cNvPr id="17" name="TextBox 16"/>
-          <p:cNvSpPr txBox="1"/>
-          <p:nvPr/>
-        </p:nvSpPr>
-        <p:spPr>
-          <a:xfrm>
-            <a:off x="8778240" y="4754880"/>
-            <a:ext cx="2926080" cy="914400"/>
-          </a:xfrm>
-          <a:prstGeom prst="rect">
-            <a:avLst/>
-          </a:prstGeom>
-          <a:noFill/>
-        </p:spPr>
-        <p:txBody>
-          <a:bodyPr wrap="square">
-            <a:spAutoFit/>
-          </a:bodyPr>
-          <a:lstStyle/>
-          <a:p>
-            <a:pPr algn="l">
-              <a:defRPr sz="1100" b="0">
-                <a:solidFill>
-                  <a:srgbClr val="656D76"/>
-                </a:solidFill>
-                <a:latin typeface="Microsoft YaHei"/>
-              </a:defRPr>
-            </a:pPr>
-            <a:r>
-              <a:t>💡 双击代码里的单词</a:t>
-            </a:r>
-            <a:br/>
-            <a:r>
-              <a:t>可以快速选中</a:t>
-            </a:r>
-          </a:p>
-        </p:txBody>
-      </p:sp>
-      <p:sp>
-        <p:nvSpPr>
-          <p:cNvPr id="18" name="TextBox 17"/>
-          <p:cNvSpPr txBox="1"/>
-          <p:nvPr/>
-        </p:nvSpPr>
-        <p:spPr>
-          <a:xfrm>
-            <a:off x="5029200" y="6309360"/>
-            <a:ext cx="1828800" cy="274320"/>
-          </a:xfrm>
-          <a:prstGeom prst="rect">
-            <a:avLst/>
-          </a:prstGeom>
-          <a:noFill/>
-        </p:spPr>
-        <p:txBody>
-          <a:bodyPr wrap="square">
-            <a:spAutoFit/>
-          </a:bodyPr>
-          <a:lstStyle/>
-          <a:p>
-            <a:pPr algn="ctr">
-              <a:defRPr sz="1000" b="0">
-                <a:solidFill>
-                  <a:srgbClr val="656D76"/>
-                </a:solidFill>
-                <a:latin typeface="Microsoft YaHei"/>
-              </a:defRPr>
-            </a:pPr>
-            <a:r>
-              <a:t>⑥ / 12</a:t>
+              <a:t>README.md 是项目的门面</a:t>
+            </a:r>
+            <a:br/>
+            <a:br/>
+            <a:r>
+              <a:t>好 README 包含：</a:t>
+            </a:r>
+            <a:br/>
+            <a:r>
+              <a:t>• 项目名字 + 干嘛用的</a:t>
+            </a:r>
+            <a:br/>
+            <a:r>
+              <a:t>• 全部功能介绍</a:t>
+            </a:r>
+            <a:br/>
+            <a:r>
+              <a:t>• 怎么安装</a:t>
+            </a:r>
+            <a:br/>
+            <a:r>
+              <a:t>• 使用教程</a:t>
+            </a:r>
+            <a:br/>
+            <a:r>
+              <a:t>• 目录结构</a:t>
             </a:r>
           </a:p>
         </p:txBody>
@@ -9721,14 +7015,6 @@
 <file path=ppt/slides/slide8.xml><?xml version="1.0" encoding="utf-8"?>
 <p:sld xmlns:a="http://schemas.openxmlformats.org/drawingml/2006/main" xmlns:p="http://schemas.openxmlformats.org/presentationml/2006/main" xmlns:r="http://schemas.openxmlformats.org/officeDocument/2006/relationships">
   <p:cSld>
-    <p:bg>
-      <p:bgPr>
-        <a:solidFill>
-          <a:srgbClr val="F6F8FA"/>
-        </a:solidFill>
-        <a:effectLst/>
-      </p:bgPr>
-    </p:bg>
     <p:spTree>
       <p:nvGrpSpPr>
         <p:cNvPr id="1" name=""/>
@@ -9787,7 +7073,7 @@
         </p:nvSpPr>
         <p:spPr>
           <a:xfrm>
-            <a:off x="457200" y="73152"/>
+            <a:off x="365760" y="73152"/>
             <a:ext cx="10972800" cy="365760"/>
           </a:xfrm>
           <a:prstGeom prst="rect">
@@ -9810,14 +7096,14 @@
               </a:defRPr>
             </a:pPr>
             <a:r>
-              <a:t>步骤 ⑦：上传后的项目主页</a:t>
+              <a:t>步骤 ⑦：Issues 反馈区</a:t>
             </a:r>
           </a:p>
         </p:txBody>
       </p:sp>
       <p:pic>
         <p:nvPicPr>
-          <p:cNvPr id="4" name="Picture 3" descr="04_github_project.png"/>
+          <p:cNvPr id="4" name="Picture 3" descr="07_issues.png"/>
           <p:cNvPicPr>
             <a:picLocks noChangeAspect="1"/>
           </p:cNvPicPr>
@@ -9831,8 +7117,8 @@
         </p:blipFill>
         <p:spPr>
           <a:xfrm>
-            <a:off x="365760" y="594360"/>
-            <a:ext cx="8046720" cy="5669280"/>
+            <a:off x="274320" y="594360"/>
+            <a:ext cx="8046720" cy="5486400"/>
           </a:xfrm>
           <a:prstGeom prst="rect">
             <a:avLst/>
@@ -9847,8 +7133,8 @@
         </p:nvSpPr>
         <p:spPr>
           <a:xfrm>
-            <a:off x="8595360" y="594360"/>
-            <a:ext cx="3291840" cy="5669280"/>
+            <a:off x="8503920" y="594360"/>
+            <a:ext cx="3383280" cy="5852160"/>
           </a:xfrm>
           <a:prstGeom prst="roundRect">
             <a:avLst/>
@@ -9892,8 +7178,8 @@
         </p:nvSpPr>
         <p:spPr>
           <a:xfrm>
-            <a:off x="8778240" y="731520"/>
-            <a:ext cx="1828800" cy="320040"/>
+            <a:off x="8686800" y="731520"/>
+            <a:ext cx="1645920" cy="320040"/>
           </a:xfrm>
           <a:prstGeom prst="roundRect">
             <a:avLst/>
@@ -9945,8 +7231,8 @@
         </p:nvSpPr>
         <p:spPr>
           <a:xfrm>
-            <a:off x="8778240" y="1280160"/>
-            <a:ext cx="2926080" cy="320040"/>
+            <a:off x="8686800" y="1188720"/>
+            <a:ext cx="3017520" cy="4114800"/>
           </a:xfrm>
           <a:prstGeom prst="rect">
             <a:avLst/>
@@ -9960,7 +7246,7 @@
           <a:lstStyle/>
           <a:p>
             <a:pPr algn="l">
-              <a:defRPr sz="1400" b="1">
+              <a:defRPr sz="1400" b="0">
                 <a:solidFill>
                   <a:srgbClr val="1F2328"/>
                 </a:solidFill>
@@ -9968,430 +7254,37 @@
               </a:defRPr>
             </a:pPr>
             <a:r>
-              <a:t>执行完上传命令后：</a:t>
-            </a:r>
-          </a:p>
-        </p:txBody>
-      </p:sp>
-      <p:sp>
-        <p:nvSpPr>
-          <p:cNvPr id="8" name="TextBox 7"/>
-          <p:cNvSpPr txBox="1"/>
-          <p:nvPr/>
-        </p:nvSpPr>
-        <p:spPr>
-          <a:xfrm>
-            <a:off x="8778240" y="1600200"/>
-            <a:ext cx="2926080" cy="320040"/>
-          </a:xfrm>
-          <a:prstGeom prst="rect">
-            <a:avLst/>
-          </a:prstGeom>
-          <a:noFill/>
-        </p:spPr>
-        <p:txBody>
-          <a:bodyPr wrap="square">
-            <a:spAutoFit/>
-          </a:bodyPr>
-          <a:lstStyle/>
-          <a:p>
-            <a:pPr algn="l">
-              <a:defRPr sz="1400" b="0">
-                <a:solidFill>
-                  <a:srgbClr val="1F2328"/>
-                </a:solidFill>
-                <a:latin typeface="Microsoft YaHei"/>
-              </a:defRPr>
-            </a:pPr>
-          </a:p>
-        </p:txBody>
-      </p:sp>
-      <p:sp>
-        <p:nvSpPr>
-          <p:cNvPr id="9" name="TextBox 8"/>
-          <p:cNvSpPr txBox="1"/>
-          <p:nvPr/>
-        </p:nvSpPr>
-        <p:spPr>
-          <a:xfrm>
-            <a:off x="8778240" y="1920240"/>
-            <a:ext cx="2926080" cy="320040"/>
-          </a:xfrm>
-          <a:prstGeom prst="rect">
-            <a:avLst/>
-          </a:prstGeom>
-          <a:noFill/>
-        </p:spPr>
-        <p:txBody>
-          <a:bodyPr wrap="square">
-            <a:spAutoFit/>
-          </a:bodyPr>
-          <a:lstStyle/>
-          <a:p>
-            <a:pPr algn="l">
-              <a:defRPr sz="1400" b="0">
-                <a:solidFill>
-                  <a:srgbClr val="1F2328"/>
-                </a:solidFill>
-                <a:latin typeface="Microsoft YaHei"/>
-              </a:defRPr>
-            </a:pPr>
-            <a:r>
-              <a:t>刷新页面，你会看到：</a:t>
-            </a:r>
-          </a:p>
-        </p:txBody>
-      </p:sp>
-      <p:sp>
-        <p:nvSpPr>
-          <p:cNvPr id="10" name="TextBox 9"/>
-          <p:cNvSpPr txBox="1"/>
-          <p:nvPr/>
-        </p:nvSpPr>
-        <p:spPr>
-          <a:xfrm>
-            <a:off x="8778240" y="2240280"/>
-            <a:ext cx="2926080" cy="320040"/>
-          </a:xfrm>
-          <a:prstGeom prst="rect">
-            <a:avLst/>
-          </a:prstGeom>
-          <a:noFill/>
-        </p:spPr>
-        <p:txBody>
-          <a:bodyPr wrap="square">
-            <a:spAutoFit/>
-          </a:bodyPr>
-          <a:lstStyle/>
-          <a:p>
-            <a:pPr algn="l">
-              <a:defRPr sz="1400" b="0">
-                <a:solidFill>
-                  <a:srgbClr val="1F2328"/>
-                </a:solidFill>
-                <a:latin typeface="Microsoft YaHei"/>
-              </a:defRPr>
-            </a:pPr>
-          </a:p>
-        </p:txBody>
-      </p:sp>
-      <p:sp>
-        <p:nvSpPr>
-          <p:cNvPr id="11" name="TextBox 10"/>
-          <p:cNvSpPr txBox="1"/>
-          <p:nvPr/>
-        </p:nvSpPr>
-        <p:spPr>
-          <a:xfrm>
-            <a:off x="8778240" y="2560320"/>
-            <a:ext cx="2926080" cy="320040"/>
-          </a:xfrm>
-          <a:prstGeom prst="rect">
-            <a:avLst/>
-          </a:prstGeom>
-          <a:noFill/>
-        </p:spPr>
-        <p:txBody>
-          <a:bodyPr wrap="square">
-            <a:spAutoFit/>
-          </a:bodyPr>
-          <a:lstStyle/>
-          <a:p>
-            <a:pPr algn="l">
-              <a:defRPr sz="1400" b="0">
-                <a:solidFill>
-                  <a:srgbClr val="1F2328"/>
-                </a:solidFill>
-                <a:latin typeface="Microsoft YaHei"/>
-              </a:defRPr>
-            </a:pPr>
-            <a:r>
-              <a:t>✅ 所有文件都出现了</a:t>
-            </a:r>
-          </a:p>
-        </p:txBody>
-      </p:sp>
-      <p:sp>
-        <p:nvSpPr>
-          <p:cNvPr id="12" name="TextBox 11"/>
-          <p:cNvSpPr txBox="1"/>
-          <p:nvPr/>
-        </p:nvSpPr>
-        <p:spPr>
-          <a:xfrm>
-            <a:off x="8778240" y="2880360"/>
-            <a:ext cx="2926080" cy="320040"/>
-          </a:xfrm>
-          <a:prstGeom prst="rect">
-            <a:avLst/>
-          </a:prstGeom>
-          <a:noFill/>
-        </p:spPr>
-        <p:txBody>
-          <a:bodyPr wrap="square">
-            <a:spAutoFit/>
-          </a:bodyPr>
-          <a:lstStyle/>
-          <a:p>
-            <a:pPr algn="l">
-              <a:defRPr sz="1400" b="0">
-                <a:solidFill>
-                  <a:srgbClr val="1F2328"/>
-                </a:solidFill>
-                <a:latin typeface="Microsoft YaHei"/>
-              </a:defRPr>
-            </a:pPr>
-            <a:r>
-              <a:t>  manifest.json</a:t>
-            </a:r>
-          </a:p>
-        </p:txBody>
-      </p:sp>
-      <p:sp>
-        <p:nvSpPr>
-          <p:cNvPr id="13" name="TextBox 12"/>
-          <p:cNvSpPr txBox="1"/>
-          <p:nvPr/>
-        </p:nvSpPr>
-        <p:spPr>
-          <a:xfrm>
-            <a:off x="8778240" y="3200400"/>
-            <a:ext cx="2926080" cy="320040"/>
-          </a:xfrm>
-          <a:prstGeom prst="rect">
-            <a:avLst/>
-          </a:prstGeom>
-          <a:noFill/>
-        </p:spPr>
-        <p:txBody>
-          <a:bodyPr wrap="square">
-            <a:spAutoFit/>
-          </a:bodyPr>
-          <a:lstStyle/>
-          <a:p>
-            <a:pPr algn="l">
-              <a:defRPr sz="1400" b="0">
-                <a:solidFill>
-                  <a:srgbClr val="1F2328"/>
-                </a:solidFill>
-                <a:latin typeface="Microsoft YaHei"/>
-              </a:defRPr>
-            </a:pPr>
-            <a:r>
-              <a:t>  content.js</a:t>
-            </a:r>
-          </a:p>
-        </p:txBody>
-      </p:sp>
-      <p:sp>
-        <p:nvSpPr>
-          <p:cNvPr id="14" name="TextBox 13"/>
-          <p:cNvSpPr txBox="1"/>
-          <p:nvPr/>
-        </p:nvSpPr>
-        <p:spPr>
-          <a:xfrm>
-            <a:off x="8778240" y="3520440"/>
-            <a:ext cx="2926080" cy="320040"/>
-          </a:xfrm>
-          <a:prstGeom prst="rect">
-            <a:avLst/>
-          </a:prstGeom>
-          <a:noFill/>
-        </p:spPr>
-        <p:txBody>
-          <a:bodyPr wrap="square">
-            <a:spAutoFit/>
-          </a:bodyPr>
-          <a:lstStyle/>
-          <a:p>
-            <a:pPr algn="l">
-              <a:defRPr sz="1400" b="0">
-                <a:solidFill>
-                  <a:srgbClr val="1F2328"/>
-                </a:solidFill>
-                <a:latin typeface="Microsoft YaHei"/>
-              </a:defRPr>
-            </a:pPr>
-            <a:r>
-              <a:t>  content.css</a:t>
-            </a:r>
-          </a:p>
-        </p:txBody>
-      </p:sp>
-      <p:sp>
-        <p:nvSpPr>
-          <p:cNvPr id="15" name="TextBox 14"/>
-          <p:cNvSpPr txBox="1"/>
-          <p:nvPr/>
-        </p:nvSpPr>
-        <p:spPr>
-          <a:xfrm>
-            <a:off x="8778240" y="3840480"/>
-            <a:ext cx="2926080" cy="320040"/>
-          </a:xfrm>
-          <a:prstGeom prst="rect">
-            <a:avLst/>
-          </a:prstGeom>
-          <a:noFill/>
-        </p:spPr>
-        <p:txBody>
-          <a:bodyPr wrap="square">
-            <a:spAutoFit/>
-          </a:bodyPr>
-          <a:lstStyle/>
-          <a:p>
-            <a:pPr algn="l">
-              <a:defRPr sz="1400" b="0">
-                <a:solidFill>
-                  <a:srgbClr val="1F2328"/>
-                </a:solidFill>
-                <a:latin typeface="Microsoft YaHei"/>
-              </a:defRPr>
-            </a:pPr>
-            <a:r>
-              <a:t>  popup.html / popup.js</a:t>
-            </a:r>
-          </a:p>
-        </p:txBody>
-      </p:sp>
-      <p:sp>
-        <p:nvSpPr>
-          <p:cNvPr id="16" name="TextBox 15"/>
-          <p:cNvSpPr txBox="1"/>
-          <p:nvPr/>
-        </p:nvSpPr>
-        <p:spPr>
-          <a:xfrm>
-            <a:off x="8778240" y="4160520"/>
-            <a:ext cx="2926080" cy="320040"/>
-          </a:xfrm>
-          <a:prstGeom prst="rect">
-            <a:avLst/>
-          </a:prstGeom>
-          <a:noFill/>
-        </p:spPr>
-        <p:txBody>
-          <a:bodyPr wrap="square">
-            <a:spAutoFit/>
-          </a:bodyPr>
-          <a:lstStyle/>
-          <a:p>
-            <a:pPr algn="l">
-              <a:defRPr sz="1400" b="0">
-                <a:solidFill>
-                  <a:srgbClr val="1F2328"/>
-                </a:solidFill>
-                <a:latin typeface="Microsoft YaHei"/>
-              </a:defRPr>
-            </a:pPr>
-          </a:p>
-        </p:txBody>
-      </p:sp>
-      <p:sp>
-        <p:nvSpPr>
-          <p:cNvPr id="17" name="TextBox 16"/>
-          <p:cNvSpPr txBox="1"/>
-          <p:nvPr/>
-        </p:nvSpPr>
-        <p:spPr>
-          <a:xfrm>
-            <a:off x="8778240" y="4480559"/>
-            <a:ext cx="2926080" cy="320040"/>
-          </a:xfrm>
-          <a:prstGeom prst="rect">
-            <a:avLst/>
-          </a:prstGeom>
-          <a:noFill/>
-        </p:spPr>
-        <p:txBody>
-          <a:bodyPr wrap="square">
-            <a:spAutoFit/>
-          </a:bodyPr>
-          <a:lstStyle/>
-          <a:p>
-            <a:pPr algn="l">
-              <a:defRPr sz="1400" b="0">
-                <a:solidFill>
-                  <a:srgbClr val="1F2328"/>
-                </a:solidFill>
-                <a:latin typeface="Microsoft YaHei"/>
-              </a:defRPr>
-            </a:pPr>
-            <a:r>
-              <a:t>✅ 有提交记录</a:t>
-            </a:r>
-          </a:p>
-        </p:txBody>
-      </p:sp>
-      <p:sp>
-        <p:nvSpPr>
-          <p:cNvPr id="18" name="TextBox 17"/>
-          <p:cNvSpPr txBox="1"/>
-          <p:nvPr/>
-        </p:nvSpPr>
-        <p:spPr>
-          <a:xfrm>
-            <a:off x="8778240" y="4800599"/>
-            <a:ext cx="2926080" cy="914400"/>
-          </a:xfrm>
-          <a:prstGeom prst="rect">
-            <a:avLst/>
-          </a:prstGeom>
-          <a:noFill/>
-        </p:spPr>
-        <p:txBody>
-          <a:bodyPr wrap="square">
-            <a:spAutoFit/>
-          </a:bodyPr>
-          <a:lstStyle/>
-          <a:p>
-            <a:pPr algn="l">
-              <a:defRPr sz="1100" b="0">
-                <a:solidFill>
-                  <a:srgbClr val="656D76"/>
-                </a:solidFill>
-                <a:latin typeface="Microsoft YaHei"/>
-              </a:defRPr>
-            </a:pPr>
-            <a:r>
-              <a:t>🎉 上传成功！</a:t>
-            </a:r>
-          </a:p>
-        </p:txBody>
-      </p:sp>
-      <p:sp>
-        <p:nvSpPr>
-          <p:cNvPr id="19" name="TextBox 18"/>
-          <p:cNvSpPr txBox="1"/>
-          <p:nvPr/>
-        </p:nvSpPr>
-        <p:spPr>
-          <a:xfrm>
-            <a:off x="5029200" y="6309360"/>
-            <a:ext cx="1828800" cy="274320"/>
-          </a:xfrm>
-          <a:prstGeom prst="rect">
-            <a:avLst/>
-          </a:prstGeom>
-          <a:noFill/>
-        </p:spPr>
-        <p:txBody>
-          <a:bodyPr wrap="square">
-            <a:spAutoFit/>
-          </a:bodyPr>
-          <a:lstStyle/>
-          <a:p>
-            <a:pPr algn="ctr">
-              <a:defRPr sz="1000" b="0">
-                <a:solidFill>
-                  <a:srgbClr val="656D76"/>
-                </a:solidFill>
-                <a:latin typeface="Microsoft YaHei"/>
-              </a:defRPr>
-            </a:pPr>
-            <a:r>
-              <a:t>⑦ / 12</a:t>
+              <a:t>Issues = 问题反馈区</a:t>
+            </a:r>
+            <a:br/>
+            <a:br/>
+            <a:r>
+              <a:t>别人可以用 Issues：</a:t>
+            </a:r>
+            <a:br/>
+            <a:r>
+              <a:t>• 🐛 报告 Bug</a:t>
+            </a:r>
+            <a:br/>
+            <a:r>
+              <a:t>• 💡 提建议</a:t>
+            </a:r>
+            <a:br/>
+            <a:r>
+              <a:t>• ❓ 问问题</a:t>
+            </a:r>
+            <a:br/>
+            <a:br/>
+            <a:r>
+              <a:t>你也可以用来：</a:t>
+            </a:r>
+            <a:br/>
+            <a:r>
+              <a:t>• 📝 记录待办</a:t>
+            </a:r>
+            <a:br/>
+            <a:r>
+              <a:t>• ✅ 追踪进度</a:t>
             </a:r>
           </a:p>
         </p:txBody>
@@ -10407,14 +7300,6 @@
 <file path=ppt/slides/slide9.xml><?xml version="1.0" encoding="utf-8"?>
 <p:sld xmlns:a="http://schemas.openxmlformats.org/drawingml/2006/main" xmlns:p="http://schemas.openxmlformats.org/presentationml/2006/main" xmlns:r="http://schemas.openxmlformats.org/officeDocument/2006/relationships">
   <p:cSld>
-    <p:bg>
-      <p:bgPr>
-        <a:solidFill>
-          <a:srgbClr val="F6F8FA"/>
-        </a:solidFill>
-        <a:effectLst/>
-      </p:bgPr>
-    </p:bg>
     <p:spTree>
       <p:nvGrpSpPr>
         <p:cNvPr id="1" name=""/>
@@ -10473,7 +7358,7 @@
         </p:nvSpPr>
         <p:spPr>
           <a:xfrm>
-            <a:off x="457200" y="73152"/>
+            <a:off x="365760" y="73152"/>
             <a:ext cx="10972800" cy="365760"/>
           </a:xfrm>
           <a:prstGeom prst="rect">
@@ -10496,14 +7381,14 @@
               </a:defRPr>
             </a:pPr>
             <a:r>
-              <a:t>步骤 ⑧：Issues 反馈区（可选）</a:t>
+              <a:t>步骤 ⑧：项目设置</a:t>
             </a:r>
           </a:p>
         </p:txBody>
       </p:sp>
       <p:pic>
         <p:nvPicPr>
-          <p:cNvPr id="4" name="Picture 3" descr="04_github_project.png"/>
+          <p:cNvPr id="4" name="Picture 3" descr="08_settings_mockup.png"/>
           <p:cNvPicPr>
             <a:picLocks noChangeAspect="1"/>
           </p:cNvPicPr>
@@ -10517,8 +7402,8 @@
         </p:blipFill>
         <p:spPr>
           <a:xfrm>
-            <a:off x="365760" y="594360"/>
-            <a:ext cx="8046720" cy="5669280"/>
+            <a:off x="274320" y="594360"/>
+            <a:ext cx="8046720" cy="5486400"/>
           </a:xfrm>
           <a:prstGeom prst="rect">
             <a:avLst/>
@@ -10533,8 +7418,8 @@
         </p:nvSpPr>
         <p:spPr>
           <a:xfrm>
-            <a:off x="8595360" y="594360"/>
-            <a:ext cx="3291840" cy="5669280"/>
+            <a:off x="8503920" y="594360"/>
+            <a:ext cx="3383280" cy="5852160"/>
           </a:xfrm>
           <a:prstGeom prst="roundRect">
             <a:avLst/>
@@ -10578,8 +7463,8 @@
         </p:nvSpPr>
         <p:spPr>
           <a:xfrm>
-            <a:off x="8778240" y="731520"/>
-            <a:ext cx="1828800" cy="320040"/>
+            <a:off x="8686800" y="731520"/>
+            <a:ext cx="1645920" cy="320040"/>
           </a:xfrm>
           <a:prstGeom prst="roundRect">
             <a:avLst/>
@@ -10631,8 +7516,8 @@
         </p:nvSpPr>
         <p:spPr>
           <a:xfrm>
-            <a:off x="8778240" y="1280160"/>
-            <a:ext cx="2926080" cy="320040"/>
+            <a:off x="8686800" y="1188720"/>
+            <a:ext cx="3017520" cy="4114800"/>
           </a:xfrm>
           <a:prstGeom prst="rect">
             <a:avLst/>
@@ -10646,7 +7531,7 @@
           <a:lstStyle/>
           <a:p>
             <a:pPr algn="l">
-              <a:defRPr sz="1400" b="1">
+              <a:defRPr sz="1400" b="0">
                 <a:solidFill>
                   <a:srgbClr val="1F2328"/>
                 </a:solidFill>
@@ -10654,394 +7539,37 @@
               </a:defRPr>
             </a:pPr>
             <a:r>
-              <a:t>Issues = 问题反馈区</a:t>
-            </a:r>
-          </a:p>
-        </p:txBody>
-      </p:sp>
-      <p:sp>
-        <p:nvSpPr>
-          <p:cNvPr id="8" name="TextBox 7"/>
-          <p:cNvSpPr txBox="1"/>
-          <p:nvPr/>
-        </p:nvSpPr>
-        <p:spPr>
-          <a:xfrm>
-            <a:off x="8778240" y="1600200"/>
-            <a:ext cx="2926080" cy="320040"/>
-          </a:xfrm>
-          <a:prstGeom prst="rect">
-            <a:avLst/>
-          </a:prstGeom>
-          <a:noFill/>
-        </p:spPr>
-        <p:txBody>
-          <a:bodyPr wrap="square">
-            <a:spAutoFit/>
-          </a:bodyPr>
-          <a:lstStyle/>
-          <a:p>
-            <a:pPr algn="l">
-              <a:defRPr sz="1400" b="0">
-                <a:solidFill>
-                  <a:srgbClr val="1F2328"/>
-                </a:solidFill>
-                <a:latin typeface="Microsoft YaHei"/>
-              </a:defRPr>
-            </a:pPr>
-          </a:p>
-        </p:txBody>
-      </p:sp>
-      <p:sp>
-        <p:nvSpPr>
-          <p:cNvPr id="9" name="TextBox 8"/>
-          <p:cNvSpPr txBox="1"/>
-          <p:nvPr/>
-        </p:nvSpPr>
-        <p:spPr>
-          <a:xfrm>
-            <a:off x="8778240" y="1920240"/>
-            <a:ext cx="2926080" cy="320040"/>
-          </a:xfrm>
-          <a:prstGeom prst="rect">
-            <a:avLst/>
-          </a:prstGeom>
-          <a:noFill/>
-        </p:spPr>
-        <p:txBody>
-          <a:bodyPr wrap="square">
-            <a:spAutoFit/>
-          </a:bodyPr>
-          <a:lstStyle/>
-          <a:p>
-            <a:pPr algn="l">
-              <a:defRPr sz="1400" b="0">
-                <a:solidFill>
-                  <a:srgbClr val="1F2328"/>
-                </a:solidFill>
-                <a:latin typeface="Microsoft YaHei"/>
-              </a:defRPr>
-            </a:pPr>
-            <a:r>
-              <a:t>别人可以在这里：</a:t>
-            </a:r>
-          </a:p>
-        </p:txBody>
-      </p:sp>
-      <p:sp>
-        <p:nvSpPr>
-          <p:cNvPr id="10" name="TextBox 9"/>
-          <p:cNvSpPr txBox="1"/>
-          <p:nvPr/>
-        </p:nvSpPr>
-        <p:spPr>
-          <a:xfrm>
-            <a:off x="8778240" y="2240280"/>
-            <a:ext cx="2926080" cy="320040"/>
-          </a:xfrm>
-          <a:prstGeom prst="rect">
-            <a:avLst/>
-          </a:prstGeom>
-          <a:noFill/>
-        </p:spPr>
-        <p:txBody>
-          <a:bodyPr wrap="square">
-            <a:spAutoFit/>
-          </a:bodyPr>
-          <a:lstStyle/>
-          <a:p>
-            <a:pPr algn="l">
-              <a:defRPr sz="1400" b="0">
-                <a:solidFill>
-                  <a:srgbClr val="1F2328"/>
-                </a:solidFill>
-                <a:latin typeface="Microsoft YaHei"/>
-              </a:defRPr>
-            </a:pPr>
-          </a:p>
-        </p:txBody>
-      </p:sp>
-      <p:sp>
-        <p:nvSpPr>
-          <p:cNvPr id="11" name="TextBox 10"/>
-          <p:cNvSpPr txBox="1"/>
-          <p:nvPr/>
-        </p:nvSpPr>
-        <p:spPr>
-          <a:xfrm>
-            <a:off x="8778240" y="2560320"/>
-            <a:ext cx="2926080" cy="320040"/>
-          </a:xfrm>
-          <a:prstGeom prst="rect">
-            <a:avLst/>
-          </a:prstGeom>
-          <a:noFill/>
-        </p:spPr>
-        <p:txBody>
-          <a:bodyPr wrap="square">
-            <a:spAutoFit/>
-          </a:bodyPr>
-          <a:lstStyle/>
-          <a:p>
-            <a:pPr algn="l">
-              <a:defRPr sz="1400" b="0">
-                <a:solidFill>
-                  <a:srgbClr val="1F2328"/>
-                </a:solidFill>
-                <a:latin typeface="Microsoft YaHei"/>
-              </a:defRPr>
-            </a:pPr>
-            <a:r>
-              <a:t>• 🐛 报告 Bug</a:t>
-            </a:r>
-          </a:p>
-        </p:txBody>
-      </p:sp>
-      <p:sp>
-        <p:nvSpPr>
-          <p:cNvPr id="12" name="TextBox 11"/>
-          <p:cNvSpPr txBox="1"/>
-          <p:nvPr/>
-        </p:nvSpPr>
-        <p:spPr>
-          <a:xfrm>
-            <a:off x="8778240" y="2880360"/>
-            <a:ext cx="2926080" cy="320040"/>
-          </a:xfrm>
-          <a:prstGeom prst="rect">
-            <a:avLst/>
-          </a:prstGeom>
-          <a:noFill/>
-        </p:spPr>
-        <p:txBody>
-          <a:bodyPr wrap="square">
-            <a:spAutoFit/>
-          </a:bodyPr>
-          <a:lstStyle/>
-          <a:p>
-            <a:pPr algn="l">
-              <a:defRPr sz="1400" b="0">
-                <a:solidFill>
-                  <a:srgbClr val="1F2328"/>
-                </a:solidFill>
-                <a:latin typeface="Microsoft YaHei"/>
-              </a:defRPr>
-            </a:pPr>
-            <a:r>
-              <a:t>• 💡 提建议</a:t>
-            </a:r>
-          </a:p>
-        </p:txBody>
-      </p:sp>
-      <p:sp>
-        <p:nvSpPr>
-          <p:cNvPr id="13" name="TextBox 12"/>
-          <p:cNvSpPr txBox="1"/>
-          <p:nvPr/>
-        </p:nvSpPr>
-        <p:spPr>
-          <a:xfrm>
-            <a:off x="8778240" y="3200400"/>
-            <a:ext cx="2926080" cy="320040"/>
-          </a:xfrm>
-          <a:prstGeom prst="rect">
-            <a:avLst/>
-          </a:prstGeom>
-          <a:noFill/>
-        </p:spPr>
-        <p:txBody>
-          <a:bodyPr wrap="square">
-            <a:spAutoFit/>
-          </a:bodyPr>
-          <a:lstStyle/>
-          <a:p>
-            <a:pPr algn="l">
-              <a:defRPr sz="1400" b="0">
-                <a:solidFill>
-                  <a:srgbClr val="1F2328"/>
-                </a:solidFill>
-                <a:latin typeface="Microsoft YaHei"/>
-              </a:defRPr>
-            </a:pPr>
-            <a:r>
-              <a:t>• ❓ 问问题</a:t>
-            </a:r>
-          </a:p>
-        </p:txBody>
-      </p:sp>
-      <p:sp>
-        <p:nvSpPr>
-          <p:cNvPr id="14" name="TextBox 13"/>
-          <p:cNvSpPr txBox="1"/>
-          <p:nvPr/>
-        </p:nvSpPr>
-        <p:spPr>
-          <a:xfrm>
-            <a:off x="8778240" y="3520440"/>
-            <a:ext cx="2926080" cy="320040"/>
-          </a:xfrm>
-          <a:prstGeom prst="rect">
-            <a:avLst/>
-          </a:prstGeom>
-          <a:noFill/>
-        </p:spPr>
-        <p:txBody>
-          <a:bodyPr wrap="square">
-            <a:spAutoFit/>
-          </a:bodyPr>
-          <a:lstStyle/>
-          <a:p>
-            <a:pPr algn="l">
-              <a:defRPr sz="1400" b="0">
-                <a:solidFill>
-                  <a:srgbClr val="1F2328"/>
-                </a:solidFill>
-                <a:latin typeface="Microsoft YaHei"/>
-              </a:defRPr>
-            </a:pPr>
-          </a:p>
-        </p:txBody>
-      </p:sp>
-      <p:sp>
-        <p:nvSpPr>
-          <p:cNvPr id="15" name="TextBox 14"/>
-          <p:cNvSpPr txBox="1"/>
-          <p:nvPr/>
-        </p:nvSpPr>
-        <p:spPr>
-          <a:xfrm>
-            <a:off x="8778240" y="3840480"/>
-            <a:ext cx="2926080" cy="320040"/>
-          </a:xfrm>
-          <a:prstGeom prst="rect">
-            <a:avLst/>
-          </a:prstGeom>
-          <a:noFill/>
-        </p:spPr>
-        <p:txBody>
-          <a:bodyPr wrap="square">
-            <a:spAutoFit/>
-          </a:bodyPr>
-          <a:lstStyle/>
-          <a:p>
-            <a:pPr algn="l">
-              <a:defRPr sz="1400" b="0">
-                <a:solidFill>
-                  <a:srgbClr val="1F2328"/>
-                </a:solidFill>
-                <a:latin typeface="Microsoft YaHei"/>
-              </a:defRPr>
-            </a:pPr>
-            <a:r>
-              <a:t>你也可以用来：</a:t>
-            </a:r>
-          </a:p>
-        </p:txBody>
-      </p:sp>
-      <p:sp>
-        <p:nvSpPr>
-          <p:cNvPr id="16" name="TextBox 15"/>
-          <p:cNvSpPr txBox="1"/>
-          <p:nvPr/>
-        </p:nvSpPr>
-        <p:spPr>
-          <a:xfrm>
-            <a:off x="8778240" y="4160520"/>
-            <a:ext cx="2926080" cy="320040"/>
-          </a:xfrm>
-          <a:prstGeom prst="rect">
-            <a:avLst/>
-          </a:prstGeom>
-          <a:noFill/>
-        </p:spPr>
-        <p:txBody>
-          <a:bodyPr wrap="square">
-            <a:spAutoFit/>
-          </a:bodyPr>
-          <a:lstStyle/>
-          <a:p>
-            <a:pPr algn="l">
-              <a:defRPr sz="1400" b="0">
-                <a:solidFill>
-                  <a:srgbClr val="1F2328"/>
-                </a:solidFill>
-                <a:latin typeface="Microsoft YaHei"/>
-              </a:defRPr>
-            </a:pPr>
-            <a:r>
-              <a:t>• 📝 记录待办</a:t>
-            </a:r>
-          </a:p>
-        </p:txBody>
-      </p:sp>
-      <p:sp>
-        <p:nvSpPr>
-          <p:cNvPr id="17" name="TextBox 16"/>
-          <p:cNvSpPr txBox="1"/>
-          <p:nvPr/>
-        </p:nvSpPr>
-        <p:spPr>
-          <a:xfrm>
-            <a:off x="8778240" y="4754880"/>
-            <a:ext cx="2926080" cy="914400"/>
-          </a:xfrm>
-          <a:prstGeom prst="rect">
-            <a:avLst/>
-          </a:prstGeom>
-          <a:noFill/>
-        </p:spPr>
-        <p:txBody>
-          <a:bodyPr wrap="square">
-            <a:spAutoFit/>
-          </a:bodyPr>
-          <a:lstStyle/>
-          <a:p>
-            <a:pPr algn="l">
-              <a:defRPr sz="1100" b="0">
-                <a:solidFill>
-                  <a:srgbClr val="656D76"/>
-                </a:solidFill>
-                <a:latin typeface="Microsoft YaHei"/>
-              </a:defRPr>
-            </a:pPr>
-            <a:r>
-              <a:t>💡 初学者可以先不用</a:t>
-            </a:r>
-          </a:p>
-        </p:txBody>
-      </p:sp>
-      <p:sp>
-        <p:nvSpPr>
-          <p:cNvPr id="18" name="TextBox 17"/>
-          <p:cNvSpPr txBox="1"/>
-          <p:nvPr/>
-        </p:nvSpPr>
-        <p:spPr>
-          <a:xfrm>
-            <a:off x="5029200" y="6309360"/>
-            <a:ext cx="1828800" cy="274320"/>
-          </a:xfrm>
-          <a:prstGeom prst="rect">
-            <a:avLst/>
-          </a:prstGeom>
-          <a:noFill/>
-        </p:spPr>
-        <p:txBody>
-          <a:bodyPr wrap="square">
-            <a:spAutoFit/>
-          </a:bodyPr>
-          <a:lstStyle/>
-          <a:p>
-            <a:pPr algn="ctr">
-              <a:defRPr sz="1000" b="0">
-                <a:solidFill>
-                  <a:srgbClr val="656D76"/>
-                </a:solidFill>
-                <a:latin typeface="Microsoft YaHei"/>
-              </a:defRPr>
-            </a:pPr>
-            <a:r>
-              <a:t>⑧ / 12</a:t>
+              <a:t>Settings → 修改项目配置</a:t>
+            </a:r>
+            <a:br/>
+            <a:br/>
+            <a:r>
+              <a:t>可以修改：</a:t>
+            </a:r>
+            <a:br/>
+            <a:r>
+              <a:t>• 项目名称</a:t>
+            </a:r>
+            <a:br/>
+            <a:r>
+              <a:t>• 项目描述</a:t>
+            </a:r>
+            <a:br/>
+            <a:r>
+              <a:t>• 主题</a:t>
+            </a:r>
+            <a:br/>
+            <a:br/>
+            <a:r>
+              <a:t>⚠️ 底部 Danger Zone</a:t>
+            </a:r>
+            <a:br/>
+            <a:r>
+              <a:t>"Delete this repository"</a:t>
+            </a:r>
+            <a:br/>
+            <a:r>
+              <a:t>= 删库跑路！不要乱点</a:t>
             </a:r>
           </a:p>
         </p:txBody>
